--- a/slides/Case-Tracker-Overview.pptx
+++ b/slides/Case-Tracker-Overview.pptx
@@ -19,9 +19,11 @@
     <p:sldId id="267" r:id="rId13"/>
     <p:sldId id="268" r:id="rId14"/>
     <p:sldId id="269" r:id="rId15"/>
+    <p:sldId id="270" r:id="rId16"/>
+    <p:sldId id="271" r:id="rId17"/>
   </p:sldIdLst>
   <p:notesMasterIdLst>
-    <p:notesMasterId r:id="rId16"/>
+    <p:notesMasterId r:id="rId18"/>
   </p:notesMasterIdLst>
   <p:sldSz cx="12192000" cy="6858000"/>
   <p:notesSz cx="6858000" cy="12192000"/>
@@ -979,6 +981,182 @@
             <a:fld id="{F7021451-1387-4CA6-816F-3879F97B5CBC}" type="slidenum">
               <a:rPr lang="en-US"/>
               <a:t>14</a:t>
+            </a:fld>
+            <a:endParaRPr lang="en-US"/>
+          </a:p>
+        </p:txBody>
+      </p:sp>
+    </p:spTree>
+    <p:extLst>
+      <p:ext uri="{BB962C8B-B14F-4D97-AF65-F5344CB8AC3E}">
+        <p14:creationId xmlns:p14="http://schemas.microsoft.com/office/powerpoint/2010/main" val="1024086991"/>
+      </p:ext>
+    </p:extLst>
+  </p:cSld>
+  <p:clrMapOvr>
+    <a:masterClrMapping/>
+  </p:clrMapOvr>
+</p:notes>
+</file>
+
+<file path=ppt/notesSlides/notesSlide15.xml><?xml version="1.0" encoding="utf-8"?>
+<p:notes xmlns:a="http://schemas.openxmlformats.org/drawingml/2006/main" xmlns:r="http://schemas.openxmlformats.org/officeDocument/2006/relationships" xmlns:p="http://schemas.openxmlformats.org/presentationml/2006/main">
+  <p:cSld>
+    <p:spTree>
+      <p:nvGrpSpPr>
+        <p:cNvPr id="1" name=""/>
+        <p:cNvGrpSpPr/>
+        <p:nvPr/>
+      </p:nvGrpSpPr>
+      <p:grpSpPr>
+        <a:xfrm>
+          <a:off x="0" y="0"/>
+          <a:ext cx="0" cy="0"/>
+          <a:chOff x="0" y="0"/>
+          <a:chExt cx="0" cy="0"/>
+        </a:xfrm>
+      </p:grpSpPr>
+      <p:sp>
+        <p:nvSpPr>
+          <p:cNvPr id="2" name="Slide Image Placeholder 1"/>
+          <p:cNvSpPr>
+            <a:spLocks noGrp="1" noRot="1" noChangeAspect="1"/>
+          </p:cNvSpPr>
+          <p:nvPr>
+            <p:ph type="sldImg"/>
+          </p:nvPr>
+        </p:nvSpPr>
+        <p:spPr/>
+      </p:sp>
+      <p:sp>
+        <p:nvSpPr>
+          <p:cNvPr id="3" name="Notes Placeholder 2"/>
+          <p:cNvSpPr>
+            <a:spLocks noGrp="1"/>
+          </p:cNvSpPr>
+          <p:nvPr>
+            <p:ph type="body" idx="1"/>
+          </p:nvPr>
+        </p:nvSpPr>
+        <p:spPr/>
+        <p:txBody>
+          <a:bodyPr/>
+          <a:lstStyle/>
+          <a:p>
+            <a:r>
+              <a:rPr lang="en-US" dirty="0"/>
+              <a:t/>
+            </a:r>
+            <a:endParaRPr lang="en-US" dirty="0"/>
+          </a:p>
+        </p:txBody>
+      </p:sp>
+      <p:sp>
+        <p:nvSpPr>
+          <p:cNvPr id="4" name="Slide Number Placeholder 3"/>
+          <p:cNvSpPr>
+            <a:spLocks noGrp="1"/>
+          </p:cNvSpPr>
+          <p:nvPr>
+            <p:ph type="sldNum" sz="quarter" idx="10"/>
+          </p:nvPr>
+        </p:nvSpPr>
+        <p:spPr/>
+        <p:txBody>
+          <a:bodyPr/>
+          <a:lstStyle/>
+          <a:p>
+            <a:fld id="{F7021451-1387-4CA6-816F-3879F97B5CBC}" type="slidenum">
+              <a:rPr lang="en-US"/>
+              <a:t>15</a:t>
+            </a:fld>
+            <a:endParaRPr lang="en-US"/>
+          </a:p>
+        </p:txBody>
+      </p:sp>
+    </p:spTree>
+    <p:extLst>
+      <p:ext uri="{BB962C8B-B14F-4D97-AF65-F5344CB8AC3E}">
+        <p14:creationId xmlns:p14="http://schemas.microsoft.com/office/powerpoint/2010/main" val="1024086991"/>
+      </p:ext>
+    </p:extLst>
+  </p:cSld>
+  <p:clrMapOvr>
+    <a:masterClrMapping/>
+  </p:clrMapOvr>
+</p:notes>
+</file>
+
+<file path=ppt/notesSlides/notesSlide16.xml><?xml version="1.0" encoding="utf-8"?>
+<p:notes xmlns:a="http://schemas.openxmlformats.org/drawingml/2006/main" xmlns:r="http://schemas.openxmlformats.org/officeDocument/2006/relationships" xmlns:p="http://schemas.openxmlformats.org/presentationml/2006/main">
+  <p:cSld>
+    <p:spTree>
+      <p:nvGrpSpPr>
+        <p:cNvPr id="1" name=""/>
+        <p:cNvGrpSpPr/>
+        <p:nvPr/>
+      </p:nvGrpSpPr>
+      <p:grpSpPr>
+        <a:xfrm>
+          <a:off x="0" y="0"/>
+          <a:ext cx="0" cy="0"/>
+          <a:chOff x="0" y="0"/>
+          <a:chExt cx="0" cy="0"/>
+        </a:xfrm>
+      </p:grpSpPr>
+      <p:sp>
+        <p:nvSpPr>
+          <p:cNvPr id="2" name="Slide Image Placeholder 1"/>
+          <p:cNvSpPr>
+            <a:spLocks noGrp="1" noRot="1" noChangeAspect="1"/>
+          </p:cNvSpPr>
+          <p:nvPr>
+            <p:ph type="sldImg"/>
+          </p:nvPr>
+        </p:nvSpPr>
+        <p:spPr/>
+      </p:sp>
+      <p:sp>
+        <p:nvSpPr>
+          <p:cNvPr id="3" name="Notes Placeholder 2"/>
+          <p:cNvSpPr>
+            <a:spLocks noGrp="1"/>
+          </p:cNvSpPr>
+          <p:nvPr>
+            <p:ph type="body" idx="1"/>
+          </p:nvPr>
+        </p:nvSpPr>
+        <p:spPr/>
+        <p:txBody>
+          <a:bodyPr/>
+          <a:lstStyle/>
+          <a:p>
+            <a:r>
+              <a:rPr lang="en-US" dirty="0"/>
+              <a:t/>
+            </a:r>
+            <a:endParaRPr lang="en-US" dirty="0"/>
+          </a:p>
+        </p:txBody>
+      </p:sp>
+      <p:sp>
+        <p:nvSpPr>
+          <p:cNvPr id="4" name="Slide Number Placeholder 3"/>
+          <p:cNvSpPr>
+            <a:spLocks noGrp="1"/>
+          </p:cNvSpPr>
+          <p:nvPr>
+            <p:ph type="sldNum" sz="quarter" idx="10"/>
+          </p:nvPr>
+        </p:nvSpPr>
+        <p:spPr/>
+        <p:txBody>
+          <a:bodyPr/>
+          <a:lstStyle/>
+          <a:p>
+            <a:fld id="{F7021451-1387-4CA6-816F-3879F97B5CBC}" type="slidenum">
+              <a:rPr lang="en-US"/>
+              <a:t>16</a:t>
             </a:fld>
             <a:endParaRPr lang="en-US"/>
           </a:p>
@@ -2222,7 +2400,7 @@
                 <a:ea typeface="Segoe UI" pitchFamily="34" charset="-122"/>
                 <a:cs typeface="Segoe UI" pitchFamily="34" charset="-120"/>
               </a:rPr>
-              <a:t>Internal prototype · click-through demo</a:t>
+              <a:t>Deployable for your team · PostgreSQL-backed · multi-operator · live Case Center sync</a:t>
             </a:r>
             <a:endParaRPr lang="en-US" sz="1100" dirty="0"/>
           </a:p>
@@ -2394,7 +2572,7 @@
                 <a:ea typeface="Segoe UI" pitchFamily="34" charset="-122"/>
                 <a:cs typeface="Segoe UI" pitchFamily="34" charset="-120"/>
               </a:rPr>
-              <a:t>Manage your own roster</a:t>
+              <a:t>Shift coverage at a glance</a:t>
             </a:r>
             <a:endParaRPr lang="en-US" sz="2600" dirty="0"/>
           </a:p>
@@ -2453,22 +2631,45 @@
                 <a:ea typeface="Segoe UI" pitchFamily="34" charset="-122"/>
                 <a:cs typeface="Segoe UI" pitchFamily="34" charset="-120"/>
               </a:rPr>
-              <a:t>Add and edit operators right in the app.</a:t>
+              <a:t>Day / Night rosters, handover stats, and a "view as" perspective switch.</a:t>
             </a:r>
             <a:endParaRPr lang="en-US" sz="1300" dirty="0"/>
           </a:p>
         </p:txBody>
       </p:sp>
-      <p:sp>
-        <p:nvSpPr>
-          <p:cNvPr id="8" name="Text 6"/>
-          <p:cNvSpPr/>
-          <p:nvPr/>
-        </p:nvSpPr>
-        <p:spPr>
-          <a:xfrm>
-            <a:off x="640080" y="1737360"/>
-            <a:ext cx="5120640" cy="4206240"/>
+      <p:pic>
+        <p:nvPicPr>
+          <p:cNvPr id="8" name="Image 0" descr="/Users/hsinglintsai/Documents/Claude/CC/threenine/.claude/worktrees/implement-review-fixes/slides/assets/shifts.png">    </p:cNvPr>
+          <p:cNvPicPr>
+            <a:picLocks noChangeAspect="1"/>
+          </p:cNvPicPr>
+          <p:nvPr/>
+        </p:nvPicPr>
+        <p:blipFill>
+          <a:blip r:embed="rId1"/>
+          <a:srcRect l="0" r="0" t="0" b="0"/>
+          <a:stretch/>
+        </p:blipFill>
+        <p:spPr>
+          <a:xfrm>
+            <a:off x="731520" y="1828800"/>
+            <a:ext cx="10698480" cy="1828800"/>
+          </a:xfrm>
+          <a:prstGeom prst="rect">
+            <a:avLst/>
+          </a:prstGeom>
+        </p:spPr>
+      </p:pic>
+      <p:sp>
+        <p:nvSpPr>
+          <p:cNvPr id="9" name="Text 6"/>
+          <p:cNvSpPr/>
+          <p:nvPr/>
+        </p:nvSpPr>
+        <p:spPr>
+          <a:xfrm>
+            <a:off x="640080" y="4206240"/>
+            <a:ext cx="10881360" cy="1463040"/>
           </a:xfrm>
           <a:prstGeom prst="rect">
             <a:avLst/>
@@ -2499,7 +2700,7 @@
                 <a:ea typeface="Segoe UI" pitchFamily="34" charset="-122"/>
                 <a:cs typeface="Segoe UI" pitchFamily="34" charset="-120"/>
               </a:rPr>
-              <a:t>Add/edit shifts and operators; IDs auto-suggest from names.</a:t>
+              <a:t>See who is on, what was handed over, and what still needs a note.</a:t>
             </a:r>
             <a:endParaRPr lang="en-US" sz="1550" dirty="0"/>
           </a:p>
@@ -2523,83 +2724,12 @@
                 <a:ea typeface="Segoe UI" pitchFamily="34" charset="-122"/>
                 <a:cs typeface="Segoe UI" pitchFamily="34" charset="-120"/>
               </a:rPr>
-              <a:t>Foolproof delete: reassign an operator's records or block — never orphan data.</a:t>
+              <a:t>Switch the active operator to see exactly what they see.</a:t>
             </a:r>
             <a:endParaRPr lang="en-US" sz="1550" dirty="0"/>
           </a:p>
-          <a:p>
-            <a:pPr marL="177800" indent="-177800">
-              <a:lnSpc>
-                <a:spcPct val="115000"/>
-              </a:lnSpc>
-              <a:spcAft>
-                <a:spcPts val="800"/>
-              </a:spcAft>
-              <a:buSzPct val="100000"/>
-              <a:buChar char="•"/>
-            </a:pPr>
-            <a:r>
-              <a:rPr lang="en-US" sz="1550" dirty="0">
-                <a:solidFill>
-                  <a:srgbClr val="111827"/>
-                </a:solidFill>
-                <a:latin typeface="Segoe UI" pitchFamily="34" charset="0"/>
-                <a:ea typeface="Segoe UI" pitchFamily="34" charset="-122"/>
-                <a:cs typeface="Segoe UI" pitchFamily="34" charset="-120"/>
-              </a:rPr>
-              <a:t>Can't delete the last operator; the default operator moves automatically.</a:t>
-            </a:r>
-            <a:endParaRPr lang="en-US" sz="1550" dirty="0"/>
-          </a:p>
-          <a:p>
-            <a:pPr marL="177800" indent="-177800">
-              <a:lnSpc>
-                <a:spcPct val="115000"/>
-              </a:lnSpc>
-              <a:spcAft>
-                <a:spcPts val="800"/>
-              </a:spcAft>
-              <a:buSzPct val="100000"/>
-              <a:buChar char="•"/>
-            </a:pPr>
-            <a:r>
-              <a:rPr lang="en-US" sz="1550" dirty="0">
-                <a:solidFill>
-                  <a:srgbClr val="111827"/>
-                </a:solidFill>
-                <a:latin typeface="Segoe UI" pitchFamily="34" charset="0"/>
-                <a:ea typeface="Segoe UI" pitchFamily="34" charset="-122"/>
-                <a:cs typeface="Segoe UI" pitchFamily="34" charset="-120"/>
-              </a:rPr>
-              <a:t>Generates the shifts.js snippet to make changes permanent.</a:t>
-            </a:r>
-            <a:endParaRPr lang="en-US" sz="1550" dirty="0"/>
-          </a:p>
-        </p:txBody>
-      </p:sp>
-      <p:pic>
-        <p:nvPicPr>
-          <p:cNvPr id="9" name="Image 0" descr="/home/user/threenine/slides/assets/editor.png">    </p:cNvPr>
-          <p:cNvPicPr>
-            <a:picLocks noChangeAspect="1"/>
-          </p:cNvPicPr>
-          <p:nvPr/>
-        </p:nvPicPr>
-        <p:blipFill>
-          <a:blip r:embed="rId1"/>
-          <a:srcRect l="0" r="0" t="0" b="0"/>
-          <a:stretch/>
-        </p:blipFill>
-        <p:spPr>
-          <a:xfrm>
-            <a:off x="5943600" y="1554480"/>
-            <a:ext cx="5669280" cy="4480560"/>
-          </a:xfrm>
-          <a:prstGeom prst="rect">
-            <a:avLst/>
-          </a:prstGeom>
-        </p:spPr>
-      </p:pic>
+        </p:txBody>
+      </p:sp>
     </p:spTree>
   </p:cSld>
   <p:clrMapOvr>
@@ -2766,7 +2896,7 @@
                 <a:ea typeface="Segoe UI" pitchFamily="34" charset="-122"/>
                 <a:cs typeface="Segoe UI" pitchFamily="34" charset="-120"/>
               </a:rPr>
-              <a:t>Reporting the workbook can't</a:t>
+              <a:t>Manage your own roster</a:t>
             </a:r>
             <a:endParaRPr lang="en-US" sz="2600" dirty="0"/>
           </a:p>
@@ -2825,45 +2955,22 @@
                 <a:ea typeface="Segoe UI" pitchFamily="34" charset="-122"/>
                 <a:cs typeface="Segoe UI" pitchFamily="34" charset="-120"/>
               </a:rPr>
-              <a:t>Every week, automatically.</a:t>
+              <a:t>Add and edit operators right in the app.</a:t>
             </a:r>
             <a:endParaRPr lang="en-US" sz="1300" dirty="0"/>
           </a:p>
         </p:txBody>
       </p:sp>
-      <p:pic>
-        <p:nvPicPr>
-          <p:cNvPr id="8" name="Image 0" descr="/home/user/threenine/slides/assets/archive.png">    </p:cNvPr>
-          <p:cNvPicPr>
-            <a:picLocks noChangeAspect="1"/>
-          </p:cNvPicPr>
-          <p:nvPr/>
-        </p:nvPicPr>
-        <p:blipFill>
-          <a:blip r:embed="rId1"/>
-          <a:srcRect l="0" r="0" t="0" b="0"/>
-          <a:stretch/>
-        </p:blipFill>
-        <p:spPr>
-          <a:xfrm>
-            <a:off x="731520" y="1828800"/>
-            <a:ext cx="10698480" cy="1737360"/>
-          </a:xfrm>
-          <a:prstGeom prst="rect">
-            <a:avLst/>
-          </a:prstGeom>
-        </p:spPr>
-      </p:pic>
-      <p:sp>
-        <p:nvSpPr>
-          <p:cNvPr id="9" name="Text 6"/>
-          <p:cNvSpPr/>
-          <p:nvPr/>
-        </p:nvSpPr>
-        <p:spPr>
-          <a:xfrm>
-            <a:off x="640080" y="4114800"/>
-            <a:ext cx="10881360" cy="1463040"/>
+      <p:sp>
+        <p:nvSpPr>
+          <p:cNvPr id="8" name="Text 6"/>
+          <p:cNvSpPr/>
+          <p:nvPr/>
+        </p:nvSpPr>
+        <p:spPr>
+          <a:xfrm>
+            <a:off x="640080" y="1737360"/>
+            <a:ext cx="5120640" cy="4206240"/>
           </a:xfrm>
           <a:prstGeom prst="rect">
             <a:avLst/>
@@ -2894,7 +3001,7 @@
                 <a:ea typeface="Segoe UI" pitchFamily="34" charset="-122"/>
                 <a:cs typeface="Segoe UI" pitchFamily="34" charset="-120"/>
               </a:rPr>
-              <a:t>Per-week totals: opened, closed, cancelled, carried-in, bounces.</a:t>
+              <a:t>Add/edit shifts and operators; IDs auto-suggest from names.</a:t>
             </a:r>
             <a:endParaRPr lang="en-US" sz="1550" dirty="0"/>
           </a:p>
@@ -2918,12 +3025,83 @@
                 <a:ea typeface="Segoe UI" pitchFamily="34" charset="-122"/>
                 <a:cs typeface="Segoe UI" pitchFamily="34" charset="-120"/>
               </a:rPr>
-              <a:t>Median time-on-us — track whether you're getting faster.</a:t>
+              <a:t>Foolproof delete: reassign an operator's records or block — never orphan data.</a:t>
             </a:r>
             <a:endParaRPr lang="en-US" sz="1550" dirty="0"/>
           </a:p>
-        </p:txBody>
-      </p:sp>
+          <a:p>
+            <a:pPr marL="177800" indent="-177800">
+              <a:lnSpc>
+                <a:spcPct val="115000"/>
+              </a:lnSpc>
+              <a:spcAft>
+                <a:spcPts val="800"/>
+              </a:spcAft>
+              <a:buSzPct val="100000"/>
+              <a:buChar char="•"/>
+            </a:pPr>
+            <a:r>
+              <a:rPr lang="en-US" sz="1550" dirty="0">
+                <a:solidFill>
+                  <a:srgbClr val="111827"/>
+                </a:solidFill>
+                <a:latin typeface="Segoe UI" pitchFamily="34" charset="0"/>
+                <a:ea typeface="Segoe UI" pitchFamily="34" charset="-122"/>
+                <a:cs typeface="Segoe UI" pitchFamily="34" charset="-120"/>
+              </a:rPr>
+              <a:t>Can't delete the last operator; the default operator moves automatically.</a:t>
+            </a:r>
+            <a:endParaRPr lang="en-US" sz="1550" dirty="0"/>
+          </a:p>
+          <a:p>
+            <a:pPr marL="177800" indent="-177800">
+              <a:lnSpc>
+                <a:spcPct val="115000"/>
+              </a:lnSpc>
+              <a:spcAft>
+                <a:spcPts val="800"/>
+              </a:spcAft>
+              <a:buSzPct val="100000"/>
+              <a:buChar char="•"/>
+            </a:pPr>
+            <a:r>
+              <a:rPr lang="en-US" sz="1550" dirty="0">
+                <a:solidFill>
+                  <a:srgbClr val="111827"/>
+                </a:solidFill>
+                <a:latin typeface="Segoe UI" pitchFamily="34" charset="0"/>
+                <a:ea typeface="Segoe UI" pitchFamily="34" charset="-122"/>
+                <a:cs typeface="Segoe UI" pitchFamily="34" charset="-120"/>
+              </a:rPr>
+              <a:t>Generates the shifts.js snippet to make changes permanent.</a:t>
+            </a:r>
+            <a:endParaRPr lang="en-US" sz="1550" dirty="0"/>
+          </a:p>
+        </p:txBody>
+      </p:sp>
+      <p:pic>
+        <p:nvPicPr>
+          <p:cNvPr id="9" name="Image 0" descr="/Users/hsinglintsai/Documents/Claude/CC/threenine/.claude/worktrees/implement-review-fixes/slides/assets/editor.png">    </p:cNvPr>
+          <p:cNvPicPr>
+            <a:picLocks noChangeAspect="1"/>
+          </p:cNvPicPr>
+          <p:nvPr/>
+        </p:nvPicPr>
+        <p:blipFill>
+          <a:blip r:embed="rId1"/>
+          <a:srcRect l="0" r="0" t="0" b="0"/>
+          <a:stretch/>
+        </p:blipFill>
+        <p:spPr>
+          <a:xfrm>
+            <a:off x="5943600" y="1554480"/>
+            <a:ext cx="5669280" cy="4480560"/>
+          </a:xfrm>
+          <a:prstGeom prst="rect">
+            <a:avLst/>
+          </a:prstGeom>
+        </p:spPr>
+      </p:pic>
     </p:spTree>
   </p:cSld>
   <p:clrMapOvr>
@@ -3090,7 +3268,7 @@
                 <a:ea typeface="Segoe UI" pitchFamily="34" charset="-122"/>
                 <a:cs typeface="Segoe UI" pitchFamily="34" charset="-120"/>
               </a:rPr>
-              <a:t>A clear, enforced lifecycle</a:t>
+              <a:t>Reporting the workbook can't</a:t>
             </a:r>
             <a:endParaRPr lang="en-US" sz="2600" dirty="0"/>
           </a:p>
@@ -3116,9 +3294,48 @@
           <a:ln/>
         </p:spPr>
       </p:sp>
+      <p:sp>
+        <p:nvSpPr>
+          <p:cNvPr id="7" name="Text 5"/>
+          <p:cNvSpPr/>
+          <p:nvPr/>
+        </p:nvSpPr>
+        <p:spPr>
+          <a:xfrm>
+            <a:off x="548640" y="1152144"/>
+            <a:ext cx="11064240" cy="365760"/>
+          </a:xfrm>
+          <a:prstGeom prst="rect">
+            <a:avLst/>
+          </a:prstGeom>
+          <a:noFill/>
+          <a:ln/>
+        </p:spPr>
+        <p:txBody>
+          <a:bodyPr wrap="square" rtlCol="0" anchor="ctr"/>
+          <a:lstStyle/>
+          <a:p>
+            <a:pPr indent="0" marL="0">
+              <a:buNone/>
+            </a:pPr>
+            <a:r>
+              <a:rPr lang="en-US" sz="1300" dirty="0">
+                <a:solidFill>
+                  <a:srgbClr val="6B7280"/>
+                </a:solidFill>
+                <a:latin typeface="Segoe UI" pitchFamily="34" charset="0"/>
+                <a:ea typeface="Segoe UI" pitchFamily="34" charset="-122"/>
+                <a:cs typeface="Segoe UI" pitchFamily="34" charset="-120"/>
+              </a:rPr>
+              <a:t>Every week, automatically.</a:t>
+            </a:r>
+            <a:endParaRPr lang="en-US" sz="1300" dirty="0"/>
+          </a:p>
+        </p:txBody>
+      </p:sp>
       <p:pic>
         <p:nvPicPr>
-          <p:cNvPr id="7" name="Image 0" descr="/home/user/threenine/slides/assets/flow.png">    </p:cNvPr>
+          <p:cNvPr id="8" name="Image 0" descr="/Users/hsinglintsai/Documents/Claude/CC/threenine/.claude/worktrees/implement-review-fixes/slides/assets/archive.png">    </p:cNvPr>
           <p:cNvPicPr>
             <a:picLocks noChangeAspect="1"/>
           </p:cNvPicPr>
@@ -3131,8 +3348,8 @@
         </p:blipFill>
         <p:spPr>
           <a:xfrm>
-            <a:off x="1463040" y="1371600"/>
-            <a:ext cx="9235440" cy="4480560"/>
+            <a:off x="731520" y="1828800"/>
+            <a:ext cx="10698480" cy="1737360"/>
           </a:xfrm>
           <a:prstGeom prst="rect">
             <a:avLst/>
@@ -3141,40 +3358,71 @@
       </p:pic>
       <p:sp>
         <p:nvSpPr>
-          <p:cNvPr id="8" name="Text 5"/>
-          <p:cNvSpPr/>
-          <p:nvPr/>
-        </p:nvSpPr>
-        <p:spPr>
-          <a:xfrm>
-            <a:off x="548640" y="5943600"/>
-            <a:ext cx="11064240" cy="365760"/>
-          </a:xfrm>
-          <a:prstGeom prst="rect">
-            <a:avLst/>
-          </a:prstGeom>
-          <a:noFill/>
-          <a:ln/>
-        </p:spPr>
-        <p:txBody>
-          <a:bodyPr wrap="square" rtlCol="0" anchor="ctr"/>
-          <a:lstStyle/>
-          <a:p>
-            <a:pPr algn="ctr" indent="0" marL="0">
-              <a:buNone/>
-            </a:pPr>
-            <a:r>
-              <a:rPr lang="en-US" sz="1200" dirty="0">
-                <a:solidFill>
-                  <a:srgbClr val="6B7280"/>
-                </a:solidFill>
-                <a:latin typeface="Segoe UI" pitchFamily="34" charset="0"/>
-                <a:ea typeface="Segoe UI" pitchFamily="34" charset="-122"/>
-                <a:cs typeface="Segoe UI" pitchFamily="34" charset="-120"/>
-              </a:rPr>
-              <a:t>New → Local FIT → HQ → Sanity Check → Closed, with pause/return and escalation paths.</a:t>
-            </a:r>
-            <a:endParaRPr lang="en-US" sz="1200" dirty="0"/>
+          <p:cNvPr id="9" name="Text 6"/>
+          <p:cNvSpPr/>
+          <p:nvPr/>
+        </p:nvSpPr>
+        <p:spPr>
+          <a:xfrm>
+            <a:off x="640080" y="4114800"/>
+            <a:ext cx="10881360" cy="1463040"/>
+          </a:xfrm>
+          <a:prstGeom prst="rect">
+            <a:avLst/>
+          </a:prstGeom>
+          <a:noFill/>
+          <a:ln/>
+        </p:spPr>
+        <p:txBody>
+          <a:bodyPr wrap="square" rtlCol="0" anchor="t"/>
+          <a:lstStyle/>
+          <a:p>
+            <a:pPr marL="177800" indent="-177800">
+              <a:lnSpc>
+                <a:spcPct val="115000"/>
+              </a:lnSpc>
+              <a:spcAft>
+                <a:spcPts val="800"/>
+              </a:spcAft>
+              <a:buSzPct val="100000"/>
+              <a:buChar char="•"/>
+            </a:pPr>
+            <a:r>
+              <a:rPr lang="en-US" sz="1550" dirty="0">
+                <a:solidFill>
+                  <a:srgbClr val="111827"/>
+                </a:solidFill>
+                <a:latin typeface="Segoe UI" pitchFamily="34" charset="0"/>
+                <a:ea typeface="Segoe UI" pitchFamily="34" charset="-122"/>
+                <a:cs typeface="Segoe UI" pitchFamily="34" charset="-120"/>
+              </a:rPr>
+              <a:t>Per-week totals: opened, closed, cancelled, carried-in, bounces.</a:t>
+            </a:r>
+            <a:endParaRPr lang="en-US" sz="1550" dirty="0"/>
+          </a:p>
+          <a:p>
+            <a:pPr marL="177800" indent="-177800">
+              <a:lnSpc>
+                <a:spcPct val="115000"/>
+              </a:lnSpc>
+              <a:spcAft>
+                <a:spcPts val="800"/>
+              </a:spcAft>
+              <a:buSzPct val="100000"/>
+              <a:buChar char="•"/>
+            </a:pPr>
+            <a:r>
+              <a:rPr lang="en-US" sz="1550" dirty="0">
+                <a:solidFill>
+                  <a:srgbClr val="111827"/>
+                </a:solidFill>
+                <a:latin typeface="Segoe UI" pitchFamily="34" charset="0"/>
+                <a:ea typeface="Segoe UI" pitchFamily="34" charset="-122"/>
+                <a:cs typeface="Segoe UI" pitchFamily="34" charset="-120"/>
+              </a:rPr>
+              <a:t>Median time-on-us — track whether you're getting faster.</a:t>
+            </a:r>
+            <a:endParaRPr lang="en-US" sz="1550" dirty="0"/>
           </a:p>
         </p:txBody>
       </p:sp>
@@ -3344,7 +3592,7 @@
                 <a:ea typeface="Segoe UI" pitchFamily="34" charset="-122"/>
                 <a:cs typeface="Segoe UI" pitchFamily="34" charset="-120"/>
               </a:rPr>
-              <a:t>Why switch</a:t>
+              <a:t>A clear, enforced lifecycle</a:t>
             </a:r>
             <a:endParaRPr lang="en-US" sz="2600" dirty="0"/>
           </a:p>
@@ -3370,70 +3618,39 @@
           <a:ln/>
         </p:spPr>
       </p:sp>
-      <p:sp>
-        <p:nvSpPr>
-          <p:cNvPr id="7" name="Shape 5"/>
-          <p:cNvSpPr/>
-          <p:nvPr/>
-        </p:nvSpPr>
-        <p:spPr>
-          <a:xfrm>
-            <a:off x="640080" y="1645920"/>
-            <a:ext cx="5349240" cy="4206240"/>
-          </a:xfrm>
-          <a:prstGeom prst="roundRect">
-            <a:avLst>
-              <a:gd name="adj" fmla="val 1739"/>
-            </a:avLst>
-          </a:prstGeom>
-          <a:solidFill>
-            <a:srgbClr val="FAFAFA"/>
-          </a:solidFill>
-          <a:ln w="12700">
-            <a:solidFill>
-              <a:srgbClr val="E5E7EB"/>
-            </a:solidFill>
-            <a:prstDash val="solid"/>
-          </a:ln>
-        </p:spPr>
-      </p:sp>
-      <p:sp>
-        <p:nvSpPr>
-          <p:cNvPr id="8" name="Shape 6"/>
-          <p:cNvSpPr/>
-          <p:nvPr/>
-        </p:nvSpPr>
-        <p:spPr>
-          <a:xfrm>
-            <a:off x="6199632" y="1645920"/>
-            <a:ext cx="5349240" cy="4206240"/>
-          </a:xfrm>
-          <a:prstGeom prst="roundRect">
-            <a:avLst>
-              <a:gd name="adj" fmla="val 1739"/>
-            </a:avLst>
-          </a:prstGeom>
-          <a:solidFill>
-            <a:srgbClr val="EFF6FF"/>
-          </a:solidFill>
-          <a:ln w="15875">
-            <a:solidFill>
-              <a:srgbClr val="2563EB"/>
-            </a:solidFill>
-            <a:prstDash val="solid"/>
-          </a:ln>
-        </p:spPr>
-      </p:sp>
-      <p:sp>
-        <p:nvSpPr>
-          <p:cNvPr id="9" name="Text 7"/>
-          <p:cNvSpPr/>
-          <p:nvPr/>
-        </p:nvSpPr>
-        <p:spPr>
-          <a:xfrm>
-            <a:off x="640080" y="1755648"/>
-            <a:ext cx="5349240" cy="365760"/>
+      <p:pic>
+        <p:nvPicPr>
+          <p:cNvPr id="7" name="Image 0" descr="/Users/hsinglintsai/Documents/Claude/CC/threenine/.claude/worktrees/implement-review-fixes/slides/assets/flow.png">    </p:cNvPr>
+          <p:cNvPicPr>
+            <a:picLocks noChangeAspect="1"/>
+          </p:cNvPicPr>
+          <p:nvPr/>
+        </p:nvPicPr>
+        <p:blipFill>
+          <a:blip r:embed="rId1"/>
+          <a:srcRect l="0" r="0" t="0" b="0"/>
+          <a:stretch/>
+        </p:blipFill>
+        <p:spPr>
+          <a:xfrm>
+            <a:off x="1463040" y="1371600"/>
+            <a:ext cx="9235440" cy="4480560"/>
+          </a:xfrm>
+          <a:prstGeom prst="rect">
+            <a:avLst/>
+          </a:prstGeom>
+        </p:spPr>
+      </p:pic>
+      <p:sp>
+        <p:nvSpPr>
+          <p:cNvPr id="8" name="Text 5"/>
+          <p:cNvSpPr/>
+          <p:nvPr/>
+        </p:nvSpPr>
+        <p:spPr>
+          <a:xfrm>
+            <a:off x="548640" y="5943600"/>
+            <a:ext cx="11064240" cy="365760"/>
           </a:xfrm>
           <a:prstGeom prst="rect">
             <a:avLst/>
@@ -3449,7 +3666,7 @@
               <a:buNone/>
             </a:pPr>
             <a:r>
-              <a:rPr lang="en-US" sz="1500" b="1" dirty="0">
+              <a:rPr lang="en-US" sz="1200" dirty="0">
                 <a:solidFill>
                   <a:srgbClr val="6B7280"/>
                 </a:solidFill>
@@ -3457,332 +3674,9 @@
                 <a:ea typeface="Segoe UI" pitchFamily="34" charset="-122"/>
                 <a:cs typeface="Segoe UI" pitchFamily="34" charset="-120"/>
               </a:rPr>
-              <a:t>Excel workbook</a:t>
-            </a:r>
-            <a:endParaRPr lang="en-US" sz="1500" dirty="0"/>
-          </a:p>
-        </p:txBody>
-      </p:sp>
-      <p:sp>
-        <p:nvSpPr>
-          <p:cNvPr id="10" name="Text 8"/>
-          <p:cNvSpPr/>
-          <p:nvPr/>
-        </p:nvSpPr>
-        <p:spPr>
-          <a:xfrm>
-            <a:off x="6199632" y="1755648"/>
-            <a:ext cx="5349240" cy="365760"/>
-          </a:xfrm>
-          <a:prstGeom prst="rect">
-            <a:avLst/>
-          </a:prstGeom>
-          <a:noFill/>
-          <a:ln/>
-        </p:spPr>
-        <p:txBody>
-          <a:bodyPr wrap="square" rtlCol="0" anchor="ctr"/>
-          <a:lstStyle/>
-          <a:p>
-            <a:pPr algn="ctr" indent="0" marL="0">
-              <a:buNone/>
-            </a:pPr>
-            <a:r>
-              <a:rPr lang="en-US" sz="1500" b="1" dirty="0">
-                <a:solidFill>
-                  <a:srgbClr val="2563EB"/>
-                </a:solidFill>
-                <a:latin typeface="Segoe UI" pitchFamily="34" charset="0"/>
-                <a:ea typeface="Segoe UI" pitchFamily="34" charset="-122"/>
-                <a:cs typeface="Segoe UI" pitchFamily="34" charset="-120"/>
-              </a:rPr>
-              <a:t>Case Tracker</a:t>
-            </a:r>
-            <a:endParaRPr lang="en-US" sz="1500" dirty="0"/>
-          </a:p>
-        </p:txBody>
-      </p:sp>
-      <p:sp>
-        <p:nvSpPr>
-          <p:cNvPr id="11" name="Text 9"/>
-          <p:cNvSpPr/>
-          <p:nvPr/>
-        </p:nvSpPr>
-        <p:spPr>
-          <a:xfrm>
-            <a:off x="868680" y="2286000"/>
-            <a:ext cx="4892040" cy="3383280"/>
-          </a:xfrm>
-          <a:prstGeom prst="rect">
-            <a:avLst/>
-          </a:prstGeom>
-          <a:noFill/>
-          <a:ln/>
-        </p:spPr>
-        <p:txBody>
-          <a:bodyPr wrap="square" rtlCol="0" anchor="t"/>
-          <a:lstStyle/>
-          <a:p>
-            <a:pPr marL="177800" indent="-177800">
-              <a:lnSpc>
-                <a:spcPct val="115000"/>
-              </a:lnSpc>
-              <a:spcAft>
-                <a:spcPts val="800"/>
-              </a:spcAft>
-              <a:buSzPct val="100000"/>
-              <a:buChar char="•"/>
-            </a:pPr>
-            <a:r>
-              <a:rPr lang="en-US" sz="1400" dirty="0">
-                <a:solidFill>
-                  <a:srgbClr val="6B7280"/>
-                </a:solidFill>
-                <a:latin typeface="Segoe UI" pitchFamily="34" charset="0"/>
-                <a:ea typeface="Segoe UI" pitchFamily="34" charset="-122"/>
-                <a:cs typeface="Segoe UI" pitchFamily="34" charset="-120"/>
-              </a:rPr>
-              <a:t>Free-form cells</a:t>
-            </a:r>
-            <a:endParaRPr lang="en-US" sz="1400" dirty="0"/>
-          </a:p>
-          <a:p>
-            <a:pPr marL="177800" indent="-177800">
-              <a:lnSpc>
-                <a:spcPct val="115000"/>
-              </a:lnSpc>
-              <a:spcAft>
-                <a:spcPts val="800"/>
-              </a:spcAft>
-              <a:buSzPct val="100000"/>
-              <a:buChar char="•"/>
-            </a:pPr>
-            <a:r>
-              <a:rPr lang="en-US" sz="1400" dirty="0">
-                <a:solidFill>
-                  <a:srgbClr val="6B7280"/>
-                </a:solidFill>
-                <a:latin typeface="Segoe UI" pitchFamily="34" charset="0"/>
-                <a:ea typeface="Segoe UI" pitchFamily="34" charset="-122"/>
-                <a:cs typeface="Segoe UI" pitchFamily="34" charset="-120"/>
-              </a:rPr>
-              <a:t>Remember what's next</a:t>
-            </a:r>
-            <a:endParaRPr lang="en-US" sz="1400" dirty="0"/>
-          </a:p>
-          <a:p>
-            <a:pPr marL="177800" indent="-177800">
-              <a:lnSpc>
-                <a:spcPct val="115000"/>
-              </a:lnSpc>
-              <a:spcAft>
-                <a:spcPts val="800"/>
-              </a:spcAft>
-              <a:buSzPct val="100000"/>
-              <a:buChar char="•"/>
-            </a:pPr>
-            <a:r>
-              <a:rPr lang="en-US" sz="1400" dirty="0">
-                <a:solidFill>
-                  <a:srgbClr val="6B7280"/>
-                </a:solidFill>
-                <a:latin typeface="Segoe UI" pitchFamily="34" charset="0"/>
-                <a:ea typeface="Segoe UI" pitchFamily="34" charset="-122"/>
-                <a:cs typeface="Segoe UI" pitchFamily="34" charset="-120"/>
-              </a:rPr>
-              <a:t>No SLA / owner-time visibility</a:t>
-            </a:r>
-            <a:endParaRPr lang="en-US" sz="1400" dirty="0"/>
-          </a:p>
-          <a:p>
-            <a:pPr marL="177800" indent="-177800">
-              <a:lnSpc>
-                <a:spcPct val="115000"/>
-              </a:lnSpc>
-              <a:spcAft>
-                <a:spcPts val="800"/>
-              </a:spcAft>
-              <a:buSzPct val="100000"/>
-              <a:buChar char="•"/>
-            </a:pPr>
-            <a:r>
-              <a:rPr lang="en-US" sz="1400" dirty="0">
-                <a:solidFill>
-                  <a:srgbClr val="6B7280"/>
-                </a:solidFill>
-                <a:latin typeface="Segoe UI" pitchFamily="34" charset="0"/>
-                <a:ea typeface="Segoe UI" pitchFamily="34" charset="-122"/>
-                <a:cs typeface="Segoe UI" pitchFamily="34" charset="-120"/>
-              </a:rPr>
-              <a:t>Verbal, unenforced handover</a:t>
-            </a:r>
-            <a:endParaRPr lang="en-US" sz="1400" dirty="0"/>
-          </a:p>
-          <a:p>
-            <a:pPr marL="177800" indent="-177800">
-              <a:lnSpc>
-                <a:spcPct val="115000"/>
-              </a:lnSpc>
-              <a:spcAft>
-                <a:spcPts val="800"/>
-              </a:spcAft>
-              <a:buSzPct val="100000"/>
-              <a:buChar char="•"/>
-            </a:pPr>
-            <a:r>
-              <a:rPr lang="en-US" sz="1400" dirty="0">
-                <a:solidFill>
-                  <a:srgbClr val="6B7280"/>
-                </a:solidFill>
-                <a:latin typeface="Segoe UI" pitchFamily="34" charset="0"/>
-                <a:ea typeface="Segoe UI" pitchFamily="34" charset="-122"/>
-                <a:cs typeface="Segoe UI" pitchFamily="34" charset="-120"/>
-              </a:rPr>
-              <a:t>Manual, no reporting</a:t>
-            </a:r>
-            <a:endParaRPr lang="en-US" sz="1400" dirty="0"/>
-          </a:p>
-        </p:txBody>
-      </p:sp>
-      <p:sp>
-        <p:nvSpPr>
-          <p:cNvPr id="12" name="Text 10"/>
-          <p:cNvSpPr/>
-          <p:nvPr/>
-        </p:nvSpPr>
-        <p:spPr>
-          <a:xfrm>
-            <a:off x="6428232" y="2286000"/>
-            <a:ext cx="4892040" cy="3383280"/>
-          </a:xfrm>
-          <a:prstGeom prst="rect">
-            <a:avLst/>
-          </a:prstGeom>
-          <a:noFill/>
-          <a:ln/>
-        </p:spPr>
-        <p:txBody>
-          <a:bodyPr wrap="square" rtlCol="0" anchor="t"/>
-          <a:lstStyle/>
-          <a:p>
-            <a:pPr marL="177800" indent="-177800">
-              <a:lnSpc>
-                <a:spcPct val="115000"/>
-              </a:lnSpc>
-              <a:spcAft>
-                <a:spcPts val="800"/>
-              </a:spcAft>
-              <a:buSzPct val="100000"/>
-              <a:buChar char="•"/>
-            </a:pPr>
-            <a:r>
-              <a:rPr lang="en-US" sz="1400" dirty="0">
-                <a:solidFill>
-                  <a:srgbClr val="111827"/>
-                </a:solidFill>
-                <a:latin typeface="Segoe UI" pitchFamily="34" charset="0"/>
-                <a:ea typeface="Segoe UI" pitchFamily="34" charset="-122"/>
-                <a:cs typeface="Segoe UI" pitchFamily="34" charset="-120"/>
-              </a:rPr>
-              <a:t>Structured, validated data</a:t>
-            </a:r>
-            <a:endParaRPr lang="en-US" sz="1400" dirty="0"/>
-          </a:p>
-          <a:p>
-            <a:pPr marL="177800" indent="-177800">
-              <a:lnSpc>
-                <a:spcPct val="115000"/>
-              </a:lnSpc>
-              <a:spcAft>
-                <a:spcPts val="800"/>
-              </a:spcAft>
-              <a:buSzPct val="100000"/>
-              <a:buChar char="•"/>
-            </a:pPr>
-            <a:r>
-              <a:rPr lang="en-US" sz="1400" dirty="0">
-                <a:solidFill>
-                  <a:srgbClr val="111827"/>
-                </a:solidFill>
-                <a:latin typeface="Segoe UI" pitchFamily="34" charset="0"/>
-                <a:ea typeface="Segoe UI" pitchFamily="34" charset="-122"/>
-                <a:cs typeface="Segoe UI" pitchFamily="34" charset="-120"/>
-              </a:rPr>
-              <a:t>A queue that tells you what's next</a:t>
-            </a:r>
-            <a:endParaRPr lang="en-US" sz="1400" dirty="0"/>
-          </a:p>
-          <a:p>
-            <a:pPr marL="177800" indent="-177800">
-              <a:lnSpc>
-                <a:spcPct val="115000"/>
-              </a:lnSpc>
-              <a:spcAft>
-                <a:spcPts val="800"/>
-              </a:spcAft>
-              <a:buSzPct val="100000"/>
-              <a:buChar char="•"/>
-            </a:pPr>
-            <a:r>
-              <a:rPr lang="en-US" sz="1400" dirty="0">
-                <a:solidFill>
-                  <a:srgbClr val="111827"/>
-                </a:solidFill>
-                <a:latin typeface="Segoe UI" pitchFamily="34" charset="0"/>
-                <a:ea typeface="Segoe UI" pitchFamily="34" charset="-122"/>
-                <a:cs typeface="Segoe UI" pitchFamily="34" charset="-120"/>
-              </a:rPr>
-              <a:t>SLA + separated FIT/HQ time + timeline</a:t>
-            </a:r>
-            <a:endParaRPr lang="en-US" sz="1400" dirty="0"/>
-          </a:p>
-          <a:p>
-            <a:pPr marL="177800" indent="-177800">
-              <a:lnSpc>
-                <a:spcPct val="115000"/>
-              </a:lnSpc>
-              <a:spcAft>
-                <a:spcPts val="800"/>
-              </a:spcAft>
-              <a:buSzPct val="100000"/>
-              <a:buChar char="•"/>
-            </a:pPr>
-            <a:r>
-              <a:rPr lang="en-US" sz="1400" dirty="0">
-                <a:solidFill>
-                  <a:srgbClr val="111827"/>
-                </a:solidFill>
-                <a:latin typeface="Segoe UI" pitchFamily="34" charset="0"/>
-                <a:ea typeface="Segoe UI" pitchFamily="34" charset="-122"/>
-                <a:cs typeface="Segoe UI" pitchFamily="34" charset="-120"/>
-              </a:rPr>
-              <a:t>Enforced, auditable shift handover</a:t>
-            </a:r>
-            <a:endParaRPr lang="en-US" sz="1400" dirty="0"/>
-          </a:p>
-          <a:p>
-            <a:pPr marL="177800" indent="-177800">
-              <a:lnSpc>
-                <a:spcPct val="115000"/>
-              </a:lnSpc>
-              <a:spcAft>
-                <a:spcPts val="800"/>
-              </a:spcAft>
-              <a:buSzPct val="100000"/>
-              <a:buChar char="•"/>
-            </a:pPr>
-            <a:r>
-              <a:rPr lang="en-US" sz="1400" dirty="0">
-                <a:solidFill>
-                  <a:srgbClr val="111827"/>
-                </a:solidFill>
-                <a:latin typeface="Segoe UI" pitchFamily="34" charset="0"/>
-                <a:ea typeface="Segoe UI" pitchFamily="34" charset="-122"/>
-                <a:cs typeface="Segoe UI" pitchFamily="34" charset="-120"/>
-              </a:rPr>
-              <a:t>Weekly dashboards · live Case Center data · zero-install web app</a:t>
-            </a:r>
-            <a:endParaRPr lang="en-US" sz="1400" dirty="0"/>
+              <a:t>New → Core Team → HQ → Sanity Check → Closed, with pause/return and escalation paths.</a:t>
+            </a:r>
+            <a:endParaRPr lang="en-US" sz="1200" dirty="0"/>
           </a:p>
         </p:txBody>
       </p:sp>
@@ -3826,8 +3720,148 @@
         </p:nvSpPr>
         <p:spPr>
           <a:xfrm>
-            <a:off x="0" y="0"/>
-            <a:ext cx="12191695" cy="256032"/>
+            <a:off x="548640" y="6419088"/>
+            <a:ext cx="11091672" cy="0"/>
+          </a:xfrm>
+          <a:prstGeom prst="line">
+            <a:avLst/>
+          </a:prstGeom>
+          <a:noFill/>
+          <a:ln w="12700">
+            <a:solidFill>
+              <a:srgbClr val="E5E7EB"/>
+            </a:solidFill>
+            <a:prstDash val="solid"/>
+          </a:ln>
+        </p:spPr>
+      </p:sp>
+      <p:sp>
+        <p:nvSpPr>
+          <p:cNvPr id="3" name="Text 1"/>
+          <p:cNvSpPr/>
+          <p:nvPr/>
+        </p:nvSpPr>
+        <p:spPr>
+          <a:xfrm>
+            <a:off x="548640" y="6437376"/>
+            <a:ext cx="9144000" cy="292608"/>
+          </a:xfrm>
+          <a:prstGeom prst="rect">
+            <a:avLst/>
+          </a:prstGeom>
+          <a:noFill/>
+          <a:ln/>
+        </p:spPr>
+        <p:txBody>
+          <a:bodyPr wrap="square" rtlCol="0" anchor="ctr"/>
+          <a:lstStyle/>
+          <a:p>
+            <a:pPr algn="l" indent="0" marL="0">
+              <a:buNone/>
+            </a:pPr>
+            <a:r>
+              <a:rPr lang="en-US" sz="900" dirty="0">
+                <a:solidFill>
+                  <a:srgbClr val="6B7280"/>
+                </a:solidFill>
+                <a:latin typeface="Segoe UI" pitchFamily="34" charset="0"/>
+                <a:ea typeface="Segoe UI" pitchFamily="34" charset="-122"/>
+                <a:cs typeface="Segoe UI" pitchFamily="34" charset="-120"/>
+              </a:rPr>
+              <a:t>Case Tracker  ·  https://hltsai9.github.io/threenine/</a:t>
+            </a:r>
+            <a:endParaRPr lang="en-US" sz="900" dirty="0"/>
+          </a:p>
+        </p:txBody>
+      </p:sp>
+      <p:sp>
+        <p:nvSpPr>
+          <p:cNvPr id="4" name="Text 2"/>
+          <p:cNvSpPr/>
+          <p:nvPr/>
+        </p:nvSpPr>
+        <p:spPr>
+          <a:xfrm>
+            <a:off x="10972800" y="6437376"/>
+            <a:ext cx="640080" cy="292608"/>
+          </a:xfrm>
+          <a:prstGeom prst="rect">
+            <a:avLst/>
+          </a:prstGeom>
+          <a:noFill/>
+          <a:ln/>
+        </p:spPr>
+        <p:txBody>
+          <a:bodyPr wrap="square" rtlCol="0" anchor="ctr"/>
+          <a:lstStyle/>
+          <a:p>
+            <a:pPr algn="r" indent="0" marL="0">
+              <a:buNone/>
+            </a:pPr>
+            <a:r>
+              <a:rPr lang="en-US" sz="900" dirty="0">
+                <a:solidFill>
+                  <a:srgbClr val="6B7280"/>
+                </a:solidFill>
+                <a:latin typeface="Segoe UI" pitchFamily="34" charset="0"/>
+                <a:ea typeface="Segoe UI" pitchFamily="34" charset="-122"/>
+                <a:cs typeface="Segoe UI" pitchFamily="34" charset="-120"/>
+              </a:rPr>
+              <a:t>13</a:t>
+            </a:r>
+            <a:endParaRPr lang="en-US" sz="900" dirty="0"/>
+          </a:p>
+        </p:txBody>
+      </p:sp>
+      <p:sp>
+        <p:nvSpPr>
+          <p:cNvPr id="5" name="Text 3"/>
+          <p:cNvSpPr/>
+          <p:nvPr/>
+        </p:nvSpPr>
+        <p:spPr>
+          <a:xfrm>
+            <a:off x="548640" y="411480"/>
+            <a:ext cx="11064240" cy="640080"/>
+          </a:xfrm>
+          <a:prstGeom prst="rect">
+            <a:avLst/>
+          </a:prstGeom>
+          <a:noFill/>
+          <a:ln/>
+        </p:spPr>
+        <p:txBody>
+          <a:bodyPr wrap="square" rtlCol="0" anchor="ctr"/>
+          <a:lstStyle/>
+          <a:p>
+            <a:pPr indent="0" marL="0">
+              <a:buNone/>
+            </a:pPr>
+            <a:r>
+              <a:rPr lang="en-US" sz="2600" b="1" dirty="0">
+                <a:solidFill>
+                  <a:srgbClr val="1F2937"/>
+                </a:solidFill>
+                <a:latin typeface="Segoe UI" pitchFamily="34" charset="0"/>
+                <a:ea typeface="Segoe UI" pitchFamily="34" charset="-122"/>
+                <a:cs typeface="Segoe UI" pitchFamily="34" charset="-120"/>
+              </a:rPr>
+              <a:t>Why switch</a:t>
+            </a:r>
+            <a:endParaRPr lang="en-US" sz="2600" dirty="0"/>
+          </a:p>
+        </p:txBody>
+      </p:sp>
+      <p:sp>
+        <p:nvSpPr>
+          <p:cNvPr id="6" name="Shape 4"/>
+          <p:cNvSpPr/>
+          <p:nvPr/>
+        </p:nvSpPr>
+        <p:spPr>
+          <a:xfrm>
+            <a:off x="566928" y="1078992"/>
+            <a:ext cx="1280160" cy="54864"/>
           </a:xfrm>
           <a:prstGeom prst="rect">
             <a:avLst/>
@@ -3840,14 +3874,68 @@
       </p:sp>
       <p:sp>
         <p:nvSpPr>
-          <p:cNvPr id="3" name="Text 1"/>
-          <p:cNvSpPr/>
-          <p:nvPr/>
-        </p:nvSpPr>
-        <p:spPr>
-          <a:xfrm>
-            <a:off x="0" y="1554480"/>
-            <a:ext cx="12191695" cy="731520"/>
+          <p:cNvPr id="7" name="Shape 5"/>
+          <p:cNvSpPr/>
+          <p:nvPr/>
+        </p:nvSpPr>
+        <p:spPr>
+          <a:xfrm>
+            <a:off x="640080" y="1645920"/>
+            <a:ext cx="5349240" cy="4206240"/>
+          </a:xfrm>
+          <a:prstGeom prst="roundRect">
+            <a:avLst>
+              <a:gd name="adj" fmla="val 1739"/>
+            </a:avLst>
+          </a:prstGeom>
+          <a:solidFill>
+            <a:srgbClr val="FAFAFA"/>
+          </a:solidFill>
+          <a:ln w="12700">
+            <a:solidFill>
+              <a:srgbClr val="E5E7EB"/>
+            </a:solidFill>
+            <a:prstDash val="solid"/>
+          </a:ln>
+        </p:spPr>
+      </p:sp>
+      <p:sp>
+        <p:nvSpPr>
+          <p:cNvPr id="8" name="Shape 6"/>
+          <p:cNvSpPr/>
+          <p:nvPr/>
+        </p:nvSpPr>
+        <p:spPr>
+          <a:xfrm>
+            <a:off x="6199632" y="1645920"/>
+            <a:ext cx="5349240" cy="4206240"/>
+          </a:xfrm>
+          <a:prstGeom prst="roundRect">
+            <a:avLst>
+              <a:gd name="adj" fmla="val 1739"/>
+            </a:avLst>
+          </a:prstGeom>
+          <a:solidFill>
+            <a:srgbClr val="EFF6FF"/>
+          </a:solidFill>
+          <a:ln w="15875">
+            <a:solidFill>
+              <a:srgbClr val="2563EB"/>
+            </a:solidFill>
+            <a:prstDash val="solid"/>
+          </a:ln>
+        </p:spPr>
+      </p:sp>
+      <p:sp>
+        <p:nvSpPr>
+          <p:cNvPr id="9" name="Text 7"/>
+          <p:cNvSpPr/>
+          <p:nvPr/>
+        </p:nvSpPr>
+        <p:spPr>
+          <a:xfrm>
+            <a:off x="640080" y="1755648"/>
+            <a:ext cx="5349240" cy="365760"/>
           </a:xfrm>
           <a:prstGeom prst="rect">
             <a:avLst/>
@@ -3863,30 +3951,30 @@
               <a:buNone/>
             </a:pPr>
             <a:r>
-              <a:rPr lang="en-US" sz="3600" b="1" dirty="0">
-                <a:solidFill>
-                  <a:srgbClr val="1F2937"/>
-                </a:solidFill>
-                <a:latin typeface="Segoe UI" pitchFamily="34" charset="0"/>
-                <a:ea typeface="Segoe UI" pitchFamily="34" charset="-122"/>
-                <a:cs typeface="Segoe UI" pitchFamily="34" charset="-120"/>
-              </a:rPr>
-              <a:t>Try it now</a:t>
-            </a:r>
-            <a:endParaRPr lang="en-US" sz="3600" dirty="0"/>
-          </a:p>
-        </p:txBody>
-      </p:sp>
-      <p:sp>
-        <p:nvSpPr>
-          <p:cNvPr id="4" name="Text 2"/>
-          <p:cNvSpPr/>
-          <p:nvPr/>
-        </p:nvSpPr>
-        <p:spPr>
-          <a:xfrm>
-            <a:off x="0" y="2468880"/>
-            <a:ext cx="12191695" cy="457200"/>
+              <a:rPr lang="en-US" sz="1500" b="1" dirty="0">
+                <a:solidFill>
+                  <a:srgbClr val="6B7280"/>
+                </a:solidFill>
+                <a:latin typeface="Segoe UI" pitchFamily="34" charset="0"/>
+                <a:ea typeface="Segoe UI" pitchFamily="34" charset="-122"/>
+                <a:cs typeface="Segoe UI" pitchFamily="34" charset="-120"/>
+              </a:rPr>
+              <a:t>Excel workbook</a:t>
+            </a:r>
+            <a:endParaRPr lang="en-US" sz="1500" dirty="0"/>
+          </a:p>
+        </p:txBody>
+      </p:sp>
+      <p:sp>
+        <p:nvSpPr>
+          <p:cNvPr id="10" name="Text 8"/>
+          <p:cNvSpPr/>
+          <p:nvPr/>
+        </p:nvSpPr>
+        <p:spPr>
+          <a:xfrm>
+            <a:off x="6199632" y="1755648"/>
+            <a:ext cx="5349240" cy="365760"/>
           </a:xfrm>
           <a:prstGeom prst="rect">
             <a:avLst/>
@@ -3902,7 +3990,7 @@
               <a:buNone/>
             </a:pPr>
             <a:r>
-              <a:rPr lang="en-US" sz="2000" dirty="0">
+              <a:rPr lang="en-US" sz="1500" b="1" dirty="0">
                 <a:solidFill>
                   <a:srgbClr val="2563EB"/>
                 </a:solidFill>
@@ -3910,22 +3998,22 @@
                 <a:ea typeface="Segoe UI" pitchFamily="34" charset="-122"/>
                 <a:cs typeface="Segoe UI" pitchFamily="34" charset="-120"/>
               </a:rPr>
-              <a:t>https://hltsai9.github.io/threenine/</a:t>
-            </a:r>
-            <a:endParaRPr lang="en-US" sz="2000" dirty="0"/>
-          </a:p>
-        </p:txBody>
-      </p:sp>
-      <p:sp>
-        <p:nvSpPr>
-          <p:cNvPr id="5" name="Text 3"/>
-          <p:cNvSpPr/>
-          <p:nvPr/>
-        </p:nvSpPr>
-        <p:spPr>
-          <a:xfrm>
-            <a:off x="2194560" y="3383280"/>
-            <a:ext cx="7772400" cy="2194560"/>
+              <a:t>Case Tracker</a:t>
+            </a:r>
+            <a:endParaRPr lang="en-US" sz="1500" dirty="0"/>
+          </a:p>
+        </p:txBody>
+      </p:sp>
+      <p:sp>
+        <p:nvSpPr>
+          <p:cNvPr id="11" name="Text 9"/>
+          <p:cNvSpPr/>
+          <p:nvPr/>
+        </p:nvSpPr>
+        <p:spPr>
+          <a:xfrm>
+            <a:off x="868680" y="2286000"/>
+            <a:ext cx="4892040" cy="3383280"/>
           </a:xfrm>
           <a:prstGeom prst="rect">
             <a:avLst/>
@@ -3948,17 +4036,17 @@
               <a:buChar char="•"/>
             </a:pPr>
             <a:r>
-              <a:rPr lang="en-US" sz="1600" dirty="0">
-                <a:solidFill>
-                  <a:srgbClr val="111827"/>
-                </a:solidFill>
-                <a:latin typeface="Segoe UI" pitchFamily="34" charset="0"/>
-                <a:ea typeface="Segoe UI" pitchFamily="34" charset="-122"/>
-                <a:cs typeface="Segoe UI" pitchFamily="34" charset="-120"/>
-              </a:rPr>
-              <a:t>Open the link — take the built-in guided tour; your changes persist in the browser.</a:t>
-            </a:r>
-            <a:endParaRPr lang="en-US" sz="1600" dirty="0"/>
+              <a:rPr lang="en-US" sz="1400" dirty="0">
+                <a:solidFill>
+                  <a:srgbClr val="6B7280"/>
+                </a:solidFill>
+                <a:latin typeface="Segoe UI" pitchFamily="34" charset="0"/>
+                <a:ea typeface="Segoe UI" pitchFamily="34" charset="-122"/>
+                <a:cs typeface="Segoe UI" pitchFamily="34" charset="-120"/>
+              </a:rPr>
+              <a:t>Free-form cells</a:t>
+            </a:r>
+            <a:endParaRPr lang="en-US" sz="1400" dirty="0"/>
           </a:p>
           <a:p>
             <a:pPr marL="177800" indent="-177800">
@@ -3972,17 +4060,17 @@
               <a:buChar char="•"/>
             </a:pPr>
             <a:r>
-              <a:rPr lang="en-US" sz="1600" dirty="0">
-                <a:solidFill>
-                  <a:srgbClr val="111827"/>
-                </a:solidFill>
-                <a:latin typeface="Segoe UI" pitchFamily="34" charset="0"/>
-                <a:ea typeface="Segoe UI" pitchFamily="34" charset="-122"/>
-                <a:cs typeface="Segoe UI" pitchFamily="34" charset="-120"/>
-              </a:rPr>
-              <a:t>For live data: run python3 local/serve.py on your laptop and open localhost.</a:t>
-            </a:r>
-            <a:endParaRPr lang="en-US" sz="1600" dirty="0"/>
+              <a:rPr lang="en-US" sz="1400" dirty="0">
+                <a:solidFill>
+                  <a:srgbClr val="6B7280"/>
+                </a:solidFill>
+                <a:latin typeface="Segoe UI" pitchFamily="34" charset="0"/>
+                <a:ea typeface="Segoe UI" pitchFamily="34" charset="-122"/>
+                <a:cs typeface="Segoe UI" pitchFamily="34" charset="-120"/>
+              </a:rPr>
+              <a:t>Remember what's next</a:t>
+            </a:r>
+            <a:endParaRPr lang="en-US" sz="1400" dirty="0"/>
           </a:p>
           <a:p>
             <a:pPr marL="177800" indent="-177800">
@@ -3996,6 +4084,1210 @@
               <a:buChar char="•"/>
             </a:pPr>
             <a:r>
+              <a:rPr lang="en-US" sz="1400" dirty="0">
+                <a:solidFill>
+                  <a:srgbClr val="6B7280"/>
+                </a:solidFill>
+                <a:latin typeface="Segoe UI" pitchFamily="34" charset="0"/>
+                <a:ea typeface="Segoe UI" pitchFamily="34" charset="-122"/>
+                <a:cs typeface="Segoe UI" pitchFamily="34" charset="-120"/>
+              </a:rPr>
+              <a:t>No SLA / owner-time visibility</a:t>
+            </a:r>
+            <a:endParaRPr lang="en-US" sz="1400" dirty="0"/>
+          </a:p>
+          <a:p>
+            <a:pPr marL="177800" indent="-177800">
+              <a:lnSpc>
+                <a:spcPct val="115000"/>
+              </a:lnSpc>
+              <a:spcAft>
+                <a:spcPts val="800"/>
+              </a:spcAft>
+              <a:buSzPct val="100000"/>
+              <a:buChar char="•"/>
+            </a:pPr>
+            <a:r>
+              <a:rPr lang="en-US" sz="1400" dirty="0">
+                <a:solidFill>
+                  <a:srgbClr val="6B7280"/>
+                </a:solidFill>
+                <a:latin typeface="Segoe UI" pitchFamily="34" charset="0"/>
+                <a:ea typeface="Segoe UI" pitchFamily="34" charset="-122"/>
+                <a:cs typeface="Segoe UI" pitchFamily="34" charset="-120"/>
+              </a:rPr>
+              <a:t>Verbal, unenforced handover</a:t>
+            </a:r>
+            <a:endParaRPr lang="en-US" sz="1400" dirty="0"/>
+          </a:p>
+          <a:p>
+            <a:pPr marL="177800" indent="-177800">
+              <a:lnSpc>
+                <a:spcPct val="115000"/>
+              </a:lnSpc>
+              <a:spcAft>
+                <a:spcPts val="800"/>
+              </a:spcAft>
+              <a:buSzPct val="100000"/>
+              <a:buChar char="•"/>
+            </a:pPr>
+            <a:r>
+              <a:rPr lang="en-US" sz="1400" dirty="0">
+                <a:solidFill>
+                  <a:srgbClr val="6B7280"/>
+                </a:solidFill>
+                <a:latin typeface="Segoe UI" pitchFamily="34" charset="0"/>
+                <a:ea typeface="Segoe UI" pitchFamily="34" charset="-122"/>
+                <a:cs typeface="Segoe UI" pitchFamily="34" charset="-120"/>
+              </a:rPr>
+              <a:t>Manual, no reporting</a:t>
+            </a:r>
+            <a:endParaRPr lang="en-US" sz="1400" dirty="0"/>
+          </a:p>
+        </p:txBody>
+      </p:sp>
+      <p:sp>
+        <p:nvSpPr>
+          <p:cNvPr id="12" name="Text 10"/>
+          <p:cNvSpPr/>
+          <p:nvPr/>
+        </p:nvSpPr>
+        <p:spPr>
+          <a:xfrm>
+            <a:off x="6428232" y="2286000"/>
+            <a:ext cx="4892040" cy="3383280"/>
+          </a:xfrm>
+          <a:prstGeom prst="rect">
+            <a:avLst/>
+          </a:prstGeom>
+          <a:noFill/>
+          <a:ln/>
+        </p:spPr>
+        <p:txBody>
+          <a:bodyPr wrap="square" rtlCol="0" anchor="t"/>
+          <a:lstStyle/>
+          <a:p>
+            <a:pPr marL="177800" indent="-177800">
+              <a:lnSpc>
+                <a:spcPct val="115000"/>
+              </a:lnSpc>
+              <a:spcAft>
+                <a:spcPts val="800"/>
+              </a:spcAft>
+              <a:buSzPct val="100000"/>
+              <a:buChar char="•"/>
+            </a:pPr>
+            <a:r>
+              <a:rPr lang="en-US" sz="1400" dirty="0">
+                <a:solidFill>
+                  <a:srgbClr val="111827"/>
+                </a:solidFill>
+                <a:latin typeface="Segoe UI" pitchFamily="34" charset="0"/>
+                <a:ea typeface="Segoe UI" pitchFamily="34" charset="-122"/>
+                <a:cs typeface="Segoe UI" pitchFamily="34" charset="-120"/>
+              </a:rPr>
+              <a:t>Structured, validated data</a:t>
+            </a:r>
+            <a:endParaRPr lang="en-US" sz="1400" dirty="0"/>
+          </a:p>
+          <a:p>
+            <a:pPr marL="177800" indent="-177800">
+              <a:lnSpc>
+                <a:spcPct val="115000"/>
+              </a:lnSpc>
+              <a:spcAft>
+                <a:spcPts val="800"/>
+              </a:spcAft>
+              <a:buSzPct val="100000"/>
+              <a:buChar char="•"/>
+            </a:pPr>
+            <a:r>
+              <a:rPr lang="en-US" sz="1400" dirty="0">
+                <a:solidFill>
+                  <a:srgbClr val="111827"/>
+                </a:solidFill>
+                <a:latin typeface="Segoe UI" pitchFamily="34" charset="0"/>
+                <a:ea typeface="Segoe UI" pitchFamily="34" charset="-122"/>
+                <a:cs typeface="Segoe UI" pitchFamily="34" charset="-120"/>
+              </a:rPr>
+              <a:t>A queue that tells you what's next</a:t>
+            </a:r>
+            <a:endParaRPr lang="en-US" sz="1400" dirty="0"/>
+          </a:p>
+          <a:p>
+            <a:pPr marL="177800" indent="-177800">
+              <a:lnSpc>
+                <a:spcPct val="115000"/>
+              </a:lnSpc>
+              <a:spcAft>
+                <a:spcPts val="800"/>
+              </a:spcAft>
+              <a:buSzPct val="100000"/>
+              <a:buChar char="•"/>
+            </a:pPr>
+            <a:r>
+              <a:rPr lang="en-US" sz="1400" dirty="0">
+                <a:solidFill>
+                  <a:srgbClr val="111827"/>
+                </a:solidFill>
+                <a:latin typeface="Segoe UI" pitchFamily="34" charset="0"/>
+                <a:ea typeface="Segoe UI" pitchFamily="34" charset="-122"/>
+                <a:cs typeface="Segoe UI" pitchFamily="34" charset="-120"/>
+              </a:rPr>
+              <a:t>SLA + separated Core/HQ time + timeline</a:t>
+            </a:r>
+            <a:endParaRPr lang="en-US" sz="1400" dirty="0"/>
+          </a:p>
+          <a:p>
+            <a:pPr marL="177800" indent="-177800">
+              <a:lnSpc>
+                <a:spcPct val="115000"/>
+              </a:lnSpc>
+              <a:spcAft>
+                <a:spcPts val="800"/>
+              </a:spcAft>
+              <a:buSzPct val="100000"/>
+              <a:buChar char="•"/>
+            </a:pPr>
+            <a:r>
+              <a:rPr lang="en-US" sz="1400" dirty="0">
+                <a:solidFill>
+                  <a:srgbClr val="111827"/>
+                </a:solidFill>
+                <a:latin typeface="Segoe UI" pitchFamily="34" charset="0"/>
+                <a:ea typeface="Segoe UI" pitchFamily="34" charset="-122"/>
+                <a:cs typeface="Segoe UI" pitchFamily="34" charset="-120"/>
+              </a:rPr>
+              <a:t>Enforced, auditable shift handover</a:t>
+            </a:r>
+            <a:endParaRPr lang="en-US" sz="1400" dirty="0"/>
+          </a:p>
+          <a:p>
+            <a:pPr marL="177800" indent="-177800">
+              <a:lnSpc>
+                <a:spcPct val="115000"/>
+              </a:lnSpc>
+              <a:spcAft>
+                <a:spcPts val="800"/>
+              </a:spcAft>
+              <a:buSzPct val="100000"/>
+              <a:buChar char="•"/>
+            </a:pPr>
+            <a:r>
+              <a:rPr lang="en-US" sz="1400" dirty="0">
+                <a:solidFill>
+                  <a:srgbClr val="111827"/>
+                </a:solidFill>
+                <a:latin typeface="Segoe UI" pitchFamily="34" charset="0"/>
+                <a:ea typeface="Segoe UI" pitchFamily="34" charset="-122"/>
+                <a:cs typeface="Segoe UI" pitchFamily="34" charset="-120"/>
+              </a:rPr>
+              <a:t>Weekly dashboards · live Case Center sync</a:t>
+            </a:r>
+            <a:endParaRPr lang="en-US" sz="1400" dirty="0"/>
+          </a:p>
+          <a:p>
+            <a:pPr marL="177800" indent="-177800">
+              <a:lnSpc>
+                <a:spcPct val="115000"/>
+              </a:lnSpc>
+              <a:spcAft>
+                <a:spcPts val="800"/>
+              </a:spcAft>
+              <a:buSzPct val="100000"/>
+              <a:buChar char="•"/>
+            </a:pPr>
+            <a:r>
+              <a:rPr lang="en-US" sz="1400" dirty="0">
+                <a:solidFill>
+                  <a:srgbClr val="111827"/>
+                </a:solidFill>
+                <a:latin typeface="Segoe UI" pitchFamily="34" charset="0"/>
+                <a:ea typeface="Segoe UI" pitchFamily="34" charset="-122"/>
+                <a:cs typeface="Segoe UI" pitchFamily="34" charset="-120"/>
+              </a:rPr>
+              <a:t>Shared across operators · PostgreSQL-backed · deployable (Render or your own server)</a:t>
+            </a:r>
+            <a:endParaRPr lang="en-US" sz="1400" dirty="0"/>
+          </a:p>
+        </p:txBody>
+      </p:sp>
+    </p:spTree>
+  </p:cSld>
+  <p:clrMapOvr>
+    <a:masterClrMapping/>
+  </p:clrMapOvr>
+</p:sld>
+</file>
+
+<file path=ppt/slides/slide15.xml><?xml version="1.0" encoding="utf-8"?>
+<p:sld xmlns:a="http://schemas.openxmlformats.org/drawingml/2006/main" xmlns:r="http://schemas.openxmlformats.org/officeDocument/2006/relationships" xmlns:p="http://schemas.openxmlformats.org/presentationml/2006/main">
+  <p:cSld name="Slide 15">
+    <p:bg>
+      <p:bgPr>
+        <a:solidFill>
+          <a:srgbClr val="FFFFFF"/>
+        </a:solidFill>
+      </p:bgPr>
+    </p:bg>
+    <p:spTree>
+      <p:nvGrpSpPr>
+        <p:cNvPr id="1" name=""/>
+        <p:cNvGrpSpPr/>
+        <p:nvPr/>
+      </p:nvGrpSpPr>
+      <p:grpSpPr>
+        <a:xfrm>
+          <a:off x="0" y="0"/>
+          <a:ext cx="0" cy="0"/>
+          <a:chOff x="0" y="0"/>
+          <a:chExt cx="0" cy="0"/>
+        </a:xfrm>
+      </p:grpSpPr>
+      <p:sp>
+        <p:nvSpPr>
+          <p:cNvPr id="2" name="Shape 0"/>
+          <p:cNvSpPr/>
+          <p:nvPr/>
+        </p:nvSpPr>
+        <p:spPr>
+          <a:xfrm>
+            <a:off x="548640" y="6419088"/>
+            <a:ext cx="11091672" cy="0"/>
+          </a:xfrm>
+          <a:prstGeom prst="line">
+            <a:avLst/>
+          </a:prstGeom>
+          <a:noFill/>
+          <a:ln w="12700">
+            <a:solidFill>
+              <a:srgbClr val="E5E7EB"/>
+            </a:solidFill>
+            <a:prstDash val="solid"/>
+          </a:ln>
+        </p:spPr>
+      </p:sp>
+      <p:sp>
+        <p:nvSpPr>
+          <p:cNvPr id="3" name="Text 1"/>
+          <p:cNvSpPr/>
+          <p:nvPr/>
+        </p:nvSpPr>
+        <p:spPr>
+          <a:xfrm>
+            <a:off x="548640" y="6437376"/>
+            <a:ext cx="9144000" cy="292608"/>
+          </a:xfrm>
+          <a:prstGeom prst="rect">
+            <a:avLst/>
+          </a:prstGeom>
+          <a:noFill/>
+          <a:ln/>
+        </p:spPr>
+        <p:txBody>
+          <a:bodyPr wrap="square" rtlCol="0" anchor="ctr"/>
+          <a:lstStyle/>
+          <a:p>
+            <a:pPr algn="l" indent="0" marL="0">
+              <a:buNone/>
+            </a:pPr>
+            <a:r>
+              <a:rPr lang="en-US" sz="900" dirty="0">
+                <a:solidFill>
+                  <a:srgbClr val="6B7280"/>
+                </a:solidFill>
+                <a:latin typeface="Segoe UI" pitchFamily="34" charset="0"/>
+                <a:ea typeface="Segoe UI" pitchFamily="34" charset="-122"/>
+                <a:cs typeface="Segoe UI" pitchFamily="34" charset="-120"/>
+              </a:rPr>
+              <a:t>Case Tracker  ·  https://hltsai9.github.io/threenine/</a:t>
+            </a:r>
+            <a:endParaRPr lang="en-US" sz="900" dirty="0"/>
+          </a:p>
+        </p:txBody>
+      </p:sp>
+      <p:sp>
+        <p:nvSpPr>
+          <p:cNvPr id="4" name="Text 2"/>
+          <p:cNvSpPr/>
+          <p:nvPr/>
+        </p:nvSpPr>
+        <p:spPr>
+          <a:xfrm>
+            <a:off x="10972800" y="6437376"/>
+            <a:ext cx="640080" cy="292608"/>
+          </a:xfrm>
+          <a:prstGeom prst="rect">
+            <a:avLst/>
+          </a:prstGeom>
+          <a:noFill/>
+          <a:ln/>
+        </p:spPr>
+        <p:txBody>
+          <a:bodyPr wrap="square" rtlCol="0" anchor="ctr"/>
+          <a:lstStyle/>
+          <a:p>
+            <a:pPr algn="r" indent="0" marL="0">
+              <a:buNone/>
+            </a:pPr>
+            <a:r>
+              <a:rPr lang="en-US" sz="900" dirty="0">
+                <a:solidFill>
+                  <a:srgbClr val="6B7280"/>
+                </a:solidFill>
+                <a:latin typeface="Segoe UI" pitchFamily="34" charset="0"/>
+                <a:ea typeface="Segoe UI" pitchFamily="34" charset="-122"/>
+                <a:cs typeface="Segoe UI" pitchFamily="34" charset="-120"/>
+              </a:rPr>
+              <a:t>14</a:t>
+            </a:r>
+            <a:endParaRPr lang="en-US" sz="900" dirty="0"/>
+          </a:p>
+        </p:txBody>
+      </p:sp>
+      <p:sp>
+        <p:nvSpPr>
+          <p:cNvPr id="5" name="Text 3"/>
+          <p:cNvSpPr/>
+          <p:nvPr/>
+        </p:nvSpPr>
+        <p:spPr>
+          <a:xfrm>
+            <a:off x="548640" y="411480"/>
+            <a:ext cx="11064240" cy="640080"/>
+          </a:xfrm>
+          <a:prstGeom prst="rect">
+            <a:avLst/>
+          </a:prstGeom>
+          <a:noFill/>
+          <a:ln/>
+        </p:spPr>
+        <p:txBody>
+          <a:bodyPr wrap="square" rtlCol="0" anchor="ctr"/>
+          <a:lstStyle/>
+          <a:p>
+            <a:pPr indent="0" marL="0">
+              <a:buNone/>
+            </a:pPr>
+            <a:r>
+              <a:rPr lang="en-US" sz="2600" b="1" dirty="0">
+                <a:solidFill>
+                  <a:srgbClr val="1F2937"/>
+                </a:solidFill>
+                <a:latin typeface="Segoe UI" pitchFamily="34" charset="0"/>
+                <a:ea typeface="Segoe UI" pitchFamily="34" charset="-122"/>
+                <a:cs typeface="Segoe UI" pitchFamily="34" charset="-120"/>
+              </a:rPr>
+              <a:t>Deploy it for your team</a:t>
+            </a:r>
+            <a:endParaRPr lang="en-US" sz="2600" dirty="0"/>
+          </a:p>
+        </p:txBody>
+      </p:sp>
+      <p:sp>
+        <p:nvSpPr>
+          <p:cNvPr id="6" name="Shape 4"/>
+          <p:cNvSpPr/>
+          <p:nvPr/>
+        </p:nvSpPr>
+        <p:spPr>
+          <a:xfrm>
+            <a:off x="566928" y="1078992"/>
+            <a:ext cx="1280160" cy="54864"/>
+          </a:xfrm>
+          <a:prstGeom prst="rect">
+            <a:avLst/>
+          </a:prstGeom>
+          <a:solidFill>
+            <a:srgbClr val="2563EB"/>
+          </a:solidFill>
+          <a:ln/>
+        </p:spPr>
+      </p:sp>
+      <p:sp>
+        <p:nvSpPr>
+          <p:cNvPr id="7" name="Text 5"/>
+          <p:cNvSpPr/>
+          <p:nvPr/>
+        </p:nvSpPr>
+        <p:spPr>
+          <a:xfrm>
+            <a:off x="548640" y="1152144"/>
+            <a:ext cx="11064240" cy="365760"/>
+          </a:xfrm>
+          <a:prstGeom prst="rect">
+            <a:avLst/>
+          </a:prstGeom>
+          <a:noFill/>
+          <a:ln/>
+        </p:spPr>
+        <p:txBody>
+          <a:bodyPr wrap="square" rtlCol="0" anchor="ctr"/>
+          <a:lstStyle/>
+          <a:p>
+            <a:pPr indent="0" marL="0">
+              <a:buNone/>
+            </a:pPr>
+            <a:r>
+              <a:rPr lang="en-US" sz="1300" dirty="0">
+                <a:solidFill>
+                  <a:srgbClr val="6B7280"/>
+                </a:solidFill>
+                <a:latin typeface="Segoe UI" pitchFamily="34" charset="0"/>
+                <a:ea typeface="Segoe UI" pitchFamily="34" charset="-122"/>
+                <a:cs typeface="Segoe UI" pitchFamily="34" charset="-120"/>
+              </a:rPr>
+              <a:t>From single-laptop demo to a shared, always-on board.</a:t>
+            </a:r>
+            <a:endParaRPr lang="en-US" sz="1300" dirty="0"/>
+          </a:p>
+        </p:txBody>
+      </p:sp>
+      <p:sp>
+        <p:nvSpPr>
+          <p:cNvPr id="8" name="Text 6"/>
+          <p:cNvSpPr/>
+          <p:nvPr/>
+        </p:nvSpPr>
+        <p:spPr>
+          <a:xfrm>
+            <a:off x="640080" y="1737360"/>
+            <a:ext cx="10881360" cy="2286000"/>
+          </a:xfrm>
+          <a:prstGeom prst="rect">
+            <a:avLst/>
+          </a:prstGeom>
+          <a:noFill/>
+          <a:ln/>
+        </p:spPr>
+        <p:txBody>
+          <a:bodyPr wrap="square" rtlCol="0" anchor="t"/>
+          <a:lstStyle/>
+          <a:p>
+            <a:pPr marL="177800" indent="-177800">
+              <a:lnSpc>
+                <a:spcPct val="115000"/>
+              </a:lnSpc>
+              <a:spcAft>
+                <a:spcPts val="800"/>
+              </a:spcAft>
+              <a:buSzPct val="100000"/>
+              <a:buChar char="•"/>
+            </a:pPr>
+            <a:r>
+              <a:rPr lang="en-US" sz="1550" dirty="0">
+                <a:solidFill>
+                  <a:srgbClr val="111827"/>
+                </a:solidFill>
+                <a:latin typeface="Segoe UI" pitchFamily="34" charset="0"/>
+                <a:ea typeface="Segoe UI" pitchFamily="34" charset="-122"/>
+                <a:cs typeface="Segoe UI" pitchFamily="34" charset="-120"/>
+              </a:rPr>
+              <a:t>PostgreSQL-backed: every operator signs in and sees the same live board, from any device.</a:t>
+            </a:r>
+            <a:endParaRPr lang="en-US" sz="1550" dirty="0"/>
+          </a:p>
+          <a:p>
+            <a:pPr marL="177800" indent="-177800">
+              <a:lnSpc>
+                <a:spcPct val="115000"/>
+              </a:lnSpc>
+              <a:spcAft>
+                <a:spcPts val="800"/>
+              </a:spcAft>
+              <a:buSzPct val="100000"/>
+              <a:buChar char="•"/>
+            </a:pPr>
+            <a:r>
+              <a:rPr lang="en-US" sz="1550" dirty="0">
+                <a:solidFill>
+                  <a:srgbClr val="111827"/>
+                </a:solidFill>
+                <a:latin typeface="Segoe UI" pitchFamily="34" charset="0"/>
+                <a:ea typeface="Segoe UI" pitchFamily="34" charset="-122"/>
+                <a:cs typeface="Segoe UI" pitchFamily="34" charset="-120"/>
+              </a:rPr>
+              <a:t>Secured: a token login gate in front of the API — case data is never left wide open.</a:t>
+            </a:r>
+            <a:endParaRPr lang="en-US" sz="1550" dirty="0"/>
+          </a:p>
+          <a:p>
+            <a:pPr marL="177800" indent="-177800">
+              <a:lnSpc>
+                <a:spcPct val="115000"/>
+              </a:lnSpc>
+              <a:spcAft>
+                <a:spcPts val="800"/>
+              </a:spcAft>
+              <a:buSzPct val="100000"/>
+              <a:buChar char="•"/>
+            </a:pPr>
+            <a:r>
+              <a:rPr lang="en-US" sz="1550" dirty="0">
+                <a:solidFill>
+                  <a:srgbClr val="111827"/>
+                </a:solidFill>
+                <a:latin typeface="Segoe UI" pitchFamily="34" charset="0"/>
+                <a:ea typeface="Segoe UI" pitchFamily="34" charset="-122"/>
+                <a:cs typeface="Segoe UI" pitchFamily="34" charset="-120"/>
+              </a:rPr>
+              <a:t>Periodic Case Center sync: a scheduled job pulls new cases into the DB automatically (systemd timer / cron).</a:t>
+            </a:r>
+            <a:endParaRPr lang="en-US" sz="1550" dirty="0"/>
+          </a:p>
+          <a:p>
+            <a:pPr marL="177800" indent="-177800">
+              <a:lnSpc>
+                <a:spcPct val="115000"/>
+              </a:lnSpc>
+              <a:spcAft>
+                <a:spcPts val="800"/>
+              </a:spcAft>
+              <a:buSzPct val="100000"/>
+              <a:buChar char="•"/>
+            </a:pPr>
+            <a:r>
+              <a:rPr lang="en-US" sz="1550" dirty="0">
+                <a:solidFill>
+                  <a:srgbClr val="111827"/>
+                </a:solidFill>
+                <a:latin typeface="Segoe UI" pitchFamily="34" charset="0"/>
+                <a:ea typeface="Segoe UI" pitchFamily="34" charset="-122"/>
+                <a:cs typeface="Segoe UI" pitchFamily="34" charset="-120"/>
+              </a:rPr>
+              <a:t>Host it your way: your own Ubuntu server, or a managed platform like Render.</a:t>
+            </a:r>
+            <a:endParaRPr lang="en-US" sz="1550" dirty="0"/>
+          </a:p>
+        </p:txBody>
+      </p:sp>
+      <p:sp>
+        <p:nvSpPr>
+          <p:cNvPr id="9" name="Shape 7"/>
+          <p:cNvSpPr/>
+          <p:nvPr/>
+        </p:nvSpPr>
+        <p:spPr>
+          <a:xfrm>
+            <a:off x="731520" y="4526280"/>
+            <a:ext cx="1965960" cy="868680"/>
+          </a:xfrm>
+          <a:prstGeom prst="roundRect">
+            <a:avLst>
+              <a:gd name="adj" fmla="val 8421"/>
+            </a:avLst>
+          </a:prstGeom>
+          <a:solidFill>
+            <a:srgbClr val="F7FAFC"/>
+          </a:solidFill>
+          <a:ln w="15875">
+            <a:solidFill>
+              <a:srgbClr val="E5E7EB"/>
+            </a:solidFill>
+            <a:prstDash val="solid"/>
+          </a:ln>
+        </p:spPr>
+      </p:sp>
+      <p:sp>
+        <p:nvSpPr>
+          <p:cNvPr id="10" name="Text 8"/>
+          <p:cNvSpPr/>
+          <p:nvPr/>
+        </p:nvSpPr>
+        <p:spPr>
+          <a:xfrm>
+            <a:off x="731520" y="4526280"/>
+            <a:ext cx="1965960" cy="868680"/>
+          </a:xfrm>
+          <a:prstGeom prst="rect">
+            <a:avLst/>
+          </a:prstGeom>
+          <a:noFill/>
+          <a:ln/>
+        </p:spPr>
+        <p:txBody>
+          <a:bodyPr wrap="square" rtlCol="0" anchor="ctr"/>
+          <a:lstStyle/>
+          <a:p>
+            <a:pPr algn="ctr" indent="0" marL="0">
+              <a:buNone/>
+            </a:pPr>
+            <a:r>
+              <a:rPr lang="en-US" sz="1200" b="1" dirty="0">
+                <a:solidFill>
+                  <a:srgbClr val="1F2937"/>
+                </a:solidFill>
+                <a:latin typeface="Segoe UI" pitchFamily="34" charset="0"/>
+                <a:ea typeface="Segoe UI" pitchFamily="34" charset="-122"/>
+                <a:cs typeface="Segoe UI" pitchFamily="34" charset="-120"/>
+              </a:rPr>
+              <a:t>Case Center</a:t>
+            </a:r>
+            <a:endParaRPr lang="en-US" sz="1200" dirty="0"/>
+          </a:p>
+        </p:txBody>
+      </p:sp>
+      <p:sp>
+        <p:nvSpPr>
+          <p:cNvPr id="11" name="Shape 9"/>
+          <p:cNvSpPr/>
+          <p:nvPr/>
+        </p:nvSpPr>
+        <p:spPr>
+          <a:xfrm>
+            <a:off x="2715768" y="4960620"/>
+            <a:ext cx="237744" cy="0"/>
+          </a:xfrm>
+          <a:prstGeom prst="line">
+            <a:avLst/>
+          </a:prstGeom>
+          <a:noFill/>
+          <a:ln w="22225">
+            <a:solidFill>
+              <a:srgbClr val="6B7280"/>
+            </a:solidFill>
+            <a:prstDash val="solid"/>
+            <a:tailEnd type="triangle"/>
+          </a:ln>
+        </p:spPr>
+      </p:sp>
+      <p:sp>
+        <p:nvSpPr>
+          <p:cNvPr id="12" name="Shape 10"/>
+          <p:cNvSpPr/>
+          <p:nvPr/>
+        </p:nvSpPr>
+        <p:spPr>
+          <a:xfrm>
+            <a:off x="2971800" y="4526280"/>
+            <a:ext cx="1965960" cy="868680"/>
+          </a:xfrm>
+          <a:prstGeom prst="roundRect">
+            <a:avLst>
+              <a:gd name="adj" fmla="val 8421"/>
+            </a:avLst>
+          </a:prstGeom>
+          <a:solidFill>
+            <a:srgbClr val="FFFBEB"/>
+          </a:solidFill>
+          <a:ln w="15875">
+            <a:solidFill>
+              <a:srgbClr val="D97706"/>
+            </a:solidFill>
+            <a:prstDash val="solid"/>
+          </a:ln>
+        </p:spPr>
+      </p:sp>
+      <p:sp>
+        <p:nvSpPr>
+          <p:cNvPr id="13" name="Text 11"/>
+          <p:cNvSpPr/>
+          <p:nvPr/>
+        </p:nvSpPr>
+        <p:spPr>
+          <a:xfrm>
+            <a:off x="2971800" y="4526280"/>
+            <a:ext cx="1965960" cy="868680"/>
+          </a:xfrm>
+          <a:prstGeom prst="rect">
+            <a:avLst/>
+          </a:prstGeom>
+          <a:noFill/>
+          <a:ln/>
+        </p:spPr>
+        <p:txBody>
+          <a:bodyPr wrap="square" rtlCol="0" anchor="ctr"/>
+          <a:lstStyle/>
+          <a:p>
+            <a:pPr algn="ctr" indent="0" marL="0">
+              <a:buNone/>
+            </a:pPr>
+            <a:r>
+              <a:rPr lang="en-US" sz="1200" b="1" dirty="0">
+                <a:solidFill>
+                  <a:srgbClr val="1F2937"/>
+                </a:solidFill>
+                <a:latin typeface="Segoe UI" pitchFamily="34" charset="0"/>
+                <a:ea typeface="Segoe UI" pitchFamily="34" charset="-122"/>
+                <a:cs typeface="Segoe UI" pitchFamily="34" charset="-120"/>
+              </a:rPr>
+              <a:t>Ingest (timer)</a:t>
+            </a:r>
+            <a:endParaRPr lang="en-US" sz="1200" dirty="0"/>
+          </a:p>
+        </p:txBody>
+      </p:sp>
+      <p:sp>
+        <p:nvSpPr>
+          <p:cNvPr id="14" name="Shape 12"/>
+          <p:cNvSpPr/>
+          <p:nvPr/>
+        </p:nvSpPr>
+        <p:spPr>
+          <a:xfrm>
+            <a:off x="4956048" y="4960620"/>
+            <a:ext cx="237744" cy="0"/>
+          </a:xfrm>
+          <a:prstGeom prst="line">
+            <a:avLst/>
+          </a:prstGeom>
+          <a:noFill/>
+          <a:ln w="22225">
+            <a:solidFill>
+              <a:srgbClr val="6B7280"/>
+            </a:solidFill>
+            <a:prstDash val="solid"/>
+            <a:tailEnd type="triangle"/>
+          </a:ln>
+        </p:spPr>
+      </p:sp>
+      <p:sp>
+        <p:nvSpPr>
+          <p:cNvPr id="15" name="Shape 13"/>
+          <p:cNvSpPr/>
+          <p:nvPr/>
+        </p:nvSpPr>
+        <p:spPr>
+          <a:xfrm>
+            <a:off x="5212080" y="4526280"/>
+            <a:ext cx="1965960" cy="868680"/>
+          </a:xfrm>
+          <a:prstGeom prst="roundRect">
+            <a:avLst>
+              <a:gd name="adj" fmla="val 8421"/>
+            </a:avLst>
+          </a:prstGeom>
+          <a:solidFill>
+            <a:srgbClr val="EFF6FF"/>
+          </a:solidFill>
+          <a:ln w="15875">
+            <a:solidFill>
+              <a:srgbClr val="2563EB"/>
+            </a:solidFill>
+            <a:prstDash val="solid"/>
+          </a:ln>
+        </p:spPr>
+      </p:sp>
+      <p:sp>
+        <p:nvSpPr>
+          <p:cNvPr id="16" name="Text 14"/>
+          <p:cNvSpPr/>
+          <p:nvPr/>
+        </p:nvSpPr>
+        <p:spPr>
+          <a:xfrm>
+            <a:off x="5212080" y="4526280"/>
+            <a:ext cx="1965960" cy="868680"/>
+          </a:xfrm>
+          <a:prstGeom prst="rect">
+            <a:avLst/>
+          </a:prstGeom>
+          <a:noFill/>
+          <a:ln/>
+        </p:spPr>
+        <p:txBody>
+          <a:bodyPr wrap="square" rtlCol="0" anchor="ctr"/>
+          <a:lstStyle/>
+          <a:p>
+            <a:pPr algn="ctr" indent="0" marL="0">
+              <a:buNone/>
+            </a:pPr>
+            <a:r>
+              <a:rPr lang="en-US" sz="1200" b="1" dirty="0">
+                <a:solidFill>
+                  <a:srgbClr val="1F2937"/>
+                </a:solidFill>
+                <a:latin typeface="Segoe UI" pitchFamily="34" charset="0"/>
+                <a:ea typeface="Segoe UI" pitchFamily="34" charset="-122"/>
+                <a:cs typeface="Segoe UI" pitchFamily="34" charset="-120"/>
+              </a:rPr>
+              <a:t>PostgreSQL</a:t>
+            </a:r>
+            <a:endParaRPr lang="en-US" sz="1200" dirty="0"/>
+          </a:p>
+        </p:txBody>
+      </p:sp>
+      <p:sp>
+        <p:nvSpPr>
+          <p:cNvPr id="17" name="Shape 15"/>
+          <p:cNvSpPr/>
+          <p:nvPr/>
+        </p:nvSpPr>
+        <p:spPr>
+          <a:xfrm>
+            <a:off x="7196328" y="4960620"/>
+            <a:ext cx="237744" cy="0"/>
+          </a:xfrm>
+          <a:prstGeom prst="line">
+            <a:avLst/>
+          </a:prstGeom>
+          <a:noFill/>
+          <a:ln w="22225">
+            <a:solidFill>
+              <a:srgbClr val="6B7280"/>
+            </a:solidFill>
+            <a:prstDash val="solid"/>
+            <a:tailEnd type="triangle"/>
+          </a:ln>
+        </p:spPr>
+      </p:sp>
+      <p:sp>
+        <p:nvSpPr>
+          <p:cNvPr id="18" name="Shape 16"/>
+          <p:cNvSpPr/>
+          <p:nvPr/>
+        </p:nvSpPr>
+        <p:spPr>
+          <a:xfrm>
+            <a:off x="7452360" y="4526280"/>
+            <a:ext cx="1965960" cy="868680"/>
+          </a:xfrm>
+          <a:prstGeom prst="roundRect">
+            <a:avLst>
+              <a:gd name="adj" fmla="val 8421"/>
+            </a:avLst>
+          </a:prstGeom>
+          <a:solidFill>
+            <a:srgbClr val="EFF6FF"/>
+          </a:solidFill>
+          <a:ln w="15875">
+            <a:solidFill>
+              <a:srgbClr val="2563EB"/>
+            </a:solidFill>
+            <a:prstDash val="solid"/>
+          </a:ln>
+        </p:spPr>
+      </p:sp>
+      <p:sp>
+        <p:nvSpPr>
+          <p:cNvPr id="19" name="Text 17"/>
+          <p:cNvSpPr/>
+          <p:nvPr/>
+        </p:nvSpPr>
+        <p:spPr>
+          <a:xfrm>
+            <a:off x="7452360" y="4526280"/>
+            <a:ext cx="1965960" cy="868680"/>
+          </a:xfrm>
+          <a:prstGeom prst="rect">
+            <a:avLst/>
+          </a:prstGeom>
+          <a:noFill/>
+          <a:ln/>
+        </p:spPr>
+        <p:txBody>
+          <a:bodyPr wrap="square" rtlCol="0" anchor="ctr"/>
+          <a:lstStyle/>
+          <a:p>
+            <a:pPr algn="ctr" indent="0" marL="0">
+              <a:buNone/>
+            </a:pPr>
+            <a:r>
+              <a:rPr lang="en-US" sz="1200" b="1" dirty="0">
+                <a:solidFill>
+                  <a:srgbClr val="1F2937"/>
+                </a:solidFill>
+                <a:latin typeface="Segoe UI" pitchFamily="34" charset="0"/>
+                <a:ea typeface="Segoe UI" pitchFamily="34" charset="-122"/>
+                <a:cs typeface="Segoe UI" pitchFamily="34" charset="-120"/>
+              </a:rPr>
+              <a:t>API + SPA</a:t>
+            </a:r>
+            <a:endParaRPr lang="en-US" sz="1200" dirty="0"/>
+          </a:p>
+        </p:txBody>
+      </p:sp>
+      <p:sp>
+        <p:nvSpPr>
+          <p:cNvPr id="20" name="Shape 18"/>
+          <p:cNvSpPr/>
+          <p:nvPr/>
+        </p:nvSpPr>
+        <p:spPr>
+          <a:xfrm>
+            <a:off x="9436608" y="4960620"/>
+            <a:ext cx="237744" cy="0"/>
+          </a:xfrm>
+          <a:prstGeom prst="line">
+            <a:avLst/>
+          </a:prstGeom>
+          <a:noFill/>
+          <a:ln w="22225">
+            <a:solidFill>
+              <a:srgbClr val="6B7280"/>
+            </a:solidFill>
+            <a:prstDash val="solid"/>
+            <a:tailEnd type="triangle"/>
+          </a:ln>
+        </p:spPr>
+      </p:sp>
+      <p:sp>
+        <p:nvSpPr>
+          <p:cNvPr id="21" name="Shape 19"/>
+          <p:cNvSpPr/>
+          <p:nvPr/>
+        </p:nvSpPr>
+        <p:spPr>
+          <a:xfrm>
+            <a:off x="9692640" y="4526280"/>
+            <a:ext cx="1965960" cy="868680"/>
+          </a:xfrm>
+          <a:prstGeom prst="roundRect">
+            <a:avLst>
+              <a:gd name="adj" fmla="val 8421"/>
+            </a:avLst>
+          </a:prstGeom>
+          <a:solidFill>
+            <a:srgbClr val="F7FAFC"/>
+          </a:solidFill>
+          <a:ln w="15875">
+            <a:solidFill>
+              <a:srgbClr val="E5E7EB"/>
+            </a:solidFill>
+            <a:prstDash val="solid"/>
+          </a:ln>
+        </p:spPr>
+      </p:sp>
+      <p:sp>
+        <p:nvSpPr>
+          <p:cNvPr id="22" name="Text 20"/>
+          <p:cNvSpPr/>
+          <p:nvPr/>
+        </p:nvSpPr>
+        <p:spPr>
+          <a:xfrm>
+            <a:off x="9692640" y="4526280"/>
+            <a:ext cx="1965960" cy="868680"/>
+          </a:xfrm>
+          <a:prstGeom prst="rect">
+            <a:avLst/>
+          </a:prstGeom>
+          <a:noFill/>
+          <a:ln/>
+        </p:spPr>
+        <p:txBody>
+          <a:bodyPr wrap="square" rtlCol="0" anchor="ctr"/>
+          <a:lstStyle/>
+          <a:p>
+            <a:pPr algn="ctr" indent="0" marL="0">
+              <a:buNone/>
+            </a:pPr>
+            <a:r>
+              <a:rPr lang="en-US" sz="1200" b="1" dirty="0">
+                <a:solidFill>
+                  <a:srgbClr val="1F2937"/>
+                </a:solidFill>
+                <a:latin typeface="Segoe UI" pitchFamily="34" charset="0"/>
+                <a:ea typeface="Segoe UI" pitchFamily="34" charset="-122"/>
+                <a:cs typeface="Segoe UI" pitchFamily="34" charset="-120"/>
+              </a:rPr>
+              <a:t>Operators</a:t>
+            </a:r>
+            <a:endParaRPr lang="en-US" sz="1200" dirty="0"/>
+          </a:p>
+        </p:txBody>
+      </p:sp>
+      <p:sp>
+        <p:nvSpPr>
+          <p:cNvPr id="23" name="Text 21"/>
+          <p:cNvSpPr/>
+          <p:nvPr/>
+        </p:nvSpPr>
+        <p:spPr>
+          <a:xfrm>
+            <a:off x="640080" y="5715000"/>
+            <a:ext cx="10881360" cy="320040"/>
+          </a:xfrm>
+          <a:prstGeom prst="rect">
+            <a:avLst/>
+          </a:prstGeom>
+          <a:noFill/>
+          <a:ln/>
+        </p:spPr>
+        <p:txBody>
+          <a:bodyPr wrap="square" rtlCol="0" anchor="ctr"/>
+          <a:lstStyle/>
+          <a:p>
+            <a:pPr algn="ctr" indent="0" marL="0">
+              <a:buNone/>
+            </a:pPr>
+            <a:r>
+              <a:rPr lang="en-US" sz="1100" i="1" dirty="0">
+                <a:solidFill>
+                  <a:srgbClr val="6B7280"/>
+                </a:solidFill>
+                <a:latin typeface="Segoe UI" pitchFamily="34" charset="0"/>
+                <a:ea typeface="Segoe UI" pitchFamily="34" charset="-122"/>
+                <a:cs typeface="Segoe UI" pitchFamily="34" charset="-120"/>
+              </a:rPr>
+              <a:t>Step-by-step self-host runbook: docs/SELF-HOST-UBUNTU.md</a:t>
+            </a:r>
+            <a:endParaRPr lang="en-US" sz="1100" dirty="0"/>
+          </a:p>
+        </p:txBody>
+      </p:sp>
+    </p:spTree>
+  </p:cSld>
+  <p:clrMapOvr>
+    <a:masterClrMapping/>
+  </p:clrMapOvr>
+</p:sld>
+</file>
+
+<file path=ppt/slides/slide16.xml><?xml version="1.0" encoding="utf-8"?>
+<p:sld xmlns:a="http://schemas.openxmlformats.org/drawingml/2006/main" xmlns:r="http://schemas.openxmlformats.org/officeDocument/2006/relationships" xmlns:p="http://schemas.openxmlformats.org/presentationml/2006/main">
+  <p:cSld name="Slide 16">
+    <p:bg>
+      <p:bgPr>
+        <a:solidFill>
+          <a:srgbClr val="FFFFFF"/>
+        </a:solidFill>
+      </p:bgPr>
+    </p:bg>
+    <p:spTree>
+      <p:nvGrpSpPr>
+        <p:cNvPr id="1" name=""/>
+        <p:cNvGrpSpPr/>
+        <p:nvPr/>
+      </p:nvGrpSpPr>
+      <p:grpSpPr>
+        <a:xfrm>
+          <a:off x="0" y="0"/>
+          <a:ext cx="0" cy="0"/>
+          <a:chOff x="0" y="0"/>
+          <a:chExt cx="0" cy="0"/>
+        </a:xfrm>
+      </p:grpSpPr>
+      <p:sp>
+        <p:nvSpPr>
+          <p:cNvPr id="2" name="Shape 0"/>
+          <p:cNvSpPr/>
+          <p:nvPr/>
+        </p:nvSpPr>
+        <p:spPr>
+          <a:xfrm>
+            <a:off x="0" y="0"/>
+            <a:ext cx="12191695" cy="256032"/>
+          </a:xfrm>
+          <a:prstGeom prst="rect">
+            <a:avLst/>
+          </a:prstGeom>
+          <a:solidFill>
+            <a:srgbClr val="2563EB"/>
+          </a:solidFill>
+          <a:ln/>
+        </p:spPr>
+      </p:sp>
+      <p:sp>
+        <p:nvSpPr>
+          <p:cNvPr id="3" name="Text 1"/>
+          <p:cNvSpPr/>
+          <p:nvPr/>
+        </p:nvSpPr>
+        <p:spPr>
+          <a:xfrm>
+            <a:off x="0" y="1554480"/>
+            <a:ext cx="12191695" cy="731520"/>
+          </a:xfrm>
+          <a:prstGeom prst="rect">
+            <a:avLst/>
+          </a:prstGeom>
+          <a:noFill/>
+          <a:ln/>
+        </p:spPr>
+        <p:txBody>
+          <a:bodyPr wrap="square" rtlCol="0" anchor="ctr"/>
+          <a:lstStyle/>
+          <a:p>
+            <a:pPr algn="ctr" indent="0" marL="0">
+              <a:buNone/>
+            </a:pPr>
+            <a:r>
+              <a:rPr lang="en-US" sz="3600" b="1" dirty="0">
+                <a:solidFill>
+                  <a:srgbClr val="1F2937"/>
+                </a:solidFill>
+                <a:latin typeface="Segoe UI" pitchFamily="34" charset="0"/>
+                <a:ea typeface="Segoe UI" pitchFamily="34" charset="-122"/>
+                <a:cs typeface="Segoe UI" pitchFamily="34" charset="-120"/>
+              </a:rPr>
+              <a:t>See it. Deploy it.</a:t>
+            </a:r>
+            <a:endParaRPr lang="en-US" sz="3600" dirty="0"/>
+          </a:p>
+        </p:txBody>
+      </p:sp>
+      <p:sp>
+        <p:nvSpPr>
+          <p:cNvPr id="4" name="Text 2"/>
+          <p:cNvSpPr/>
+          <p:nvPr/>
+        </p:nvSpPr>
+        <p:spPr>
+          <a:xfrm>
+            <a:off x="0" y="2468880"/>
+            <a:ext cx="12191695" cy="457200"/>
+          </a:xfrm>
+          <a:prstGeom prst="rect">
+            <a:avLst/>
+          </a:prstGeom>
+          <a:noFill/>
+          <a:ln/>
+        </p:spPr>
+        <p:txBody>
+          <a:bodyPr wrap="square" rtlCol="0" anchor="ctr"/>
+          <a:lstStyle/>
+          <a:p>
+            <a:pPr algn="ctr" indent="0" marL="0">
+              <a:buNone/>
+            </a:pPr>
+            <a:r>
+              <a:rPr lang="en-US" sz="2000" dirty="0">
+                <a:solidFill>
+                  <a:srgbClr val="2563EB"/>
+                </a:solidFill>
+                <a:latin typeface="Segoe UI" pitchFamily="34" charset="0"/>
+                <a:ea typeface="Segoe UI" pitchFamily="34" charset="-122"/>
+                <a:cs typeface="Segoe UI" pitchFamily="34" charset="-120"/>
+              </a:rPr>
+              <a:t>https://hltsai9.github.io/threenine/</a:t>
+            </a:r>
+            <a:endParaRPr lang="en-US" sz="2000" dirty="0"/>
+          </a:p>
+        </p:txBody>
+      </p:sp>
+      <p:sp>
+        <p:nvSpPr>
+          <p:cNvPr id="5" name="Text 3"/>
+          <p:cNvSpPr/>
+          <p:nvPr/>
+        </p:nvSpPr>
+        <p:spPr>
+          <a:xfrm>
+            <a:off x="2011680" y="3383280"/>
+            <a:ext cx="8138160" cy="2194560"/>
+          </a:xfrm>
+          <a:prstGeom prst="rect">
+            <a:avLst/>
+          </a:prstGeom>
+          <a:noFill/>
+          <a:ln/>
+        </p:spPr>
+        <p:txBody>
+          <a:bodyPr wrap="square" rtlCol="0" anchor="t"/>
+          <a:lstStyle/>
+          <a:p>
+            <a:pPr marL="177800" indent="-177800">
+              <a:lnSpc>
+                <a:spcPct val="115000"/>
+              </a:lnSpc>
+              <a:spcAft>
+                <a:spcPts val="800"/>
+              </a:spcAft>
+              <a:buSzPct val="100000"/>
+              <a:buChar char="•"/>
+            </a:pPr>
+            <a:r>
               <a:rPr lang="en-US" sz="1600" dirty="0">
                 <a:solidFill>
                   <a:srgbClr val="111827"/>
@@ -4004,7 +5296,55 @@
                 <a:ea typeface="Segoe UI" pitchFamily="34" charset="-122"/>
                 <a:cs typeface="Segoe UI" pitchFamily="34" charset="-120"/>
               </a:rPr>
-              <a:t>Feedback welcome — this is a working prototype, not a mockup.</a:t>
+              <a:t>Try the live demo — open the link and take the built-in guided tour.</a:t>
+            </a:r>
+            <a:endParaRPr lang="en-US" sz="1600" dirty="0"/>
+          </a:p>
+          <a:p>
+            <a:pPr marL="177800" indent="-177800">
+              <a:lnSpc>
+                <a:spcPct val="115000"/>
+              </a:lnSpc>
+              <a:spcAft>
+                <a:spcPts val="800"/>
+              </a:spcAft>
+              <a:buSzPct val="100000"/>
+              <a:buChar char="•"/>
+            </a:pPr>
+            <a:r>
+              <a:rPr lang="en-US" sz="1600" dirty="0">
+                <a:solidFill>
+                  <a:srgbClr val="111827"/>
+                </a:solidFill>
+                <a:latin typeface="Segoe UI" pitchFamily="34" charset="0"/>
+                <a:ea typeface="Segoe UI" pitchFamily="34" charset="-122"/>
+                <a:cs typeface="Segoe UI" pitchFamily="34" charset="-120"/>
+              </a:rPr>
+              <a:t>Deploy for your team — Postgres + token login + periodic Case Center sync, on Render or your own Ubuntu server.</a:t>
+            </a:r>
+            <a:endParaRPr lang="en-US" sz="1600" dirty="0"/>
+          </a:p>
+          <a:p>
+            <a:pPr marL="177800" indent="-177800">
+              <a:lnSpc>
+                <a:spcPct val="115000"/>
+              </a:lnSpc>
+              <a:spcAft>
+                <a:spcPts val="800"/>
+              </a:spcAft>
+              <a:buSzPct val="100000"/>
+              <a:buChar char="•"/>
+            </a:pPr>
+            <a:r>
+              <a:rPr lang="en-US" sz="1600" dirty="0">
+                <a:solidFill>
+                  <a:srgbClr val="111827"/>
+                </a:solidFill>
+                <a:latin typeface="Segoe UI" pitchFamily="34" charset="0"/>
+                <a:ea typeface="Segoe UI" pitchFamily="34" charset="-122"/>
+                <a:cs typeface="Segoe UI" pitchFamily="34" charset="-120"/>
+              </a:rPr>
+              <a:t>Step-by-step runbook: docs/SELF-HOST-UBUNTU.md. Feedback welcome — it's a working tool, not a mockup.</a:t>
             </a:r>
             <a:endParaRPr lang="en-US" sz="1600" dirty="0"/>
           </a:p>
@@ -4619,7 +5959,7 @@
       </p:sp>
       <p:pic>
         <p:nvPicPr>
-          <p:cNvPr id="7" name="Image 0" descr="/home/user/threenine/slides/assets/board.png">    </p:cNvPr>
+          <p:cNvPr id="7" name="Image 0" descr="/Users/hsinglintsai/Documents/Claude/CC/threenine/.claude/worktrees/implement-review-fixes/slides/assets/board.png">    </p:cNvPr>
           <p:cNvPicPr>
             <a:picLocks noChangeAspect="1"/>
           </p:cNvPicPr>
@@ -4673,7 +6013,7 @@
                 <a:ea typeface="Segoe UI" pitchFamily="34" charset="-122"/>
                 <a:cs typeface="Segoe UI" pitchFamily="34" charset="-120"/>
               </a:rPr>
-              <a:t>Columns = where the case really is · top band = what you're working · everything happens here.</a:t>
+              <a:t>Your Picked workspace + the Hand-off Route Board — where every case is, live from Case Center.</a:t>
             </a:r>
             <a:endParaRPr lang="en-US" sz="1200" dirty="0"/>
           </a:p>
@@ -4845,7 +6185,7 @@
                 <a:ea typeface="Segoe UI" pitchFamily="34" charset="-122"/>
                 <a:cs typeface="Segoe UI" pitchFamily="34" charset="-120"/>
               </a:rPr>
-              <a:t>Two statuses per case</a:t>
+              <a:t>The Hand-off Route Board</a:t>
             </a:r>
             <a:endParaRPr lang="en-US" sz="2600" dirty="0"/>
           </a:p>
@@ -4904,7 +6244,7 @@
                 <a:ea typeface="Segoe UI" pitchFamily="34" charset="-122"/>
                 <a:cs typeface="Segoe UI" pitchFamily="34" charset="-120"/>
               </a:rPr>
-              <a:t>The real state, and how you're handling it — on one board.</a:t>
+              <a:t>See where every case actually is — and where it still needs to go.</a:t>
             </a:r>
             <a:endParaRPr lang="en-US" sz="1300" dirty="0"/>
           </a:p>
@@ -4918,8 +6258,8 @@
         </p:nvSpPr>
         <p:spPr>
           <a:xfrm>
-            <a:off x="640080" y="1737360"/>
-            <a:ext cx="6949440" cy="4206240"/>
+            <a:off x="640080" y="1691640"/>
+            <a:ext cx="10881360" cy="2103120"/>
           </a:xfrm>
           <a:prstGeom prst="rect">
             <a:avLst/>
@@ -4950,7 +6290,7 @@
                 <a:ea typeface="Segoe UI" pitchFamily="34" charset="-122"/>
                 <a:cs typeface="Segoe UI" pitchFamily="34" charset="-120"/>
               </a:rPr>
-              <a:t>Columns = Case Center status (the real, external state).</a:t>
+              <a:t>One strip across User → Core Team → HQ. The dot sits where Case Center says the case is now.</a:t>
             </a:r>
             <a:endParaRPr lang="en-US" sz="1550" dirty="0"/>
           </a:p>
@@ -4974,7 +6314,7 @@
                 <a:ea typeface="Segoe UI" pitchFamily="34" charset="-122"/>
                 <a:cs typeface="Segoe UI" pitchFamily="34" charset="-120"/>
               </a:rPr>
-              <a:t>Rows = your handling: "My queue" (working now) vs "Backlog".</a:t>
+              <a:t>A dashed "watch" ring = parked there, keeping an eye; a moving arrow = it should move (your intent).</a:t>
             </a:r>
             <a:endParaRPr lang="en-US" sz="1550" dirty="0"/>
           </a:p>
@@ -4998,7 +6338,7 @@
                 <a:ea typeface="Segoe UI" pitchFamily="34" charset="-122"/>
                 <a:cs typeface="Segoe UI" pitchFamily="34" charset="-120"/>
               </a:rPr>
-              <a:t>+ Queue lifts a card into your top band — your starred work, in context.</a:t>
+              <a:t>Scheduled hand-offs (weekend / retry / escalate) carry a deadline; the board never hides the real location.</a:t>
             </a:r>
             <a:endParaRPr lang="en-US" sz="1550" dirty="0"/>
           </a:p>
@@ -5022,35 +6362,334 @@
                 <a:ea typeface="Segoe UI" pitchFamily="34" charset="-122"/>
                 <a:cs typeface="Segoe UI" pitchFamily="34" charset="-120"/>
               </a:rPr>
-              <a:t>One-click actions and a ⚠ note button live right on each card.</a:t>
+              <a:t>At a glance: who holds each case, and exactly where first line still has an action.</a:t>
             </a:r>
             <a:endParaRPr lang="en-US" sz="1550" dirty="0"/>
           </a:p>
         </p:txBody>
       </p:sp>
-      <p:pic>
-        <p:nvPicPr>
-          <p:cNvPr id="9" name="Image 0" descr="/home/user/threenine/slides/assets/column.png">    </p:cNvPr>
-          <p:cNvPicPr>
-            <a:picLocks noChangeAspect="1"/>
-          </p:cNvPicPr>
-          <p:nvPr/>
-        </p:nvPicPr>
-        <p:blipFill>
-          <a:blip r:embed="rId1"/>
-          <a:srcRect l="0" r="0" t="0" b="0"/>
-          <a:stretch/>
-        </p:blipFill>
-        <p:spPr>
-          <a:xfrm>
-            <a:off x="7955280" y="1554480"/>
-            <a:ext cx="3566160" cy="4480560"/>
-          </a:xfrm>
-          <a:prstGeom prst="rect">
-            <a:avLst/>
-          </a:prstGeom>
-        </p:spPr>
-      </p:pic>
+      <p:sp>
+        <p:nvSpPr>
+          <p:cNvPr id="9" name="Shape 7"/>
+          <p:cNvSpPr/>
+          <p:nvPr/>
+        </p:nvSpPr>
+        <p:spPr>
+          <a:xfrm>
+            <a:off x="1463040" y="4892040"/>
+            <a:ext cx="9326880" cy="0"/>
+          </a:xfrm>
+          <a:prstGeom prst="line">
+            <a:avLst/>
+          </a:prstGeom>
+          <a:noFill/>
+          <a:ln w="25400">
+            <a:solidFill>
+              <a:srgbClr val="E5E7EB"/>
+            </a:solidFill>
+            <a:prstDash val="solid"/>
+          </a:ln>
+        </p:spPr>
+      </p:sp>
+      <p:sp>
+        <p:nvSpPr>
+          <p:cNvPr id="10" name="Shape 8"/>
+          <p:cNvSpPr/>
+          <p:nvPr/>
+        </p:nvSpPr>
+        <p:spPr>
+          <a:xfrm>
+            <a:off x="2112264" y="4773168"/>
+            <a:ext cx="164592" cy="237744"/>
+          </a:xfrm>
+          <a:prstGeom prst="rect">
+            <a:avLst/>
+          </a:prstGeom>
+          <a:solidFill>
+            <a:srgbClr val="6B7280"/>
+          </a:solidFill>
+          <a:ln/>
+        </p:spPr>
+      </p:sp>
+      <p:sp>
+        <p:nvSpPr>
+          <p:cNvPr id="11" name="Text 9"/>
+          <p:cNvSpPr/>
+          <p:nvPr/>
+        </p:nvSpPr>
+        <p:spPr>
+          <a:xfrm>
+            <a:off x="1280160" y="5074920"/>
+            <a:ext cx="1828800" cy="274320"/>
+          </a:xfrm>
+          <a:prstGeom prst="rect">
+            <a:avLst/>
+          </a:prstGeom>
+          <a:noFill/>
+          <a:ln/>
+        </p:spPr>
+        <p:txBody>
+          <a:bodyPr wrap="square" rtlCol="0" anchor="ctr"/>
+          <a:lstStyle/>
+          <a:p>
+            <a:pPr algn="ctr" indent="0" marL="0">
+              <a:buNone/>
+            </a:pPr>
+            <a:r>
+              <a:rPr lang="en-US" sz="1200" b="1" dirty="0">
+                <a:solidFill>
+                  <a:srgbClr val="1F2937"/>
+                </a:solidFill>
+                <a:latin typeface="Segoe UI" pitchFamily="34" charset="0"/>
+                <a:ea typeface="Segoe UI" pitchFamily="34" charset="-122"/>
+                <a:cs typeface="Segoe UI" pitchFamily="34" charset="-120"/>
+              </a:rPr>
+              <a:t>User</a:t>
+            </a:r>
+            <a:endParaRPr lang="en-US" sz="1200" dirty="0"/>
+          </a:p>
+        </p:txBody>
+      </p:sp>
+      <p:sp>
+        <p:nvSpPr>
+          <p:cNvPr id="12" name="Shape 10"/>
+          <p:cNvSpPr/>
+          <p:nvPr/>
+        </p:nvSpPr>
+        <p:spPr>
+          <a:xfrm>
+            <a:off x="5998464" y="4773168"/>
+            <a:ext cx="164592" cy="237744"/>
+          </a:xfrm>
+          <a:prstGeom prst="rect">
+            <a:avLst/>
+          </a:prstGeom>
+          <a:solidFill>
+            <a:srgbClr val="6B7280"/>
+          </a:solidFill>
+          <a:ln/>
+        </p:spPr>
+      </p:sp>
+      <p:sp>
+        <p:nvSpPr>
+          <p:cNvPr id="13" name="Text 11"/>
+          <p:cNvSpPr/>
+          <p:nvPr/>
+        </p:nvSpPr>
+        <p:spPr>
+          <a:xfrm>
+            <a:off x="5166360" y="5074920"/>
+            <a:ext cx="1828800" cy="274320"/>
+          </a:xfrm>
+          <a:prstGeom prst="rect">
+            <a:avLst/>
+          </a:prstGeom>
+          <a:noFill/>
+          <a:ln/>
+        </p:spPr>
+        <p:txBody>
+          <a:bodyPr wrap="square" rtlCol="0" anchor="ctr"/>
+          <a:lstStyle/>
+          <a:p>
+            <a:pPr algn="ctr" indent="0" marL="0">
+              <a:buNone/>
+            </a:pPr>
+            <a:r>
+              <a:rPr lang="en-US" sz="1200" b="1" dirty="0">
+                <a:solidFill>
+                  <a:srgbClr val="1F2937"/>
+                </a:solidFill>
+                <a:latin typeface="Segoe UI" pitchFamily="34" charset="0"/>
+                <a:ea typeface="Segoe UI" pitchFamily="34" charset="-122"/>
+                <a:cs typeface="Segoe UI" pitchFamily="34" charset="-120"/>
+              </a:rPr>
+              <a:t>Core Team</a:t>
+            </a:r>
+            <a:endParaRPr lang="en-US" sz="1200" dirty="0"/>
+          </a:p>
+        </p:txBody>
+      </p:sp>
+      <p:sp>
+        <p:nvSpPr>
+          <p:cNvPr id="14" name="Shape 12"/>
+          <p:cNvSpPr/>
+          <p:nvPr/>
+        </p:nvSpPr>
+        <p:spPr>
+          <a:xfrm>
+            <a:off x="9884664" y="4773168"/>
+            <a:ext cx="164592" cy="237744"/>
+          </a:xfrm>
+          <a:prstGeom prst="rect">
+            <a:avLst/>
+          </a:prstGeom>
+          <a:solidFill>
+            <a:srgbClr val="6B7280"/>
+          </a:solidFill>
+          <a:ln/>
+        </p:spPr>
+      </p:sp>
+      <p:sp>
+        <p:nvSpPr>
+          <p:cNvPr id="15" name="Text 13"/>
+          <p:cNvSpPr/>
+          <p:nvPr/>
+        </p:nvSpPr>
+        <p:spPr>
+          <a:xfrm>
+            <a:off x="9052560" y="5074920"/>
+            <a:ext cx="1828800" cy="274320"/>
+          </a:xfrm>
+          <a:prstGeom prst="rect">
+            <a:avLst/>
+          </a:prstGeom>
+          <a:noFill/>
+          <a:ln/>
+        </p:spPr>
+        <p:txBody>
+          <a:bodyPr wrap="square" rtlCol="0" anchor="ctr"/>
+          <a:lstStyle/>
+          <a:p>
+            <a:pPr algn="ctr" indent="0" marL="0">
+              <a:buNone/>
+            </a:pPr>
+            <a:r>
+              <a:rPr lang="en-US" sz="1200" b="1" dirty="0">
+                <a:solidFill>
+                  <a:srgbClr val="1F2937"/>
+                </a:solidFill>
+                <a:latin typeface="Segoe UI" pitchFamily="34" charset="0"/>
+                <a:ea typeface="Segoe UI" pitchFamily="34" charset="-122"/>
+                <a:cs typeface="Segoe UI" pitchFamily="34" charset="-120"/>
+              </a:rPr>
+              <a:t>HQ</a:t>
+            </a:r>
+            <a:endParaRPr lang="en-US" sz="1200" dirty="0"/>
+          </a:p>
+        </p:txBody>
+      </p:sp>
+      <p:sp>
+        <p:nvSpPr>
+          <p:cNvPr id="16" name="Shape 14"/>
+          <p:cNvSpPr/>
+          <p:nvPr/>
+        </p:nvSpPr>
+        <p:spPr>
+          <a:xfrm>
+            <a:off x="5952744" y="4764024"/>
+            <a:ext cx="256032" cy="256032"/>
+          </a:xfrm>
+          <a:prstGeom prst="ellipse">
+            <a:avLst/>
+          </a:prstGeom>
+          <a:solidFill>
+            <a:srgbClr val="2563EB"/>
+          </a:solidFill>
+          <a:ln/>
+        </p:spPr>
+      </p:sp>
+      <p:sp>
+        <p:nvSpPr>
+          <p:cNvPr id="17" name="Text 15"/>
+          <p:cNvSpPr/>
+          <p:nvPr/>
+        </p:nvSpPr>
+        <p:spPr>
+          <a:xfrm>
+            <a:off x="4709160" y="4288536"/>
+            <a:ext cx="2743200" cy="274320"/>
+          </a:xfrm>
+          <a:prstGeom prst="rect">
+            <a:avLst/>
+          </a:prstGeom>
+          <a:noFill/>
+          <a:ln/>
+        </p:spPr>
+        <p:txBody>
+          <a:bodyPr wrap="square" rtlCol="0" anchor="ctr"/>
+          <a:lstStyle/>
+          <a:p>
+            <a:pPr algn="ctr" indent="0" marL="0">
+              <a:buNone/>
+            </a:pPr>
+            <a:r>
+              <a:rPr lang="en-US" sz="1000" b="1" dirty="0">
+                <a:solidFill>
+                  <a:srgbClr val="2563EB"/>
+                </a:solidFill>
+                <a:latin typeface="Segoe UI" pitchFamily="34" charset="0"/>
+                <a:ea typeface="Segoe UI" pitchFamily="34" charset="-122"/>
+                <a:cs typeface="Segoe UI" pitchFamily="34" charset="-120"/>
+              </a:rPr>
+              <a:t>current — Case Center</a:t>
+            </a:r>
+            <a:endParaRPr lang="en-US" sz="1000" dirty="0"/>
+          </a:p>
+        </p:txBody>
+      </p:sp>
+      <p:sp>
+        <p:nvSpPr>
+          <p:cNvPr id="18" name="Shape 16"/>
+          <p:cNvSpPr/>
+          <p:nvPr/>
+        </p:nvSpPr>
+        <p:spPr>
+          <a:xfrm>
+            <a:off x="6355080" y="4892040"/>
+            <a:ext cx="3447288" cy="0"/>
+          </a:xfrm>
+          <a:prstGeom prst="line">
+            <a:avLst/>
+          </a:prstGeom>
+          <a:noFill/>
+          <a:ln w="25400">
+            <a:solidFill>
+              <a:srgbClr val="D97706"/>
+            </a:solidFill>
+            <a:prstDash val="dash"/>
+            <a:tailEnd type="triangle"/>
+          </a:ln>
+        </p:spPr>
+      </p:sp>
+      <p:sp>
+        <p:nvSpPr>
+          <p:cNvPr id="19" name="Text 17"/>
+          <p:cNvSpPr/>
+          <p:nvPr/>
+        </p:nvSpPr>
+        <p:spPr>
+          <a:xfrm>
+            <a:off x="6400800" y="5074920"/>
+            <a:ext cx="3566160" cy="274320"/>
+          </a:xfrm>
+          <a:prstGeom prst="rect">
+            <a:avLst/>
+          </a:prstGeom>
+          <a:noFill/>
+          <a:ln/>
+        </p:spPr>
+        <p:txBody>
+          <a:bodyPr wrap="square" rtlCol="0" anchor="ctr"/>
+          <a:lstStyle/>
+          <a:p>
+            <a:pPr algn="ctr" indent="0" marL="0">
+              <a:buNone/>
+            </a:pPr>
+            <a:r>
+              <a:rPr lang="en-US" sz="1000" i="1" dirty="0">
+                <a:solidFill>
+                  <a:srgbClr val="D97706"/>
+                </a:solidFill>
+                <a:latin typeface="Segoe UI" pitchFamily="34" charset="0"/>
+                <a:ea typeface="Segoe UI" pitchFamily="34" charset="-122"/>
+                <a:cs typeface="Segoe UI" pitchFamily="34" charset="-120"/>
+              </a:rPr>
+              <a:t>intent — Track Status</a:t>
+            </a:r>
+            <a:endParaRPr lang="en-US" sz="1000" dirty="0"/>
+          </a:p>
+        </p:txBody>
+      </p:sp>
     </p:spTree>
   </p:cSld>
   <p:clrMapOvr>
@@ -5217,7 +6856,7 @@
                 <a:ea typeface="Segoe UI" pitchFamily="34" charset="-122"/>
                 <a:cs typeface="Segoe UI" pitchFamily="34" charset="-120"/>
               </a:rPr>
-              <a:t>Live from your on-prem Case Center</a:t>
+              <a:t>Two assignees per case</a:t>
             </a:r>
             <a:endParaRPr lang="en-US" sz="2600" dirty="0"/>
           </a:p>
@@ -5276,7 +6915,7 @@
                 <a:ea typeface="Segoe UI" pitchFamily="34" charset="-122"/>
                 <a:cs typeface="Segoe UI" pitchFamily="34" charset="-120"/>
               </a:rPr>
-              <a:t>Real cases, refreshed every time you load the board.</a:t>
+              <a:t>Where it IS (Case Center) vs where you WANT it (your Track Status).</a:t>
             </a:r>
             <a:endParaRPr lang="en-US" sz="1300" dirty="0"/>
           </a:p>
@@ -5290,8 +6929,8 @@
         </p:nvSpPr>
         <p:spPr>
           <a:xfrm>
-            <a:off x="640080" y="1737360"/>
-            <a:ext cx="5669280" cy="4206240"/>
+            <a:off x="640080" y="1783080"/>
+            <a:ext cx="10881360" cy="1920240"/>
           </a:xfrm>
           <a:prstGeom prst="rect">
             <a:avLst/>
@@ -5322,7 +6961,7 @@
                 <a:ea typeface="Segoe UI" pitchFamily="34" charset="-122"/>
                 <a:cs typeface="Segoe UI" pitchFamily="34" charset="-120"/>
               </a:rPr>
-              <a:t>Pulls live cases from Case Center on every refresh.</a:t>
+              <a:t>Case Center assignee = where the case is now — this places the dot.</a:t>
             </a:r>
             <a:endParaRPr lang="en-US" sz="1550" dirty="0"/>
           </a:p>
@@ -5346,7 +6985,7 @@
                 <a:ea typeface="Segoe UI" pitchFamily="34" charset="-122"/>
                 <a:cs typeface="Segoe UI" pitchFamily="34" charset="-120"/>
               </a:rPr>
-              <a:t>Runs locally — your API key and cookie never leave your laptop.</a:t>
+              <a:t>Track Status = where first line wants it next, with a suggested time.</a:t>
             </a:r>
             <a:endParaRPr lang="en-US" sz="1550" dirty="0"/>
           </a:p>
@@ -5370,7 +7009,7 @@
                 <a:ea typeface="Segoe UI" pitchFamily="34" charset="-122"/>
                 <a:cs typeface="Segoe UI" pitchFamily="34" charset="-120"/>
               </a:rPr>
-              <a:t>Your queue, handover notes and reminders are kept across refreshes.</a:t>
+              <a:t>When the two differ, the board animates an arrow — your cue to act.</a:t>
             </a:r>
             <a:endParaRPr lang="en-US" sz="1550" dirty="0"/>
           </a:p>
@@ -5394,7 +7033,7 @@
                 <a:ea typeface="Segoe UI" pitchFamily="34" charset="-122"/>
                 <a:cs typeface="Segoe UI" pitchFamily="34" charset="-120"/>
               </a:rPr>
-              <a:t>Case Center owns the status; your handling layer stays yours.</a:t>
+              <a:t>Do the work in Case Center; the board catches up on the next sync.</a:t>
             </a:r>
             <a:endParaRPr lang="en-US" sz="1550" dirty="0"/>
           </a:p>
@@ -5408,16 +7047,16 @@
         </p:nvSpPr>
         <p:spPr>
           <a:xfrm>
-            <a:off x="7772400" y="1600200"/>
-            <a:ext cx="3383280" cy="868680"/>
+            <a:off x="640080" y="3886200"/>
+            <a:ext cx="5349240" cy="1783080"/>
           </a:xfrm>
           <a:prstGeom prst="roundRect">
             <a:avLst>
-              <a:gd name="adj" fmla="val 8421"/>
+              <a:gd name="adj" fmla="val 4103"/>
             </a:avLst>
           </a:prstGeom>
           <a:solidFill>
-            <a:srgbClr val="EEF2FF"/>
+            <a:srgbClr val="EFF6FF"/>
           </a:solidFill>
           <a:ln w="15875">
             <a:solidFill>
@@ -5435,34 +7074,49 @@
         </p:nvSpPr>
         <p:spPr>
           <a:xfrm>
-            <a:off x="7772400" y="1600200"/>
-            <a:ext cx="3383280" cy="868680"/>
-          </a:xfrm>
-          <a:prstGeom prst="rect">
-            <a:avLst/>
-          </a:prstGeom>
-          <a:noFill/>
-          <a:ln/>
-        </p:spPr>
-        <p:txBody>
-          <a:bodyPr wrap="square" rtlCol="0" anchor="ctr"/>
-          <a:lstStyle/>
-          <a:p>
-            <a:pPr algn="ctr" indent="0" marL="0">
+            <a:off x="868680" y="4069080"/>
+            <a:ext cx="4892040" cy="1417320"/>
+          </a:xfrm>
+          <a:prstGeom prst="rect">
+            <a:avLst/>
+          </a:prstGeom>
+          <a:noFill/>
+          <a:ln/>
+        </p:spPr>
+        <p:txBody>
+          <a:bodyPr wrap="square" rtlCol="0" anchor="t"/>
+          <a:lstStyle/>
+          <a:p>
+            <a:pPr indent="0" marL="0">
               <a:buNone/>
             </a:pPr>
             <a:r>
-              <a:rPr lang="en-US" sz="1300" b="1" dirty="0">
-                <a:solidFill>
-                  <a:srgbClr val="1F2937"/>
-                </a:solidFill>
-                <a:latin typeface="Segoe UI" pitchFamily="34" charset="0"/>
-                <a:ea typeface="Segoe UI" pitchFamily="34" charset="-122"/>
-                <a:cs typeface="Segoe UI" pitchFamily="34" charset="-120"/>
-              </a:rPr>
-              <a:t>Your laptop (browser)</a:t>
-            </a:r>
-            <a:endParaRPr lang="en-US" sz="1300" dirty="0"/>
+              <a:rPr lang="en-US" sz="1500" b="1" dirty="0">
+                <a:solidFill>
+                  <a:srgbClr val="2563EB"/>
+                </a:solidFill>
+                <a:latin typeface="Segoe UI" pitchFamily="34" charset="0"/>
+                <a:ea typeface="Segoe UI" pitchFamily="34" charset="-122"/>
+                <a:cs typeface="Segoe UI" pitchFamily="34" charset="-120"/>
+              </a:rPr>
+              <a:t>Current — Case Center
+</a:t>
+            </a:r>
+            <a:pPr indent="0" marL="0">
+              <a:buNone/>
+            </a:pPr>
+            <a:r>
+              <a:rPr lang="en-US" sz="1250" dirty="0">
+                <a:solidFill>
+                  <a:srgbClr val="111827"/>
+                </a:solidFill>
+                <a:latin typeface="Segoe UI" pitchFamily="34" charset="0"/>
+                <a:ea typeface="Segoe UI" pitchFamily="34" charset="-122"/>
+                <a:cs typeface="Segoe UI" pitchFamily="34" charset="-120"/>
+              </a:rPr>
+              <a:t>Site IT + processType → Core / 1st Line · HQ dept → HQ · returned → User</a:t>
+            </a:r>
+            <a:endParaRPr lang="en-US" sz="1500" dirty="0"/>
           </a:p>
         </p:txBody>
       </p:sp>
@@ -5474,44 +7128,20 @@
         </p:nvSpPr>
         <p:spPr>
           <a:xfrm>
-            <a:off x="9464040" y="2468880"/>
-            <a:ext cx="0" cy="457200"/>
-          </a:xfrm>
-          <a:prstGeom prst="line">
-            <a:avLst/>
-          </a:prstGeom>
-          <a:noFill/>
-          <a:ln w="22225">
-            <a:solidFill>
-              <a:srgbClr val="6B7280"/>
-            </a:solidFill>
-            <a:prstDash val="solid"/>
-            <a:tailEnd type="triangle"/>
-          </a:ln>
-        </p:spPr>
-      </p:sp>
-      <p:sp>
-        <p:nvSpPr>
-          <p:cNvPr id="12" name="Shape 10"/>
-          <p:cNvSpPr/>
-          <p:nvPr/>
-        </p:nvSpPr>
-        <p:spPr>
-          <a:xfrm>
-            <a:off x="7772400" y="2971800"/>
-            <a:ext cx="3383280" cy="868680"/>
+            <a:off x="6199632" y="3886200"/>
+            <a:ext cx="5349240" cy="1783080"/>
           </a:xfrm>
           <a:prstGeom prst="roundRect">
             <a:avLst>
-              <a:gd name="adj" fmla="val 8421"/>
+              <a:gd name="adj" fmla="val 4103"/>
             </a:avLst>
           </a:prstGeom>
           <a:solidFill>
-            <a:srgbClr val="F7FAFC"/>
+            <a:srgbClr val="FFFBEB"/>
           </a:solidFill>
           <a:ln w="15875">
             <a:solidFill>
-              <a:srgbClr val="E5E7EB"/>
+              <a:srgbClr val="D97706"/>
             </a:solidFill>
             <a:prstDash val="solid"/>
           </a:ln>
@@ -5519,169 +7149,55 @@
       </p:sp>
       <p:sp>
         <p:nvSpPr>
-          <p:cNvPr id="13" name="Text 11"/>
-          <p:cNvSpPr/>
-          <p:nvPr/>
-        </p:nvSpPr>
-        <p:spPr>
-          <a:xfrm>
-            <a:off x="7772400" y="2971800"/>
-            <a:ext cx="3383280" cy="868680"/>
-          </a:xfrm>
-          <a:prstGeom prst="rect">
-            <a:avLst/>
-          </a:prstGeom>
-          <a:noFill/>
-          <a:ln/>
-        </p:spPr>
-        <p:txBody>
-          <a:bodyPr wrap="square" rtlCol="0" anchor="ctr"/>
-          <a:lstStyle/>
-          <a:p>
-            <a:pPr algn="ctr" indent="0" marL="0">
+          <p:cNvPr id="12" name="Text 10"/>
+          <p:cNvSpPr/>
+          <p:nvPr/>
+        </p:nvSpPr>
+        <p:spPr>
+          <a:xfrm>
+            <a:off x="6428232" y="4069080"/>
+            <a:ext cx="4892040" cy="1417320"/>
+          </a:xfrm>
+          <a:prstGeom prst="rect">
+            <a:avLst/>
+          </a:prstGeom>
+          <a:noFill/>
+          <a:ln/>
+        </p:spPr>
+        <p:txBody>
+          <a:bodyPr wrap="square" rtlCol="0" anchor="t"/>
+          <a:lstStyle/>
+          <a:p>
+            <a:pPr indent="0" marL="0">
               <a:buNone/>
             </a:pPr>
             <a:r>
-              <a:rPr lang="en-US" sz="1300" b="1" dirty="0">
-                <a:solidFill>
-                  <a:srgbClr val="1F2937"/>
-                </a:solidFill>
-                <a:latin typeface="Segoe UI" pitchFamily="34" charset="0"/>
-                <a:ea typeface="Segoe UI" pitchFamily="34" charset="-122"/>
-                <a:cs typeface="Segoe UI" pitchFamily="34" charset="-120"/>
-              </a:rPr>
-              <a:t>Local server (Python)</a:t>
-            </a:r>
-            <a:endParaRPr lang="en-US" sz="1300" dirty="0"/>
-          </a:p>
-        </p:txBody>
-      </p:sp>
-      <p:sp>
-        <p:nvSpPr>
-          <p:cNvPr id="14" name="Shape 12"/>
-          <p:cNvSpPr/>
-          <p:nvPr/>
-        </p:nvSpPr>
-        <p:spPr>
-          <a:xfrm>
-            <a:off x="9464040" y="3840480"/>
-            <a:ext cx="0" cy="457200"/>
-          </a:xfrm>
-          <a:prstGeom prst="line">
-            <a:avLst/>
-          </a:prstGeom>
-          <a:noFill/>
-          <a:ln w="22225">
-            <a:solidFill>
-              <a:srgbClr val="6B7280"/>
-            </a:solidFill>
-            <a:prstDash val="solid"/>
-            <a:tailEnd type="triangle"/>
-          </a:ln>
-        </p:spPr>
-      </p:sp>
-      <p:sp>
-        <p:nvSpPr>
-          <p:cNvPr id="15" name="Shape 13"/>
-          <p:cNvSpPr/>
-          <p:nvPr/>
-        </p:nvSpPr>
-        <p:spPr>
-          <a:xfrm>
-            <a:off x="7772400" y="4343400"/>
-            <a:ext cx="3383280" cy="868680"/>
-          </a:xfrm>
-          <a:prstGeom prst="roundRect">
-            <a:avLst>
-              <a:gd name="adj" fmla="val 8421"/>
-            </a:avLst>
-          </a:prstGeom>
-          <a:solidFill>
-            <a:srgbClr val="F7FAFC"/>
-          </a:solidFill>
-          <a:ln w="15875">
-            <a:solidFill>
-              <a:srgbClr val="E5E7EB"/>
-            </a:solidFill>
-            <a:prstDash val="solid"/>
-          </a:ln>
-        </p:spPr>
-      </p:sp>
-      <p:sp>
-        <p:nvSpPr>
-          <p:cNvPr id="16" name="Text 14"/>
-          <p:cNvSpPr/>
-          <p:nvPr/>
-        </p:nvSpPr>
-        <p:spPr>
-          <a:xfrm>
-            <a:off x="7772400" y="4343400"/>
-            <a:ext cx="3383280" cy="868680"/>
-          </a:xfrm>
-          <a:prstGeom prst="rect">
-            <a:avLst/>
-          </a:prstGeom>
-          <a:noFill/>
-          <a:ln/>
-        </p:spPr>
-        <p:txBody>
-          <a:bodyPr wrap="square" rtlCol="0" anchor="ctr"/>
-          <a:lstStyle/>
-          <a:p>
-            <a:pPr algn="ctr" indent="0" marL="0">
+              <a:rPr lang="en-US" sz="1500" b="1" dirty="0">
+                <a:solidFill>
+                  <a:srgbClr val="D97706"/>
+                </a:solidFill>
+                <a:latin typeface="Segoe UI" pitchFamily="34" charset="0"/>
+                <a:ea typeface="Segoe UI" pitchFamily="34" charset="-122"/>
+                <a:cs typeface="Segoe UI" pitchFamily="34" charset="-120"/>
+              </a:rPr>
+              <a:t>Desired — Track Status
+</a:t>
+            </a:r>
+            <a:pPr indent="0" marL="0">
               <a:buNone/>
             </a:pPr>
             <a:r>
-              <a:rPr lang="en-US" sz="1300" b="1" dirty="0">
-                <a:solidFill>
-                  <a:srgbClr val="1F2937"/>
-                </a:solidFill>
-                <a:latin typeface="Segoe UI" pitchFamily="34" charset="0"/>
-                <a:ea typeface="Segoe UI" pitchFamily="34" charset="-122"/>
-                <a:cs typeface="Segoe UI" pitchFamily="34" charset="-120"/>
-              </a:rPr>
-              <a:t>Case Center (on-prem)</a:t>
-            </a:r>
-            <a:endParaRPr lang="en-US" sz="1300" dirty="0"/>
-          </a:p>
-        </p:txBody>
-      </p:sp>
-      <p:sp>
-        <p:nvSpPr>
-          <p:cNvPr id="17" name="Text 15"/>
-          <p:cNvSpPr/>
-          <p:nvPr/>
-        </p:nvSpPr>
-        <p:spPr>
-          <a:xfrm>
-            <a:off x="5029200" y="3108960"/>
-            <a:ext cx="2651760" cy="548640"/>
-          </a:xfrm>
-          <a:prstGeom prst="rect">
-            <a:avLst/>
-          </a:prstGeom>
-          <a:noFill/>
-          <a:ln/>
-        </p:spPr>
-        <p:txBody>
-          <a:bodyPr wrap="square" rtlCol="0" anchor="ctr"/>
-          <a:lstStyle/>
-          <a:p>
-            <a:pPr algn="r" indent="0" marL="0">
-              <a:buNone/>
-            </a:pPr>
-            <a:r>
-              <a:rPr lang="en-US" sz="1100" i="1" dirty="0">
-                <a:solidFill>
-                  <a:srgbClr val="059669"/>
-                </a:solidFill>
-                <a:latin typeface="Segoe UI" pitchFamily="34" charset="0"/>
-                <a:ea typeface="Segoe UI" pitchFamily="34" charset="-122"/>
-                <a:cs typeface="Segoe UI" pitchFamily="34" charset="-120"/>
-              </a:rPr>
-              <a:t>🔒 key + cookie stay here</a:t>
-            </a:r>
-            <a:endParaRPr lang="en-US" sz="1100" dirty="0"/>
+              <a:rPr lang="en-US" sz="1250" dirty="0">
+                <a:solidFill>
+                  <a:srgbClr val="111827"/>
+                </a:solidFill>
+                <a:latin typeface="Segoe UI" pitchFamily="34" charset="0"/>
+                <a:ea typeface="Segoe UI" pitchFamily="34" charset="-122"/>
+                <a:cs typeface="Segoe UI" pitchFamily="34" charset="-120"/>
+              </a:rPr>
+              <a:t>Escalate to HQ · Need to contact user · Weekend case · Sanity check — each with a suggested action time</a:t>
+            </a:r>
+            <a:endParaRPr lang="en-US" sz="1500" dirty="0"/>
           </a:p>
         </p:txBody>
       </p:sp>
@@ -5851,7 +7367,7 @@
                 <a:ea typeface="Segoe UI" pitchFamily="34" charset="-122"/>
                 <a:cs typeface="Segoe UI" pitchFamily="34" charset="-120"/>
               </a:rPr>
-              <a:t>The next action is on the card</a:t>
+              <a:t>Live from your on-prem Case Center</a:t>
             </a:r>
             <a:endParaRPr lang="en-US" sz="2600" dirty="0"/>
           </a:p>
@@ -5910,7 +7426,7 @@
                 <a:ea typeface="Segoe UI" pitchFamily="34" charset="-122"/>
                 <a:cs typeface="Segoe UI" pitchFamily="34" charset="-120"/>
               </a:rPr>
-              <a:t>Surfaced by status and idle time — the agent never hunts.</a:t>
+              <a:t>Real cases, refreshed every time you load the board.</a:t>
             </a:r>
             <a:endParaRPr lang="en-US" sz="1300" dirty="0"/>
           </a:p>
@@ -5918,36 +7434,159 @@
       </p:sp>
       <p:sp>
         <p:nvSpPr>
-          <p:cNvPr id="8" name="Shape 6"/>
-          <p:cNvSpPr/>
-          <p:nvPr/>
-        </p:nvSpPr>
-        <p:spPr>
-          <a:xfrm>
-            <a:off x="731520" y="1828800"/>
-            <a:ext cx="457200" cy="457200"/>
+          <p:cNvPr id="8" name="Text 6"/>
+          <p:cNvSpPr/>
+          <p:nvPr/>
+        </p:nvSpPr>
+        <p:spPr>
+          <a:xfrm>
+            <a:off x="640080" y="1737360"/>
+            <a:ext cx="5669280" cy="4206240"/>
+          </a:xfrm>
+          <a:prstGeom prst="rect">
+            <a:avLst/>
+          </a:prstGeom>
+          <a:noFill/>
+          <a:ln/>
+        </p:spPr>
+        <p:txBody>
+          <a:bodyPr wrap="square" rtlCol="0" anchor="t"/>
+          <a:lstStyle/>
+          <a:p>
+            <a:pPr marL="177800" indent="-177800">
+              <a:lnSpc>
+                <a:spcPct val="115000"/>
+              </a:lnSpc>
+              <a:spcAft>
+                <a:spcPts val="800"/>
+              </a:spcAft>
+              <a:buSzPct val="100000"/>
+              <a:buChar char="•"/>
+            </a:pPr>
+            <a:r>
+              <a:rPr lang="en-US" sz="1550" dirty="0">
+                <a:solidFill>
+                  <a:srgbClr val="111827"/>
+                </a:solidFill>
+                <a:latin typeface="Segoe UI" pitchFamily="34" charset="0"/>
+                <a:ea typeface="Segoe UI" pitchFamily="34" charset="-122"/>
+                <a:cs typeface="Segoe UI" pitchFamily="34" charset="-120"/>
+              </a:rPr>
+              <a:t>Pulls live cases from Case Center on every refresh.</a:t>
+            </a:r>
+            <a:endParaRPr lang="en-US" sz="1550" dirty="0"/>
+          </a:p>
+          <a:p>
+            <a:pPr marL="177800" indent="-177800">
+              <a:lnSpc>
+                <a:spcPct val="115000"/>
+              </a:lnSpc>
+              <a:spcAft>
+                <a:spcPts val="800"/>
+              </a:spcAft>
+              <a:buSzPct val="100000"/>
+              <a:buChar char="•"/>
+            </a:pPr>
+            <a:r>
+              <a:rPr lang="en-US" sz="1550" dirty="0">
+                <a:solidFill>
+                  <a:srgbClr val="111827"/>
+                </a:solidFill>
+                <a:latin typeface="Segoe UI" pitchFamily="34" charset="0"/>
+                <a:ea typeface="Segoe UI" pitchFamily="34" charset="-122"/>
+                <a:cs typeface="Segoe UI" pitchFamily="34" charset="-120"/>
+              </a:rPr>
+              <a:t>Runs locally — your API key and cookie never leave your laptop.</a:t>
+            </a:r>
+            <a:endParaRPr lang="en-US" sz="1550" dirty="0"/>
+          </a:p>
+          <a:p>
+            <a:pPr marL="177800" indent="-177800">
+              <a:lnSpc>
+                <a:spcPct val="115000"/>
+              </a:lnSpc>
+              <a:spcAft>
+                <a:spcPts val="800"/>
+              </a:spcAft>
+              <a:buSzPct val="100000"/>
+              <a:buChar char="•"/>
+            </a:pPr>
+            <a:r>
+              <a:rPr lang="en-US" sz="1550" dirty="0">
+                <a:solidFill>
+                  <a:srgbClr val="111827"/>
+                </a:solidFill>
+                <a:latin typeface="Segoe UI" pitchFamily="34" charset="0"/>
+                <a:ea typeface="Segoe UI" pitchFamily="34" charset="-122"/>
+                <a:cs typeface="Segoe UI" pitchFamily="34" charset="-120"/>
+              </a:rPr>
+              <a:t>Your queue, handover notes and reminders are kept across refreshes.</a:t>
+            </a:r>
+            <a:endParaRPr lang="en-US" sz="1550" dirty="0"/>
+          </a:p>
+          <a:p>
+            <a:pPr marL="177800" indent="-177800">
+              <a:lnSpc>
+                <a:spcPct val="115000"/>
+              </a:lnSpc>
+              <a:spcAft>
+                <a:spcPts val="800"/>
+              </a:spcAft>
+              <a:buSzPct val="100000"/>
+              <a:buChar char="•"/>
+            </a:pPr>
+            <a:r>
+              <a:rPr lang="en-US" sz="1550" dirty="0">
+                <a:solidFill>
+                  <a:srgbClr val="111827"/>
+                </a:solidFill>
+                <a:latin typeface="Segoe UI" pitchFamily="34" charset="0"/>
+                <a:ea typeface="Segoe UI" pitchFamily="34" charset="-122"/>
+                <a:cs typeface="Segoe UI" pitchFamily="34" charset="-120"/>
+              </a:rPr>
+              <a:t>Case Center owns the status; your handling layer stays yours.</a:t>
+            </a:r>
+            <a:endParaRPr lang="en-US" sz="1550" dirty="0"/>
+          </a:p>
+        </p:txBody>
+      </p:sp>
+      <p:sp>
+        <p:nvSpPr>
+          <p:cNvPr id="9" name="Shape 7"/>
+          <p:cNvSpPr/>
+          <p:nvPr/>
+        </p:nvSpPr>
+        <p:spPr>
+          <a:xfrm>
+            <a:off x="7772400" y="1600200"/>
+            <a:ext cx="3383280" cy="868680"/>
           </a:xfrm>
           <a:prstGeom prst="roundRect">
             <a:avLst>
-              <a:gd name="adj" fmla="val 12000"/>
+              <a:gd name="adj" fmla="val 8421"/>
             </a:avLst>
           </a:prstGeom>
           <a:solidFill>
-            <a:srgbClr val="6366F1"/>
+            <a:srgbClr val="EEF2FF"/>
           </a:solidFill>
-          <a:ln/>
-        </p:spPr>
-      </p:sp>
-      <p:sp>
-        <p:nvSpPr>
-          <p:cNvPr id="9" name="Text 7"/>
-          <p:cNvSpPr/>
-          <p:nvPr/>
-        </p:nvSpPr>
-        <p:spPr>
-          <a:xfrm>
-            <a:off x="731520" y="1828800"/>
-            <a:ext cx="457200" cy="457200"/>
+          <a:ln w="15875">
+            <a:solidFill>
+              <a:srgbClr val="2563EB"/>
+            </a:solidFill>
+            <a:prstDash val="solid"/>
+          </a:ln>
+        </p:spPr>
+      </p:sp>
+      <p:sp>
+        <p:nvSpPr>
+          <p:cNvPr id="10" name="Text 8"/>
+          <p:cNvSpPr/>
+          <p:nvPr/>
+        </p:nvSpPr>
+        <p:spPr>
+          <a:xfrm>
+            <a:off x="7772400" y="1600200"/>
+            <a:ext cx="3383280" cy="868680"/>
           </a:xfrm>
           <a:prstGeom prst="rect">
             <a:avLst/>
@@ -5963,70 +7602,17 @@
               <a:buNone/>
             </a:pPr>
             <a:r>
-              <a:rPr lang="en-US" sz="1600" b="1" dirty="0">
-                <a:solidFill>
-                  <a:srgbClr val="FFFFFF"/>
-                </a:solidFill>
-                <a:latin typeface="Segoe UI" pitchFamily="34" charset="0"/>
-                <a:ea typeface="Segoe UI" pitchFamily="34" charset="-122"/>
-                <a:cs typeface="Segoe UI" pitchFamily="34" charset="-120"/>
-              </a:rPr>
-              <a:t>A</a:t>
-            </a:r>
-            <a:endParaRPr lang="en-US" sz="1600" dirty="0"/>
-          </a:p>
-        </p:txBody>
-      </p:sp>
-      <p:sp>
-        <p:nvSpPr>
-          <p:cNvPr id="10" name="Text 8"/>
-          <p:cNvSpPr/>
-          <p:nvPr/>
-        </p:nvSpPr>
-        <p:spPr>
-          <a:xfrm>
-            <a:off x="1371600" y="1828800"/>
-            <a:ext cx="10058400" cy="457200"/>
-          </a:xfrm>
-          <a:prstGeom prst="rect">
-            <a:avLst/>
-          </a:prstGeom>
-          <a:noFill/>
-          <a:ln/>
-        </p:spPr>
-        <p:txBody>
-          <a:bodyPr wrap="square" rtlCol="0" anchor="ctr"/>
-          <a:lstStyle/>
-          <a:p>
-            <a:pPr indent="0" marL="0">
-              <a:buNone/>
-            </a:pPr>
-            <a:r>
-              <a:rPr lang="en-US" sz="1500" b="1" dirty="0">
-                <a:solidFill>
-                  <a:srgbClr val="111827"/>
-                </a:solidFill>
-                <a:latin typeface="Segoe UI" pitchFamily="34" charset="0"/>
-                <a:ea typeface="Segoe UI" pitchFamily="34" charset="-122"/>
-                <a:cs typeface="Segoe UI" pitchFamily="34" charset="-120"/>
-              </a:rPr>
-              <a:t>Assign to Local FIT   </a:t>
-            </a:r>
-            <a:pPr indent="0" marL="0">
-              <a:buNone/>
-            </a:pPr>
-            <a:r>
-              <a:rPr lang="en-US" sz="1500" dirty="0">
-                <a:solidFill>
-                  <a:srgbClr val="6B7280"/>
-                </a:solidFill>
-                <a:latin typeface="Segoe UI" pitchFamily="34" charset="0"/>
-                <a:ea typeface="Segoe UI" pitchFamily="34" charset="-122"/>
-                <a:cs typeface="Segoe UI" pitchFamily="34" charset="-120"/>
-              </a:rPr>
-              <a:t>New case with no owner yet.</a:t>
-            </a:r>
-            <a:endParaRPr lang="en-US" sz="1500" dirty="0"/>
+              <a:rPr lang="en-US" sz="1300" b="1" dirty="0">
+                <a:solidFill>
+                  <a:srgbClr val="1F2937"/>
+                </a:solidFill>
+                <a:latin typeface="Segoe UI" pitchFamily="34" charset="0"/>
+                <a:ea typeface="Segoe UI" pitchFamily="34" charset="-122"/>
+                <a:cs typeface="Segoe UI" pitchFamily="34" charset="-120"/>
+              </a:rPr>
+              <a:t>Your laptop (browser)</a:t>
+            </a:r>
+            <a:endParaRPr lang="en-US" sz="1300" dirty="0"/>
           </a:p>
         </p:txBody>
       </p:sp>
@@ -6038,30 +7624,59 @@
         </p:nvSpPr>
         <p:spPr>
           <a:xfrm>
-            <a:off x="731520" y="2606040"/>
-            <a:ext cx="457200" cy="457200"/>
+            <a:off x="9464040" y="2468880"/>
+            <a:ext cx="0" cy="457200"/>
+          </a:xfrm>
+          <a:prstGeom prst="line">
+            <a:avLst/>
+          </a:prstGeom>
+          <a:noFill/>
+          <a:ln w="22225">
+            <a:solidFill>
+              <a:srgbClr val="6B7280"/>
+            </a:solidFill>
+            <a:prstDash val="solid"/>
+            <a:tailEnd type="triangle"/>
+          </a:ln>
+        </p:spPr>
+      </p:sp>
+      <p:sp>
+        <p:nvSpPr>
+          <p:cNvPr id="12" name="Shape 10"/>
+          <p:cNvSpPr/>
+          <p:nvPr/>
+        </p:nvSpPr>
+        <p:spPr>
+          <a:xfrm>
+            <a:off x="7772400" y="2971800"/>
+            <a:ext cx="3383280" cy="868680"/>
           </a:xfrm>
           <a:prstGeom prst="roundRect">
             <a:avLst>
-              <a:gd name="adj" fmla="val 12000"/>
+              <a:gd name="adj" fmla="val 8421"/>
             </a:avLst>
           </a:prstGeom>
           <a:solidFill>
-            <a:srgbClr val="D97706"/>
+            <a:srgbClr val="F7FAFC"/>
           </a:solidFill>
-          <a:ln/>
-        </p:spPr>
-      </p:sp>
-      <p:sp>
-        <p:nvSpPr>
-          <p:cNvPr id="12" name="Text 10"/>
-          <p:cNvSpPr/>
-          <p:nvPr/>
-        </p:nvSpPr>
-        <p:spPr>
-          <a:xfrm>
-            <a:off x="731520" y="2606040"/>
-            <a:ext cx="457200" cy="457200"/>
+          <a:ln w="15875">
+            <a:solidFill>
+              <a:srgbClr val="E5E7EB"/>
+            </a:solidFill>
+            <a:prstDash val="solid"/>
+          </a:ln>
+        </p:spPr>
+      </p:sp>
+      <p:sp>
+        <p:nvSpPr>
+          <p:cNvPr id="13" name="Text 11"/>
+          <p:cNvSpPr/>
+          <p:nvPr/>
+        </p:nvSpPr>
+        <p:spPr>
+          <a:xfrm>
+            <a:off x="7772400" y="2971800"/>
+            <a:ext cx="3383280" cy="868680"/>
           </a:xfrm>
           <a:prstGeom prst="rect">
             <a:avLst/>
@@ -6077,70 +7692,17 @@
               <a:buNone/>
             </a:pPr>
             <a:r>
-              <a:rPr lang="en-US" sz="1600" b="1" dirty="0">
-                <a:solidFill>
-                  <a:srgbClr val="FFFFFF"/>
-                </a:solidFill>
-                <a:latin typeface="Segoe UI" pitchFamily="34" charset="0"/>
-                <a:ea typeface="Segoe UI" pitchFamily="34" charset="-122"/>
-                <a:cs typeface="Segoe UI" pitchFamily="34" charset="-120"/>
-              </a:rPr>
-              <a:t>C</a:t>
-            </a:r>
-            <a:endParaRPr lang="en-US" sz="1600" dirty="0"/>
-          </a:p>
-        </p:txBody>
-      </p:sp>
-      <p:sp>
-        <p:nvSpPr>
-          <p:cNvPr id="13" name="Text 11"/>
-          <p:cNvSpPr/>
-          <p:nvPr/>
-        </p:nvSpPr>
-        <p:spPr>
-          <a:xfrm>
-            <a:off x="1371600" y="2606040"/>
-            <a:ext cx="10058400" cy="457200"/>
-          </a:xfrm>
-          <a:prstGeom prst="rect">
-            <a:avLst/>
-          </a:prstGeom>
-          <a:noFill/>
-          <a:ln/>
-        </p:spPr>
-        <p:txBody>
-          <a:bodyPr wrap="square" rtlCol="0" anchor="ctr"/>
-          <a:lstStyle/>
-          <a:p>
-            <a:pPr indent="0" marL="0">
-              <a:buNone/>
-            </a:pPr>
-            <a:r>
-              <a:rPr lang="en-US" sz="1500" b="1" dirty="0">
-                <a:solidFill>
-                  <a:srgbClr val="111827"/>
-                </a:solidFill>
-                <a:latin typeface="Segoe UI" pitchFamily="34" charset="0"/>
-                <a:ea typeface="Segoe UI" pitchFamily="34" charset="-122"/>
-                <a:cs typeface="Segoe UI" pitchFamily="34" charset="-120"/>
-              </a:rPr>
-              <a:t>Chase — no response   </a:t>
-            </a:r>
-            <a:pPr indent="0" marL="0">
-              <a:buNone/>
-            </a:pPr>
-            <a:r>
-              <a:rPr lang="en-US" sz="1500" dirty="0">
-                <a:solidFill>
-                  <a:srgbClr val="6B7280"/>
-                </a:solidFill>
-                <a:latin typeface="Segoe UI" pitchFamily="34" charset="0"/>
-                <a:ea typeface="Segoe UI" pitchFamily="34" charset="-122"/>
-                <a:cs typeface="Segoe UI" pitchFamily="34" charset="-120"/>
-              </a:rPr>
-              <a:t>Owner idle past the threshold (FIT 4h / HQ 8h).</a:t>
-            </a:r>
-            <a:endParaRPr lang="en-US" sz="1500" dirty="0"/>
+              <a:rPr lang="en-US" sz="1300" b="1" dirty="0">
+                <a:solidFill>
+                  <a:srgbClr val="1F2937"/>
+                </a:solidFill>
+                <a:latin typeface="Segoe UI" pitchFamily="34" charset="0"/>
+                <a:ea typeface="Segoe UI" pitchFamily="34" charset="-122"/>
+                <a:cs typeface="Segoe UI" pitchFamily="34" charset="-120"/>
+              </a:rPr>
+              <a:t>Local server (Python)</a:t>
+            </a:r>
+            <a:endParaRPr lang="en-US" sz="1300" dirty="0"/>
           </a:p>
         </p:txBody>
       </p:sp>
@@ -6152,30 +7714,59 @@
         </p:nvSpPr>
         <p:spPr>
           <a:xfrm>
-            <a:off x="731520" y="3383280"/>
-            <a:ext cx="457200" cy="457200"/>
+            <a:off x="9464040" y="3840480"/>
+            <a:ext cx="0" cy="457200"/>
+          </a:xfrm>
+          <a:prstGeom prst="line">
+            <a:avLst/>
+          </a:prstGeom>
+          <a:noFill/>
+          <a:ln w="22225">
+            <a:solidFill>
+              <a:srgbClr val="6B7280"/>
+            </a:solidFill>
+            <a:prstDash val="solid"/>
+            <a:tailEnd type="triangle"/>
+          </a:ln>
+        </p:spPr>
+      </p:sp>
+      <p:sp>
+        <p:nvSpPr>
+          <p:cNvPr id="15" name="Shape 13"/>
+          <p:cNvSpPr/>
+          <p:nvPr/>
+        </p:nvSpPr>
+        <p:spPr>
+          <a:xfrm>
+            <a:off x="7772400" y="4343400"/>
+            <a:ext cx="3383280" cy="868680"/>
           </a:xfrm>
           <a:prstGeom prst="roundRect">
             <a:avLst>
-              <a:gd name="adj" fmla="val 12000"/>
+              <a:gd name="adj" fmla="val 8421"/>
             </a:avLst>
           </a:prstGeom>
           <a:solidFill>
-            <a:srgbClr val="DC2626"/>
+            <a:srgbClr val="F7FAFC"/>
           </a:solidFill>
-          <a:ln/>
-        </p:spPr>
-      </p:sp>
-      <p:sp>
-        <p:nvSpPr>
-          <p:cNvPr id="15" name="Text 13"/>
-          <p:cNvSpPr/>
-          <p:nvPr/>
-        </p:nvSpPr>
-        <p:spPr>
-          <a:xfrm>
-            <a:off x="731520" y="3383280"/>
-            <a:ext cx="457200" cy="457200"/>
+          <a:ln w="15875">
+            <a:solidFill>
+              <a:srgbClr val="E5E7EB"/>
+            </a:solidFill>
+            <a:prstDash val="solid"/>
+          </a:ln>
+        </p:spPr>
+      </p:sp>
+      <p:sp>
+        <p:nvSpPr>
+          <p:cNvPr id="16" name="Text 14"/>
+          <p:cNvSpPr/>
+          <p:nvPr/>
+        </p:nvSpPr>
+        <p:spPr>
+          <a:xfrm>
+            <a:off x="7772400" y="4343400"/>
+            <a:ext cx="3383280" cy="868680"/>
           </a:xfrm>
           <a:prstGeom prst="rect">
             <a:avLst/>
@@ -6191,30 +7782,30 @@
               <a:buNone/>
             </a:pPr>
             <a:r>
-              <a:rPr lang="en-US" sz="1600" b="1" dirty="0">
-                <a:solidFill>
-                  <a:srgbClr val="FFFFFF"/>
-                </a:solidFill>
-                <a:latin typeface="Segoe UI" pitchFamily="34" charset="0"/>
-                <a:ea typeface="Segoe UI" pitchFamily="34" charset="-122"/>
-                <a:cs typeface="Segoe UI" pitchFamily="34" charset="-120"/>
-              </a:rPr>
-              <a:t>E</a:t>
-            </a:r>
-            <a:endParaRPr lang="en-US" sz="1600" dirty="0"/>
-          </a:p>
-        </p:txBody>
-      </p:sp>
-      <p:sp>
-        <p:nvSpPr>
-          <p:cNvPr id="16" name="Text 14"/>
-          <p:cNvSpPr/>
-          <p:nvPr/>
-        </p:nvSpPr>
-        <p:spPr>
-          <a:xfrm>
-            <a:off x="1371600" y="3383280"/>
-            <a:ext cx="10058400" cy="457200"/>
+              <a:rPr lang="en-US" sz="1300" b="1" dirty="0">
+                <a:solidFill>
+                  <a:srgbClr val="1F2937"/>
+                </a:solidFill>
+                <a:latin typeface="Segoe UI" pitchFamily="34" charset="0"/>
+                <a:ea typeface="Segoe UI" pitchFamily="34" charset="-122"/>
+                <a:cs typeface="Segoe UI" pitchFamily="34" charset="-120"/>
+              </a:rPr>
+              <a:t>Case Center (on-prem)</a:t>
+            </a:r>
+            <a:endParaRPr lang="en-US" sz="1300" dirty="0"/>
+          </a:p>
+        </p:txBody>
+      </p:sp>
+      <p:sp>
+        <p:nvSpPr>
+          <p:cNvPr id="17" name="Text 15"/>
+          <p:cNvSpPr/>
+          <p:nvPr/>
+        </p:nvSpPr>
+        <p:spPr>
+          <a:xfrm>
+            <a:off x="5029200" y="3108960"/>
+            <a:ext cx="2651760" cy="548640"/>
           </a:xfrm>
           <a:prstGeom prst="rect">
             <a:avLst/>
@@ -6226,188 +7817,21 @@
           <a:bodyPr wrap="square" rtlCol="0" anchor="ctr"/>
           <a:lstStyle/>
           <a:p>
-            <a:pPr indent="0" marL="0">
+            <a:pPr algn="r" indent="0" marL="0">
               <a:buNone/>
             </a:pPr>
             <a:r>
-              <a:rPr lang="en-US" sz="1500" b="1" dirty="0">
-                <a:solidFill>
-                  <a:srgbClr val="111827"/>
-                </a:solidFill>
-                <a:latin typeface="Segoe UI" pitchFamily="34" charset="0"/>
-                <a:ea typeface="Segoe UI" pitchFamily="34" charset="-122"/>
-                <a:cs typeface="Segoe UI" pitchFamily="34" charset="-120"/>
-              </a:rPr>
-              <a:t>Escalate to HQ   </a:t>
-            </a:r>
-            <a:pPr indent="0" marL="0">
-              <a:buNone/>
-            </a:pPr>
-            <a:r>
-              <a:rPr lang="en-US" sz="1500" dirty="0">
-                <a:solidFill>
-                  <a:srgbClr val="6B7280"/>
-                </a:solidFill>
-                <a:latin typeface="Segoe UI" pitchFamily="34" charset="0"/>
-                <a:ea typeface="Segoe UI" pitchFamily="34" charset="-122"/>
-                <a:cs typeface="Segoe UI" pitchFamily="34" charset="-120"/>
-              </a:rPr>
-              <a:t>FIT can't resolve — hand to the product team.</a:t>
-            </a:r>
-            <a:endParaRPr lang="en-US" sz="1500" dirty="0"/>
-          </a:p>
-        </p:txBody>
-      </p:sp>
-      <p:sp>
-        <p:nvSpPr>
-          <p:cNvPr id="17" name="Shape 15"/>
-          <p:cNvSpPr/>
-          <p:nvPr/>
-        </p:nvSpPr>
-        <p:spPr>
-          <a:xfrm>
-            <a:off x="731520" y="4160520"/>
-            <a:ext cx="457200" cy="457200"/>
-          </a:xfrm>
-          <a:prstGeom prst="roundRect">
-            <a:avLst>
-              <a:gd name="adj" fmla="val 12000"/>
-            </a:avLst>
-          </a:prstGeom>
-          <a:solidFill>
-            <a:srgbClr val="059669"/>
-          </a:solidFill>
-          <a:ln/>
-        </p:spPr>
-      </p:sp>
-      <p:sp>
-        <p:nvSpPr>
-          <p:cNvPr id="18" name="Text 16"/>
-          <p:cNvSpPr/>
-          <p:nvPr/>
-        </p:nvSpPr>
-        <p:spPr>
-          <a:xfrm>
-            <a:off x="731520" y="4160520"/>
-            <a:ext cx="457200" cy="457200"/>
-          </a:xfrm>
-          <a:prstGeom prst="rect">
-            <a:avLst/>
-          </a:prstGeom>
-          <a:noFill/>
-          <a:ln/>
-        </p:spPr>
-        <p:txBody>
-          <a:bodyPr wrap="square" rtlCol="0" anchor="ctr"/>
-          <a:lstStyle/>
-          <a:p>
-            <a:pPr algn="ctr" indent="0" marL="0">
-              <a:buNone/>
-            </a:pPr>
-            <a:r>
-              <a:rPr lang="en-US" sz="1600" b="1" dirty="0">
-                <a:solidFill>
-                  <a:srgbClr val="FFFFFF"/>
-                </a:solidFill>
-                <a:latin typeface="Segoe UI" pitchFamily="34" charset="0"/>
-                <a:ea typeface="Segoe UI" pitchFamily="34" charset="-122"/>
-                <a:cs typeface="Segoe UI" pitchFamily="34" charset="-120"/>
-              </a:rPr>
-              <a:t>V</a:t>
-            </a:r>
-            <a:endParaRPr lang="en-US" sz="1600" dirty="0"/>
-          </a:p>
-        </p:txBody>
-      </p:sp>
-      <p:sp>
-        <p:nvSpPr>
-          <p:cNvPr id="19" name="Text 17"/>
-          <p:cNvSpPr/>
-          <p:nvPr/>
-        </p:nvSpPr>
-        <p:spPr>
-          <a:xfrm>
-            <a:off x="1371600" y="4160520"/>
-            <a:ext cx="10058400" cy="457200"/>
-          </a:xfrm>
-          <a:prstGeom prst="rect">
-            <a:avLst/>
-          </a:prstGeom>
-          <a:noFill/>
-          <a:ln/>
-        </p:spPr>
-        <p:txBody>
-          <a:bodyPr wrap="square" rtlCol="0" anchor="ctr"/>
-          <a:lstStyle/>
-          <a:p>
-            <a:pPr indent="0" marL="0">
-              <a:buNone/>
-            </a:pPr>
-            <a:r>
-              <a:rPr lang="en-US" sz="1500" b="1" dirty="0">
-                <a:solidFill>
-                  <a:srgbClr val="111827"/>
-                </a:solidFill>
-                <a:latin typeface="Segoe UI" pitchFamily="34" charset="0"/>
-                <a:ea typeface="Segoe UI" pitchFamily="34" charset="-122"/>
-                <a:cs typeface="Segoe UI" pitchFamily="34" charset="-120"/>
-              </a:rPr>
-              <a:t>Verify reported fix   </a:t>
-            </a:r>
-            <a:pPr indent="0" marL="0">
-              <a:buNone/>
-            </a:pPr>
-            <a:r>
-              <a:rPr lang="en-US" sz="1500" dirty="0">
-                <a:solidFill>
-                  <a:srgbClr val="6B7280"/>
-                </a:solidFill>
-                <a:latin typeface="Segoe UI" pitchFamily="34" charset="0"/>
-                <a:ea typeface="Segoe UI" pitchFamily="34" charset="-122"/>
-                <a:cs typeface="Segoe UI" pitchFamily="34" charset="-120"/>
-              </a:rPr>
-              <a:t>Sanity-check, then close.</a:t>
-            </a:r>
-            <a:endParaRPr lang="en-US" sz="1500" dirty="0"/>
-          </a:p>
-        </p:txBody>
-      </p:sp>
-      <p:sp>
-        <p:nvSpPr>
-          <p:cNvPr id="20" name="Text 18"/>
-          <p:cNvSpPr/>
-          <p:nvPr/>
-        </p:nvSpPr>
-        <p:spPr>
-          <a:xfrm>
-            <a:off x="731520" y="5029200"/>
-            <a:ext cx="10515600" cy="457200"/>
-          </a:xfrm>
-          <a:prstGeom prst="rect">
-            <a:avLst/>
-          </a:prstGeom>
-          <a:noFill/>
-          <a:ln/>
-        </p:spPr>
-        <p:txBody>
-          <a:bodyPr wrap="square" rtlCol="0" anchor="ctr"/>
-          <a:lstStyle/>
-          <a:p>
-            <a:pPr indent="0" marL="0">
-              <a:buNone/>
-            </a:pPr>
-            <a:r>
-              <a:rPr lang="en-US" sz="1300" i="1" dirty="0">
-                <a:solidFill>
-                  <a:srgbClr val="6B7280"/>
-                </a:solidFill>
-                <a:latin typeface="Segoe UI" pitchFamily="34" charset="0"/>
-                <a:ea typeface="Segoe UI" pitchFamily="34" charset="-122"/>
-                <a:cs typeface="Segoe UI" pitchFamily="34" charset="-120"/>
-              </a:rPr>
-              <a:t>Plus reminders/bells and a one-click handover note — nothing falls through the cracks.</a:t>
-            </a:r>
-            <a:endParaRPr lang="en-US" sz="1300" dirty="0"/>
+              <a:rPr lang="en-US" sz="1100" i="1" dirty="0">
+                <a:solidFill>
+                  <a:srgbClr val="059669"/>
+                </a:solidFill>
+                <a:latin typeface="Segoe UI" pitchFamily="34" charset="0"/>
+                <a:ea typeface="Segoe UI" pitchFamily="34" charset="-122"/>
+                <a:cs typeface="Segoe UI" pitchFamily="34" charset="-120"/>
+              </a:rPr>
+              <a:t>🔒 key + cookie stay here</a:t>
+            </a:r>
+            <a:endParaRPr lang="en-US" sz="1100" dirty="0"/>
           </a:p>
         </p:txBody>
       </p:sp>
@@ -6577,7 +8001,7 @@
                 <a:ea typeface="Segoe UI" pitchFamily="34" charset="-122"/>
                 <a:cs typeface="Segoe UI" pitchFamily="34" charset="-120"/>
               </a:rPr>
-              <a:t>Two clocks — and a timeline of who held it</a:t>
+              <a:t>The next action is on the card</a:t>
             </a:r>
             <a:endParaRPr lang="en-US" sz="2600" dirty="0"/>
           </a:p>
@@ -6611,126 +8035,8 @@
         </p:nvSpPr>
         <p:spPr>
           <a:xfrm>
-            <a:off x="640080" y="1645920"/>
-            <a:ext cx="4846320" cy="4206240"/>
-          </a:xfrm>
-          <a:prstGeom prst="rect">
-            <a:avLst/>
-          </a:prstGeom>
-          <a:noFill/>
-          <a:ln/>
-        </p:spPr>
-        <p:txBody>
-          <a:bodyPr wrap="square" rtlCol="0" anchor="t"/>
-          <a:lstStyle/>
-          <a:p>
-            <a:pPr marL="177800" indent="-177800">
-              <a:lnSpc>
-                <a:spcPct val="115000"/>
-              </a:lnSpc>
-              <a:spcAft>
-                <a:spcPts val="800"/>
-              </a:spcAft>
-              <a:buSzPct val="100000"/>
-              <a:buChar char="•"/>
-            </a:pPr>
-            <a:r>
-              <a:rPr lang="en-US" sz="1550" dirty="0">
-                <a:solidFill>
-                  <a:srgbClr val="111827"/>
-                </a:solidFill>
-                <a:latin typeface="Segoe UI" pitchFamily="34" charset="0"/>
-                <a:ea typeface="Segoe UI" pitchFamily="34" charset="-122"/>
-                <a:cs typeface="Segoe UI" pitchFamily="34" charset="-120"/>
-              </a:rPr>
-              <a:t>SLA clock = time on us (pauses when returned to the requester).</a:t>
-            </a:r>
-            <a:endParaRPr lang="en-US" sz="1550" dirty="0"/>
-          </a:p>
-          <a:p>
-            <a:pPr marL="177800" indent="-177800">
-              <a:lnSpc>
-                <a:spcPct val="115000"/>
-              </a:lnSpc>
-              <a:spcAft>
-                <a:spcPts val="800"/>
-              </a:spcAft>
-              <a:buSzPct val="100000"/>
-              <a:buChar char="•"/>
-            </a:pPr>
-            <a:r>
-              <a:rPr lang="en-US" sz="1550" dirty="0">
-                <a:solidFill>
-                  <a:srgbClr val="111827"/>
-                </a:solidFill>
-                <a:latin typeface="Segoe UI" pitchFamily="34" charset="0"/>
-                <a:ea typeface="Segoe UI" pitchFamily="34" charset="-122"/>
-                <a:cs typeface="Segoe UI" pitchFamily="34" charset="-120"/>
-              </a:rPr>
-              <a:t>Local FIT vs HQ time, tracked separately.</a:t>
-            </a:r>
-            <a:endParaRPr lang="en-US" sz="1550" dirty="0"/>
-          </a:p>
-          <a:p>
-            <a:pPr marL="177800" indent="-177800">
-              <a:lnSpc>
-                <a:spcPct val="115000"/>
-              </a:lnSpc>
-              <a:spcAft>
-                <a:spcPts val="800"/>
-              </a:spcAft>
-              <a:buSzPct val="100000"/>
-              <a:buChar char="•"/>
-            </a:pPr>
-            <a:r>
-              <a:rPr lang="en-US" sz="1550" dirty="0">
-                <a:solidFill>
-                  <a:srgbClr val="111827"/>
-                </a:solidFill>
-                <a:latin typeface="Segoe UI" pitchFamily="34" charset="0"/>
-                <a:ea typeface="Segoe UI" pitchFamily="34" charset="-122"/>
-                <a:cs typeface="Segoe UI" pitchFamily="34" charset="-120"/>
-              </a:rPr>
-              <a:t>Ownership timeline shows exactly when a case sat with whom.</a:t>
-            </a:r>
-            <a:endParaRPr lang="en-US" sz="1550" dirty="0"/>
-          </a:p>
-          <a:p>
-            <a:pPr marL="177800" indent="-177800">
-              <a:lnSpc>
-                <a:spcPct val="115000"/>
-              </a:lnSpc>
-              <a:spcAft>
-                <a:spcPts val="800"/>
-              </a:spcAft>
-              <a:buSzPct val="100000"/>
-              <a:buChar char="•"/>
-            </a:pPr>
-            <a:r>
-              <a:rPr lang="en-US" sz="1550" dirty="0">
-                <a:solidFill>
-                  <a:srgbClr val="111827"/>
-                </a:solidFill>
-                <a:latin typeface="Segoe UI" pitchFamily="34" charset="0"/>
-                <a:ea typeface="Segoe UI" pitchFamily="34" charset="-122"/>
-                <a:cs typeface="Segoe UI" pitchFamily="34" charset="-120"/>
-              </a:rPr>
-              <a:t>Answers "who's consuming the time?" at a glance.</a:t>
-            </a:r>
-            <a:endParaRPr lang="en-US" sz="1550" dirty="0"/>
-          </a:p>
-        </p:txBody>
-      </p:sp>
-      <p:sp>
-        <p:nvSpPr>
-          <p:cNvPr id="8" name="Text 6"/>
-          <p:cNvSpPr/>
-          <p:nvPr/>
-        </p:nvSpPr>
-        <p:spPr>
-          <a:xfrm>
-            <a:off x="5760720" y="1554480"/>
-            <a:ext cx="5852160" cy="274320"/>
+            <a:off x="548640" y="1152144"/>
+            <a:ext cx="11064240" cy="365760"/>
           </a:xfrm>
           <a:prstGeom prst="rect">
             <a:avLst/>
@@ -6746,7 +8052,7 @@
               <a:buNone/>
             </a:pPr>
             <a:r>
-              <a:rPr lang="en-US" sz="1100" b="1" dirty="0">
+              <a:rPr lang="en-US" sz="1300" dirty="0">
                 <a:solidFill>
                   <a:srgbClr val="6B7280"/>
                 </a:solidFill>
@@ -6754,45 +8060,83 @@
                 <a:ea typeface="Segoe UI" pitchFamily="34" charset="-122"/>
                 <a:cs typeface="Segoe UI" pitchFamily="34" charset="-120"/>
               </a:rPr>
-              <a:t>Separated FIT / HQ clocks</a:t>
-            </a:r>
-            <a:endParaRPr lang="en-US" sz="1100" dirty="0"/>
-          </a:p>
-        </p:txBody>
-      </p:sp>
-      <p:pic>
-        <p:nvPicPr>
-          <p:cNvPr id="9" name="Image 0" descr="/home/user/threenine/slides/assets/clocks.png">    </p:cNvPr>
-          <p:cNvPicPr>
-            <a:picLocks noChangeAspect="1"/>
-          </p:cNvPicPr>
-          <p:nvPr/>
-        </p:nvPicPr>
-        <p:blipFill>
-          <a:blip r:embed="rId1"/>
-          <a:srcRect l="0" r="0" t="0" b="0"/>
-          <a:stretch/>
-        </p:blipFill>
-        <p:spPr>
-          <a:xfrm>
-            <a:off x="5760720" y="1828800"/>
-            <a:ext cx="5943600" cy="685800"/>
-          </a:xfrm>
-          <a:prstGeom prst="rect">
-            <a:avLst/>
-          </a:prstGeom>
-        </p:spPr>
-      </p:pic>
-      <p:sp>
-        <p:nvSpPr>
-          <p:cNvPr id="10" name="Text 7"/>
-          <p:cNvSpPr/>
-          <p:nvPr/>
-        </p:nvSpPr>
-        <p:spPr>
-          <a:xfrm>
-            <a:off x="5760720" y="3017520"/>
-            <a:ext cx="5852160" cy="274320"/>
+              <a:t>Surfaced by status and idle time — the agent never hunts.</a:t>
+            </a:r>
+            <a:endParaRPr lang="en-US" sz="1300" dirty="0"/>
+          </a:p>
+        </p:txBody>
+      </p:sp>
+      <p:sp>
+        <p:nvSpPr>
+          <p:cNvPr id="8" name="Shape 6"/>
+          <p:cNvSpPr/>
+          <p:nvPr/>
+        </p:nvSpPr>
+        <p:spPr>
+          <a:xfrm>
+            <a:off x="731520" y="1828800"/>
+            <a:ext cx="457200" cy="457200"/>
+          </a:xfrm>
+          <a:prstGeom prst="roundRect">
+            <a:avLst>
+              <a:gd name="adj" fmla="val 12000"/>
+            </a:avLst>
+          </a:prstGeom>
+          <a:solidFill>
+            <a:srgbClr val="6366F1"/>
+          </a:solidFill>
+          <a:ln/>
+        </p:spPr>
+      </p:sp>
+      <p:sp>
+        <p:nvSpPr>
+          <p:cNvPr id="9" name="Text 7"/>
+          <p:cNvSpPr/>
+          <p:nvPr/>
+        </p:nvSpPr>
+        <p:spPr>
+          <a:xfrm>
+            <a:off x="731520" y="1828800"/>
+            <a:ext cx="457200" cy="457200"/>
+          </a:xfrm>
+          <a:prstGeom prst="rect">
+            <a:avLst/>
+          </a:prstGeom>
+          <a:noFill/>
+          <a:ln/>
+        </p:spPr>
+        <p:txBody>
+          <a:bodyPr wrap="square" rtlCol="0" anchor="ctr"/>
+          <a:lstStyle/>
+          <a:p>
+            <a:pPr algn="ctr" indent="0" marL="0">
+              <a:buNone/>
+            </a:pPr>
+            <a:r>
+              <a:rPr lang="en-US" sz="1600" b="1" dirty="0">
+                <a:solidFill>
+                  <a:srgbClr val="FFFFFF"/>
+                </a:solidFill>
+                <a:latin typeface="Segoe UI" pitchFamily="34" charset="0"/>
+                <a:ea typeface="Segoe UI" pitchFamily="34" charset="-122"/>
+                <a:cs typeface="Segoe UI" pitchFamily="34" charset="-120"/>
+              </a:rPr>
+              <a:t>A</a:t>
+            </a:r>
+            <a:endParaRPr lang="en-US" sz="1600" dirty="0"/>
+          </a:p>
+        </p:txBody>
+      </p:sp>
+      <p:sp>
+        <p:nvSpPr>
+          <p:cNvPr id="10" name="Text 8"/>
+          <p:cNvSpPr/>
+          <p:nvPr/>
+        </p:nvSpPr>
+        <p:spPr>
+          <a:xfrm>
+            <a:off x="1371600" y="1828800"/>
+            <a:ext cx="10058400" cy="457200"/>
           </a:xfrm>
           <a:prstGeom prst="rect">
             <a:avLst/>
@@ -6808,7 +8152,21 @@
               <a:buNone/>
             </a:pPr>
             <a:r>
-              <a:rPr lang="en-US" sz="1100" b="1" dirty="0">
+              <a:rPr lang="en-US" sz="1500" b="1" dirty="0">
+                <a:solidFill>
+                  <a:srgbClr val="111827"/>
+                </a:solidFill>
+                <a:latin typeface="Segoe UI" pitchFamily="34" charset="0"/>
+                <a:ea typeface="Segoe UI" pitchFamily="34" charset="-122"/>
+                <a:cs typeface="Segoe UI" pitchFamily="34" charset="-120"/>
+              </a:rPr>
+              <a:t>Assign to Core Team   </a:t>
+            </a:r>
+            <a:pPr indent="0" marL="0">
+              <a:buNone/>
+            </a:pPr>
+            <a:r>
+              <a:rPr lang="en-US" sz="1500" dirty="0">
                 <a:solidFill>
                   <a:srgbClr val="6B7280"/>
                 </a:solidFill>
@@ -6816,35 +8174,393 @@
                 <a:ea typeface="Segoe UI" pitchFamily="34" charset="-122"/>
                 <a:cs typeface="Segoe UI" pitchFamily="34" charset="-120"/>
               </a:rPr>
-              <a:t>Ownership timeline</a:t>
-            </a:r>
-            <a:endParaRPr lang="en-US" sz="1100" dirty="0"/>
-          </a:p>
-        </p:txBody>
-      </p:sp>
-      <p:pic>
-        <p:nvPicPr>
-          <p:cNvPr id="11" name="Image 1" descr="/home/user/threenine/slides/assets/timeline.png">    </p:cNvPr>
-          <p:cNvPicPr>
-            <a:picLocks noChangeAspect="1"/>
-          </p:cNvPicPr>
-          <p:nvPr/>
-        </p:nvPicPr>
-        <p:blipFill>
-          <a:blip r:embed="rId2"/>
-          <a:srcRect l="0" r="0" t="0" b="0"/>
-          <a:stretch/>
-        </p:blipFill>
-        <p:spPr>
-          <a:xfrm>
-            <a:off x="5760720" y="3291840"/>
-            <a:ext cx="5943600" cy="914400"/>
-          </a:xfrm>
-          <a:prstGeom prst="rect">
-            <a:avLst/>
-          </a:prstGeom>
-        </p:spPr>
-      </p:pic>
+              <a:t>New case with no owner yet.</a:t>
+            </a:r>
+            <a:endParaRPr lang="en-US" sz="1500" dirty="0"/>
+          </a:p>
+        </p:txBody>
+      </p:sp>
+      <p:sp>
+        <p:nvSpPr>
+          <p:cNvPr id="11" name="Shape 9"/>
+          <p:cNvSpPr/>
+          <p:nvPr/>
+        </p:nvSpPr>
+        <p:spPr>
+          <a:xfrm>
+            <a:off x="731520" y="2606040"/>
+            <a:ext cx="457200" cy="457200"/>
+          </a:xfrm>
+          <a:prstGeom prst="roundRect">
+            <a:avLst>
+              <a:gd name="adj" fmla="val 12000"/>
+            </a:avLst>
+          </a:prstGeom>
+          <a:solidFill>
+            <a:srgbClr val="D97706"/>
+          </a:solidFill>
+          <a:ln/>
+        </p:spPr>
+      </p:sp>
+      <p:sp>
+        <p:nvSpPr>
+          <p:cNvPr id="12" name="Text 10"/>
+          <p:cNvSpPr/>
+          <p:nvPr/>
+        </p:nvSpPr>
+        <p:spPr>
+          <a:xfrm>
+            <a:off x="731520" y="2606040"/>
+            <a:ext cx="457200" cy="457200"/>
+          </a:xfrm>
+          <a:prstGeom prst="rect">
+            <a:avLst/>
+          </a:prstGeom>
+          <a:noFill/>
+          <a:ln/>
+        </p:spPr>
+        <p:txBody>
+          <a:bodyPr wrap="square" rtlCol="0" anchor="ctr"/>
+          <a:lstStyle/>
+          <a:p>
+            <a:pPr algn="ctr" indent="0" marL="0">
+              <a:buNone/>
+            </a:pPr>
+            <a:r>
+              <a:rPr lang="en-US" sz="1600" b="1" dirty="0">
+                <a:solidFill>
+                  <a:srgbClr val="FFFFFF"/>
+                </a:solidFill>
+                <a:latin typeface="Segoe UI" pitchFamily="34" charset="0"/>
+                <a:ea typeface="Segoe UI" pitchFamily="34" charset="-122"/>
+                <a:cs typeface="Segoe UI" pitchFamily="34" charset="-120"/>
+              </a:rPr>
+              <a:t>C</a:t>
+            </a:r>
+            <a:endParaRPr lang="en-US" sz="1600" dirty="0"/>
+          </a:p>
+        </p:txBody>
+      </p:sp>
+      <p:sp>
+        <p:nvSpPr>
+          <p:cNvPr id="13" name="Text 11"/>
+          <p:cNvSpPr/>
+          <p:nvPr/>
+        </p:nvSpPr>
+        <p:spPr>
+          <a:xfrm>
+            <a:off x="1371600" y="2606040"/>
+            <a:ext cx="10058400" cy="457200"/>
+          </a:xfrm>
+          <a:prstGeom prst="rect">
+            <a:avLst/>
+          </a:prstGeom>
+          <a:noFill/>
+          <a:ln/>
+        </p:spPr>
+        <p:txBody>
+          <a:bodyPr wrap="square" rtlCol="0" anchor="ctr"/>
+          <a:lstStyle/>
+          <a:p>
+            <a:pPr indent="0" marL="0">
+              <a:buNone/>
+            </a:pPr>
+            <a:r>
+              <a:rPr lang="en-US" sz="1500" b="1" dirty="0">
+                <a:solidFill>
+                  <a:srgbClr val="111827"/>
+                </a:solidFill>
+                <a:latin typeface="Segoe UI" pitchFamily="34" charset="0"/>
+                <a:ea typeface="Segoe UI" pitchFamily="34" charset="-122"/>
+                <a:cs typeface="Segoe UI" pitchFamily="34" charset="-120"/>
+              </a:rPr>
+              <a:t>Chase — no response   </a:t>
+            </a:r>
+            <a:pPr indent="0" marL="0">
+              <a:buNone/>
+            </a:pPr>
+            <a:r>
+              <a:rPr lang="en-US" sz="1500" dirty="0">
+                <a:solidFill>
+                  <a:srgbClr val="6B7280"/>
+                </a:solidFill>
+                <a:latin typeface="Segoe UI" pitchFamily="34" charset="0"/>
+                <a:ea typeface="Segoe UI" pitchFamily="34" charset="-122"/>
+                <a:cs typeface="Segoe UI" pitchFamily="34" charset="-120"/>
+              </a:rPr>
+              <a:t>Owner idle past the threshold (Core 4h / HQ 8h).</a:t>
+            </a:r>
+            <a:endParaRPr lang="en-US" sz="1500" dirty="0"/>
+          </a:p>
+        </p:txBody>
+      </p:sp>
+      <p:sp>
+        <p:nvSpPr>
+          <p:cNvPr id="14" name="Shape 12"/>
+          <p:cNvSpPr/>
+          <p:nvPr/>
+        </p:nvSpPr>
+        <p:spPr>
+          <a:xfrm>
+            <a:off x="731520" y="3383280"/>
+            <a:ext cx="457200" cy="457200"/>
+          </a:xfrm>
+          <a:prstGeom prst="roundRect">
+            <a:avLst>
+              <a:gd name="adj" fmla="val 12000"/>
+            </a:avLst>
+          </a:prstGeom>
+          <a:solidFill>
+            <a:srgbClr val="DC2626"/>
+          </a:solidFill>
+          <a:ln/>
+        </p:spPr>
+      </p:sp>
+      <p:sp>
+        <p:nvSpPr>
+          <p:cNvPr id="15" name="Text 13"/>
+          <p:cNvSpPr/>
+          <p:nvPr/>
+        </p:nvSpPr>
+        <p:spPr>
+          <a:xfrm>
+            <a:off x="731520" y="3383280"/>
+            <a:ext cx="457200" cy="457200"/>
+          </a:xfrm>
+          <a:prstGeom prst="rect">
+            <a:avLst/>
+          </a:prstGeom>
+          <a:noFill/>
+          <a:ln/>
+        </p:spPr>
+        <p:txBody>
+          <a:bodyPr wrap="square" rtlCol="0" anchor="ctr"/>
+          <a:lstStyle/>
+          <a:p>
+            <a:pPr algn="ctr" indent="0" marL="0">
+              <a:buNone/>
+            </a:pPr>
+            <a:r>
+              <a:rPr lang="en-US" sz="1600" b="1" dirty="0">
+                <a:solidFill>
+                  <a:srgbClr val="FFFFFF"/>
+                </a:solidFill>
+                <a:latin typeface="Segoe UI" pitchFamily="34" charset="0"/>
+                <a:ea typeface="Segoe UI" pitchFamily="34" charset="-122"/>
+                <a:cs typeface="Segoe UI" pitchFamily="34" charset="-120"/>
+              </a:rPr>
+              <a:t>E</a:t>
+            </a:r>
+            <a:endParaRPr lang="en-US" sz="1600" dirty="0"/>
+          </a:p>
+        </p:txBody>
+      </p:sp>
+      <p:sp>
+        <p:nvSpPr>
+          <p:cNvPr id="16" name="Text 14"/>
+          <p:cNvSpPr/>
+          <p:nvPr/>
+        </p:nvSpPr>
+        <p:spPr>
+          <a:xfrm>
+            <a:off x="1371600" y="3383280"/>
+            <a:ext cx="10058400" cy="457200"/>
+          </a:xfrm>
+          <a:prstGeom prst="rect">
+            <a:avLst/>
+          </a:prstGeom>
+          <a:noFill/>
+          <a:ln/>
+        </p:spPr>
+        <p:txBody>
+          <a:bodyPr wrap="square" rtlCol="0" anchor="ctr"/>
+          <a:lstStyle/>
+          <a:p>
+            <a:pPr indent="0" marL="0">
+              <a:buNone/>
+            </a:pPr>
+            <a:r>
+              <a:rPr lang="en-US" sz="1500" b="1" dirty="0">
+                <a:solidFill>
+                  <a:srgbClr val="111827"/>
+                </a:solidFill>
+                <a:latin typeface="Segoe UI" pitchFamily="34" charset="0"/>
+                <a:ea typeface="Segoe UI" pitchFamily="34" charset="-122"/>
+                <a:cs typeface="Segoe UI" pitchFamily="34" charset="-120"/>
+              </a:rPr>
+              <a:t>Escalate to HQ   </a:t>
+            </a:r>
+            <a:pPr indent="0" marL="0">
+              <a:buNone/>
+            </a:pPr>
+            <a:r>
+              <a:rPr lang="en-US" sz="1500" dirty="0">
+                <a:solidFill>
+                  <a:srgbClr val="6B7280"/>
+                </a:solidFill>
+                <a:latin typeface="Segoe UI" pitchFamily="34" charset="0"/>
+                <a:ea typeface="Segoe UI" pitchFamily="34" charset="-122"/>
+                <a:cs typeface="Segoe UI" pitchFamily="34" charset="-120"/>
+              </a:rPr>
+              <a:t>Core Team can't resolve — hand to the product team.</a:t>
+            </a:r>
+            <a:endParaRPr lang="en-US" sz="1500" dirty="0"/>
+          </a:p>
+        </p:txBody>
+      </p:sp>
+      <p:sp>
+        <p:nvSpPr>
+          <p:cNvPr id="17" name="Shape 15"/>
+          <p:cNvSpPr/>
+          <p:nvPr/>
+        </p:nvSpPr>
+        <p:spPr>
+          <a:xfrm>
+            <a:off x="731520" y="4160520"/>
+            <a:ext cx="457200" cy="457200"/>
+          </a:xfrm>
+          <a:prstGeom prst="roundRect">
+            <a:avLst>
+              <a:gd name="adj" fmla="val 12000"/>
+            </a:avLst>
+          </a:prstGeom>
+          <a:solidFill>
+            <a:srgbClr val="059669"/>
+          </a:solidFill>
+          <a:ln/>
+        </p:spPr>
+      </p:sp>
+      <p:sp>
+        <p:nvSpPr>
+          <p:cNvPr id="18" name="Text 16"/>
+          <p:cNvSpPr/>
+          <p:nvPr/>
+        </p:nvSpPr>
+        <p:spPr>
+          <a:xfrm>
+            <a:off x="731520" y="4160520"/>
+            <a:ext cx="457200" cy="457200"/>
+          </a:xfrm>
+          <a:prstGeom prst="rect">
+            <a:avLst/>
+          </a:prstGeom>
+          <a:noFill/>
+          <a:ln/>
+        </p:spPr>
+        <p:txBody>
+          <a:bodyPr wrap="square" rtlCol="0" anchor="ctr"/>
+          <a:lstStyle/>
+          <a:p>
+            <a:pPr algn="ctr" indent="0" marL="0">
+              <a:buNone/>
+            </a:pPr>
+            <a:r>
+              <a:rPr lang="en-US" sz="1600" b="1" dirty="0">
+                <a:solidFill>
+                  <a:srgbClr val="FFFFFF"/>
+                </a:solidFill>
+                <a:latin typeface="Segoe UI" pitchFamily="34" charset="0"/>
+                <a:ea typeface="Segoe UI" pitchFamily="34" charset="-122"/>
+                <a:cs typeface="Segoe UI" pitchFamily="34" charset="-120"/>
+              </a:rPr>
+              <a:t>V</a:t>
+            </a:r>
+            <a:endParaRPr lang="en-US" sz="1600" dirty="0"/>
+          </a:p>
+        </p:txBody>
+      </p:sp>
+      <p:sp>
+        <p:nvSpPr>
+          <p:cNvPr id="19" name="Text 17"/>
+          <p:cNvSpPr/>
+          <p:nvPr/>
+        </p:nvSpPr>
+        <p:spPr>
+          <a:xfrm>
+            <a:off x="1371600" y="4160520"/>
+            <a:ext cx="10058400" cy="457200"/>
+          </a:xfrm>
+          <a:prstGeom prst="rect">
+            <a:avLst/>
+          </a:prstGeom>
+          <a:noFill/>
+          <a:ln/>
+        </p:spPr>
+        <p:txBody>
+          <a:bodyPr wrap="square" rtlCol="0" anchor="ctr"/>
+          <a:lstStyle/>
+          <a:p>
+            <a:pPr indent="0" marL="0">
+              <a:buNone/>
+            </a:pPr>
+            <a:r>
+              <a:rPr lang="en-US" sz="1500" b="1" dirty="0">
+                <a:solidFill>
+                  <a:srgbClr val="111827"/>
+                </a:solidFill>
+                <a:latin typeface="Segoe UI" pitchFamily="34" charset="0"/>
+                <a:ea typeface="Segoe UI" pitchFamily="34" charset="-122"/>
+                <a:cs typeface="Segoe UI" pitchFamily="34" charset="-120"/>
+              </a:rPr>
+              <a:t>Verify reported fix   </a:t>
+            </a:r>
+            <a:pPr indent="0" marL="0">
+              <a:buNone/>
+            </a:pPr>
+            <a:r>
+              <a:rPr lang="en-US" sz="1500" dirty="0">
+                <a:solidFill>
+                  <a:srgbClr val="6B7280"/>
+                </a:solidFill>
+                <a:latin typeface="Segoe UI" pitchFamily="34" charset="0"/>
+                <a:ea typeface="Segoe UI" pitchFamily="34" charset="-122"/>
+                <a:cs typeface="Segoe UI" pitchFamily="34" charset="-120"/>
+              </a:rPr>
+              <a:t>Sanity-check, then close.</a:t>
+            </a:r>
+            <a:endParaRPr lang="en-US" sz="1500" dirty="0"/>
+          </a:p>
+        </p:txBody>
+      </p:sp>
+      <p:sp>
+        <p:nvSpPr>
+          <p:cNvPr id="20" name="Text 18"/>
+          <p:cNvSpPr/>
+          <p:nvPr/>
+        </p:nvSpPr>
+        <p:spPr>
+          <a:xfrm>
+            <a:off x="731520" y="5029200"/>
+            <a:ext cx="10515600" cy="457200"/>
+          </a:xfrm>
+          <a:prstGeom prst="rect">
+            <a:avLst/>
+          </a:prstGeom>
+          <a:noFill/>
+          <a:ln/>
+        </p:spPr>
+        <p:txBody>
+          <a:bodyPr wrap="square" rtlCol="0" anchor="ctr"/>
+          <a:lstStyle/>
+          <a:p>
+            <a:pPr indent="0" marL="0">
+              <a:buNone/>
+            </a:pPr>
+            <a:r>
+              <a:rPr lang="en-US" sz="1300" i="1" dirty="0">
+                <a:solidFill>
+                  <a:srgbClr val="6B7280"/>
+                </a:solidFill>
+                <a:latin typeface="Segoe UI" pitchFamily="34" charset="0"/>
+                <a:ea typeface="Segoe UI" pitchFamily="34" charset="-122"/>
+                <a:cs typeface="Segoe UI" pitchFamily="34" charset="-120"/>
+              </a:rPr>
+              <a:t>Plus reminders/bells and a one-click handover note — nothing falls through the cracks.</a:t>
+            </a:r>
+            <a:endParaRPr lang="en-US" sz="1300" dirty="0"/>
+          </a:p>
+        </p:txBody>
+      </p:sp>
     </p:spTree>
   </p:cSld>
   <p:clrMapOvr>
@@ -7011,7 +8727,7 @@
                 <a:ea typeface="Segoe UI" pitchFamily="34" charset="-122"/>
                 <a:cs typeface="Segoe UI" pitchFamily="34" charset="-120"/>
               </a:rPr>
-              <a:t>Handover, on the board</a:t>
+              <a:t>Two clocks — and a timeline of who held it</a:t>
             </a:r>
             <a:endParaRPr lang="en-US" sz="2600" dirty="0"/>
           </a:p>
@@ -7045,47 +8761,8 @@
         </p:nvSpPr>
         <p:spPr>
           <a:xfrm>
-            <a:off x="548640" y="1152144"/>
-            <a:ext cx="11064240" cy="365760"/>
-          </a:xfrm>
-          <a:prstGeom prst="rect">
-            <a:avLst/>
-          </a:prstGeom>
-          <a:noFill/>
-          <a:ln/>
-        </p:spPr>
-        <p:txBody>
-          <a:bodyPr wrap="square" rtlCol="0" anchor="ctr"/>
-          <a:lstStyle/>
-          <a:p>
-            <a:pPr indent="0" marL="0">
-              <a:buNone/>
-            </a:pPr>
-            <a:r>
-              <a:rPr lang="en-US" sz="1300" dirty="0">
-                <a:solidFill>
-                  <a:srgbClr val="6B7280"/>
-                </a:solidFill>
-                <a:latin typeface="Segoe UI" pitchFamily="34" charset="0"/>
-                <a:ea typeface="Segoe UI" pitchFamily="34" charset="-122"/>
-                <a:cs typeface="Segoe UI" pitchFamily="34" charset="-120"/>
-              </a:rPr>
-              <a:t>No separate screen, no lost context.</a:t>
-            </a:r>
-            <a:endParaRPr lang="en-US" sz="1300" dirty="0"/>
-          </a:p>
-        </p:txBody>
-      </p:sp>
-      <p:sp>
-        <p:nvSpPr>
-          <p:cNvPr id="8" name="Text 6"/>
-          <p:cNvSpPr/>
-          <p:nvPr/>
-        </p:nvSpPr>
-        <p:spPr>
-          <a:xfrm>
-            <a:off x="640080" y="1737360"/>
-            <a:ext cx="10881360" cy="2011680"/>
+            <a:off x="640080" y="1645920"/>
+            <a:ext cx="4846320" cy="4206240"/>
           </a:xfrm>
           <a:prstGeom prst="rect">
             <a:avLst/>
@@ -7116,7 +8793,7 @@
                 <a:ea typeface="Segoe UI" pitchFamily="34" charset="-122"/>
                 <a:cs typeface="Segoe UI" pitchFamily="34" charset="-120"/>
               </a:rPr>
-              <a:t>One structured note per case, labelled Day → Night.</a:t>
+              <a:t>SLA clock = time on us (pauses when returned to the requester).</a:t>
             </a:r>
             <a:endParaRPr lang="en-US" sz="1550" dirty="0"/>
           </a:p>
@@ -7140,7 +8817,7 @@
                 <a:ea typeface="Segoe UI" pitchFamily="34" charset="-122"/>
                 <a:cs typeface="Segoe UI" pitchFamily="34" charset="-120"/>
               </a:rPr>
-              <a:t>Write it straight from the card (⚠ Note) or the reading panel.</a:t>
+              <a:t>Core Team vs HQ time, tracked separately.</a:t>
             </a:r>
             <a:endParaRPr lang="en-US" sz="1550" dirty="0"/>
           </a:p>
@@ -7164,7 +8841,7 @@
                 <a:ea typeface="Segoe UI" pitchFamily="34" charset="-122"/>
                 <a:cs typeface="Segoe UI" pitchFamily="34" charset="-120"/>
               </a:rPr>
-              <a:t>A banner flags open cases that still need a fresh note before cutover.</a:t>
+              <a:t>Ownership timeline shows exactly when a case sat with whom.</a:t>
             </a:r>
             <a:endParaRPr lang="en-US" sz="1550" dirty="0"/>
           </a:p>
@@ -7188,15 +8865,54 @@
                 <a:ea typeface="Segoe UI" pitchFamily="34" charset="-122"/>
                 <a:cs typeface="Segoe UI" pitchFamily="34" charset="-120"/>
               </a:rPr>
-              <a:t>Yellow = stale for the current shift and needs a rewrite.</a:t>
+              <a:t>Answers "who's consuming the time?" at a glance.</a:t>
             </a:r>
             <a:endParaRPr lang="en-US" sz="1550" dirty="0"/>
+          </a:p>
+        </p:txBody>
+      </p:sp>
+      <p:sp>
+        <p:nvSpPr>
+          <p:cNvPr id="8" name="Text 6"/>
+          <p:cNvSpPr/>
+          <p:nvPr/>
+        </p:nvSpPr>
+        <p:spPr>
+          <a:xfrm>
+            <a:off x="5760720" y="1554480"/>
+            <a:ext cx="5852160" cy="274320"/>
+          </a:xfrm>
+          <a:prstGeom prst="rect">
+            <a:avLst/>
+          </a:prstGeom>
+          <a:noFill/>
+          <a:ln/>
+        </p:spPr>
+        <p:txBody>
+          <a:bodyPr wrap="square" rtlCol="0" anchor="ctr"/>
+          <a:lstStyle/>
+          <a:p>
+            <a:pPr indent="0" marL="0">
+              <a:buNone/>
+            </a:pPr>
+            <a:r>
+              <a:rPr lang="en-US" sz="1100" b="1" dirty="0">
+                <a:solidFill>
+                  <a:srgbClr val="6B7280"/>
+                </a:solidFill>
+                <a:latin typeface="Segoe UI" pitchFamily="34" charset="0"/>
+                <a:ea typeface="Segoe UI" pitchFamily="34" charset="-122"/>
+                <a:cs typeface="Segoe UI" pitchFamily="34" charset="-120"/>
+              </a:rPr>
+              <a:t>Separated Core Team / HQ clocks</a:t>
+            </a:r>
+            <a:endParaRPr lang="en-US" sz="1100" dirty="0"/>
           </a:p>
         </p:txBody>
       </p:sp>
       <p:pic>
         <p:nvPicPr>
-          <p:cNvPr id="9" name="Image 0" descr="/home/user/threenine/slides/assets/handover.png">    </p:cNvPr>
+          <p:cNvPr id="9" name="Image 0" descr="/Users/hsinglintsai/Documents/Claude/CC/threenine/.claude/worktrees/implement-review-fixes/slides/assets/clocks.png">    </p:cNvPr>
           <p:cNvPicPr>
             <a:picLocks noChangeAspect="1"/>
           </p:cNvPicPr>
@@ -7209,8 +8925,70 @@
         </p:blipFill>
         <p:spPr>
           <a:xfrm>
-            <a:off x="822960" y="4114800"/>
-            <a:ext cx="10515600" cy="1280160"/>
+            <a:off x="5760720" y="1828800"/>
+            <a:ext cx="5943600" cy="685800"/>
+          </a:xfrm>
+          <a:prstGeom prst="rect">
+            <a:avLst/>
+          </a:prstGeom>
+        </p:spPr>
+      </p:pic>
+      <p:sp>
+        <p:nvSpPr>
+          <p:cNvPr id="10" name="Text 7"/>
+          <p:cNvSpPr/>
+          <p:nvPr/>
+        </p:nvSpPr>
+        <p:spPr>
+          <a:xfrm>
+            <a:off x="5760720" y="3017520"/>
+            <a:ext cx="5852160" cy="274320"/>
+          </a:xfrm>
+          <a:prstGeom prst="rect">
+            <a:avLst/>
+          </a:prstGeom>
+          <a:noFill/>
+          <a:ln/>
+        </p:spPr>
+        <p:txBody>
+          <a:bodyPr wrap="square" rtlCol="0" anchor="ctr"/>
+          <a:lstStyle/>
+          <a:p>
+            <a:pPr indent="0" marL="0">
+              <a:buNone/>
+            </a:pPr>
+            <a:r>
+              <a:rPr lang="en-US" sz="1100" b="1" dirty="0">
+                <a:solidFill>
+                  <a:srgbClr val="6B7280"/>
+                </a:solidFill>
+                <a:latin typeface="Segoe UI" pitchFamily="34" charset="0"/>
+                <a:ea typeface="Segoe UI" pitchFamily="34" charset="-122"/>
+                <a:cs typeface="Segoe UI" pitchFamily="34" charset="-120"/>
+              </a:rPr>
+              <a:t>Ownership timeline</a:t>
+            </a:r>
+            <a:endParaRPr lang="en-US" sz="1100" dirty="0"/>
+          </a:p>
+        </p:txBody>
+      </p:sp>
+      <p:pic>
+        <p:nvPicPr>
+          <p:cNvPr id="11" name="Image 1" descr="/Users/hsinglintsai/Documents/Claude/CC/threenine/.claude/worktrees/implement-review-fixes/slides/assets/timeline.png">    </p:cNvPr>
+          <p:cNvPicPr>
+            <a:picLocks noChangeAspect="1"/>
+          </p:cNvPicPr>
+          <p:nvPr/>
+        </p:nvPicPr>
+        <p:blipFill>
+          <a:blip r:embed="rId2"/>
+          <a:srcRect l="0" r="0" t="0" b="0"/>
+          <a:stretch/>
+        </p:blipFill>
+        <p:spPr>
+          <a:xfrm>
+            <a:off x="5760720" y="3291840"/>
+            <a:ext cx="5943600" cy="914400"/>
           </a:xfrm>
           <a:prstGeom prst="rect">
             <a:avLst/>
@@ -7383,7 +9161,7 @@
                 <a:ea typeface="Segoe UI" pitchFamily="34" charset="-122"/>
                 <a:cs typeface="Segoe UI" pitchFamily="34" charset="-120"/>
               </a:rPr>
-              <a:t>Shift coverage at a glance</a:t>
+              <a:t>Handover, on the board</a:t>
             </a:r>
             <a:endParaRPr lang="en-US" sz="2600" dirty="0"/>
           </a:p>
@@ -7442,45 +9220,22 @@
                 <a:ea typeface="Segoe UI" pitchFamily="34" charset="-122"/>
                 <a:cs typeface="Segoe UI" pitchFamily="34" charset="-120"/>
               </a:rPr>
-              <a:t>Day / Night rosters, handover stats, and a "view as" perspective switch.</a:t>
+              <a:t>No separate screen, no lost context.</a:t>
             </a:r>
             <a:endParaRPr lang="en-US" sz="1300" dirty="0"/>
           </a:p>
         </p:txBody>
       </p:sp>
-      <p:pic>
-        <p:nvPicPr>
-          <p:cNvPr id="8" name="Image 0" descr="/home/user/threenine/slides/assets/shifts.png">    </p:cNvPr>
-          <p:cNvPicPr>
-            <a:picLocks noChangeAspect="1"/>
-          </p:cNvPicPr>
-          <p:nvPr/>
-        </p:nvPicPr>
-        <p:blipFill>
-          <a:blip r:embed="rId1"/>
-          <a:srcRect l="0" r="0" t="0" b="0"/>
-          <a:stretch/>
-        </p:blipFill>
-        <p:spPr>
-          <a:xfrm>
-            <a:off x="731520" y="1828800"/>
-            <a:ext cx="10698480" cy="1828800"/>
-          </a:xfrm>
-          <a:prstGeom prst="rect">
-            <a:avLst/>
-          </a:prstGeom>
-        </p:spPr>
-      </p:pic>
-      <p:sp>
-        <p:nvSpPr>
-          <p:cNvPr id="9" name="Text 6"/>
-          <p:cNvSpPr/>
-          <p:nvPr/>
-        </p:nvSpPr>
-        <p:spPr>
-          <a:xfrm>
-            <a:off x="640080" y="4206240"/>
-            <a:ext cx="10881360" cy="1463040"/>
+      <p:sp>
+        <p:nvSpPr>
+          <p:cNvPr id="8" name="Text 6"/>
+          <p:cNvSpPr/>
+          <p:nvPr/>
+        </p:nvSpPr>
+        <p:spPr>
+          <a:xfrm>
+            <a:off x="640080" y="1737360"/>
+            <a:ext cx="10881360" cy="2011680"/>
           </a:xfrm>
           <a:prstGeom prst="rect">
             <a:avLst/>
@@ -7511,7 +9266,7 @@
                 <a:ea typeface="Segoe UI" pitchFamily="34" charset="-122"/>
                 <a:cs typeface="Segoe UI" pitchFamily="34" charset="-120"/>
               </a:rPr>
-              <a:t>See who is on, what was handed over, and what still needs a note.</a:t>
+              <a:t>One structured note per case, labelled Day → Night.</a:t>
             </a:r>
             <a:endParaRPr lang="en-US" sz="1550" dirty="0"/>
           </a:p>
@@ -7535,12 +9290,83 @@
                 <a:ea typeface="Segoe UI" pitchFamily="34" charset="-122"/>
                 <a:cs typeface="Segoe UI" pitchFamily="34" charset="-120"/>
               </a:rPr>
-              <a:t>Switch the active operator to see exactly what they see.</a:t>
+              <a:t>Write it straight from the card (⚠ Note) or the reading panel.</a:t>
             </a:r>
             <a:endParaRPr lang="en-US" sz="1550" dirty="0"/>
           </a:p>
-        </p:txBody>
-      </p:sp>
+          <a:p>
+            <a:pPr marL="177800" indent="-177800">
+              <a:lnSpc>
+                <a:spcPct val="115000"/>
+              </a:lnSpc>
+              <a:spcAft>
+                <a:spcPts val="800"/>
+              </a:spcAft>
+              <a:buSzPct val="100000"/>
+              <a:buChar char="•"/>
+            </a:pPr>
+            <a:r>
+              <a:rPr lang="en-US" sz="1550" dirty="0">
+                <a:solidFill>
+                  <a:srgbClr val="111827"/>
+                </a:solidFill>
+                <a:latin typeface="Segoe UI" pitchFamily="34" charset="0"/>
+                <a:ea typeface="Segoe UI" pitchFamily="34" charset="-122"/>
+                <a:cs typeface="Segoe UI" pitchFamily="34" charset="-120"/>
+              </a:rPr>
+              <a:t>A banner flags open cases that still need a fresh note before cutover.</a:t>
+            </a:r>
+            <a:endParaRPr lang="en-US" sz="1550" dirty="0"/>
+          </a:p>
+          <a:p>
+            <a:pPr marL="177800" indent="-177800">
+              <a:lnSpc>
+                <a:spcPct val="115000"/>
+              </a:lnSpc>
+              <a:spcAft>
+                <a:spcPts val="800"/>
+              </a:spcAft>
+              <a:buSzPct val="100000"/>
+              <a:buChar char="•"/>
+            </a:pPr>
+            <a:r>
+              <a:rPr lang="en-US" sz="1550" dirty="0">
+                <a:solidFill>
+                  <a:srgbClr val="111827"/>
+                </a:solidFill>
+                <a:latin typeface="Segoe UI" pitchFamily="34" charset="0"/>
+                <a:ea typeface="Segoe UI" pitchFamily="34" charset="-122"/>
+                <a:cs typeface="Segoe UI" pitchFamily="34" charset="-120"/>
+              </a:rPr>
+              <a:t>Yellow = stale for the current shift and needs a rewrite.</a:t>
+            </a:r>
+            <a:endParaRPr lang="en-US" sz="1550" dirty="0"/>
+          </a:p>
+        </p:txBody>
+      </p:sp>
+      <p:pic>
+        <p:nvPicPr>
+          <p:cNvPr id="9" name="Image 0" descr="/Users/hsinglintsai/Documents/Claude/CC/threenine/.claude/worktrees/implement-review-fixes/slides/assets/handover.png">    </p:cNvPr>
+          <p:cNvPicPr>
+            <a:picLocks noChangeAspect="1"/>
+          </p:cNvPicPr>
+          <p:nvPr/>
+        </p:nvPicPr>
+        <p:blipFill>
+          <a:blip r:embed="rId1"/>
+          <a:srcRect l="0" r="0" t="0" b="0"/>
+          <a:stretch/>
+        </p:blipFill>
+        <p:spPr>
+          <a:xfrm>
+            <a:off x="822960" y="4114800"/>
+            <a:ext cx="10515600" cy="1280160"/>
+          </a:xfrm>
+          <a:prstGeom prst="rect">
+            <a:avLst/>
+          </a:prstGeom>
+        </p:spPr>
+      </p:pic>
     </p:spTree>
   </p:cSld>
   <p:clrMapOvr>

--- a/slides/Case-Tracker-Overview.pptx
+++ b/slides/Case-Tracker-Overview.pptx
@@ -21,9 +21,10 @@
     <p:sldId id="269" r:id="rId15"/>
     <p:sldId id="270" r:id="rId16"/>
     <p:sldId id="271" r:id="rId17"/>
+    <p:sldId id="272" r:id="rId18"/>
   </p:sldIdLst>
   <p:notesMasterIdLst>
-    <p:notesMasterId r:id="rId18"/>
+    <p:notesMasterId r:id="rId19"/>
   </p:notesMasterIdLst>
   <p:sldSz cx="12192000" cy="6858000"/>
   <p:notesSz cx="6858000" cy="12192000"/>
@@ -1157,6 +1158,94 @@
             <a:fld id="{F7021451-1387-4CA6-816F-3879F97B5CBC}" type="slidenum">
               <a:rPr lang="en-US"/>
               <a:t>16</a:t>
+            </a:fld>
+            <a:endParaRPr lang="en-US"/>
+          </a:p>
+        </p:txBody>
+      </p:sp>
+    </p:spTree>
+    <p:extLst>
+      <p:ext uri="{BB962C8B-B14F-4D97-AF65-F5344CB8AC3E}">
+        <p14:creationId xmlns:p14="http://schemas.microsoft.com/office/powerpoint/2010/main" val="1024086991"/>
+      </p:ext>
+    </p:extLst>
+  </p:cSld>
+  <p:clrMapOvr>
+    <a:masterClrMapping/>
+  </p:clrMapOvr>
+</p:notes>
+</file>
+
+<file path=ppt/notesSlides/notesSlide17.xml><?xml version="1.0" encoding="utf-8"?>
+<p:notes xmlns:a="http://schemas.openxmlformats.org/drawingml/2006/main" xmlns:r="http://schemas.openxmlformats.org/officeDocument/2006/relationships" xmlns:p="http://schemas.openxmlformats.org/presentationml/2006/main">
+  <p:cSld>
+    <p:spTree>
+      <p:nvGrpSpPr>
+        <p:cNvPr id="1" name=""/>
+        <p:cNvGrpSpPr/>
+        <p:nvPr/>
+      </p:nvGrpSpPr>
+      <p:grpSpPr>
+        <a:xfrm>
+          <a:off x="0" y="0"/>
+          <a:ext cx="0" cy="0"/>
+          <a:chOff x="0" y="0"/>
+          <a:chExt cx="0" cy="0"/>
+        </a:xfrm>
+      </p:grpSpPr>
+      <p:sp>
+        <p:nvSpPr>
+          <p:cNvPr id="2" name="Slide Image Placeholder 1"/>
+          <p:cNvSpPr>
+            <a:spLocks noGrp="1" noRot="1" noChangeAspect="1"/>
+          </p:cNvSpPr>
+          <p:nvPr>
+            <p:ph type="sldImg"/>
+          </p:nvPr>
+        </p:nvSpPr>
+        <p:spPr/>
+      </p:sp>
+      <p:sp>
+        <p:nvSpPr>
+          <p:cNvPr id="3" name="Notes Placeholder 2"/>
+          <p:cNvSpPr>
+            <a:spLocks noGrp="1"/>
+          </p:cNvSpPr>
+          <p:nvPr>
+            <p:ph type="body" idx="1"/>
+          </p:nvPr>
+        </p:nvSpPr>
+        <p:spPr/>
+        <p:txBody>
+          <a:bodyPr/>
+          <a:lstStyle/>
+          <a:p>
+            <a:r>
+              <a:rPr lang="en-US" dirty="0"/>
+              <a:t/>
+            </a:r>
+            <a:endParaRPr lang="en-US" dirty="0"/>
+          </a:p>
+        </p:txBody>
+      </p:sp>
+      <p:sp>
+        <p:nvSpPr>
+          <p:cNvPr id="4" name="Slide Number Placeholder 3"/>
+          <p:cNvSpPr>
+            <a:spLocks noGrp="1"/>
+          </p:cNvSpPr>
+          <p:nvPr>
+            <p:ph type="sldNum" sz="quarter" idx="10"/>
+          </p:nvPr>
+        </p:nvSpPr>
+        <p:spPr/>
+        <p:txBody>
+          <a:bodyPr/>
+          <a:lstStyle/>
+          <a:p>
+            <a:fld id="{F7021451-1387-4CA6-816F-3879F97B5CBC}" type="slidenum">
+              <a:rPr lang="en-US"/>
+              <a:t>17</a:t>
             </a:fld>
             <a:endParaRPr lang="en-US"/>
           </a:p>
@@ -5166,6 +5255,841 @@
         </p:nvSpPr>
         <p:spPr>
           <a:xfrm>
+            <a:off x="548640" y="6419088"/>
+            <a:ext cx="11091672" cy="0"/>
+          </a:xfrm>
+          <a:prstGeom prst="line">
+            <a:avLst/>
+          </a:prstGeom>
+          <a:noFill/>
+          <a:ln w="12700">
+            <a:solidFill>
+              <a:srgbClr val="E5E7EB"/>
+            </a:solidFill>
+            <a:prstDash val="solid"/>
+          </a:ln>
+        </p:spPr>
+      </p:sp>
+      <p:sp>
+        <p:nvSpPr>
+          <p:cNvPr id="3" name="Text 1"/>
+          <p:cNvSpPr/>
+          <p:nvPr/>
+        </p:nvSpPr>
+        <p:spPr>
+          <a:xfrm>
+            <a:off x="548640" y="6437376"/>
+            <a:ext cx="9144000" cy="292608"/>
+          </a:xfrm>
+          <a:prstGeom prst="rect">
+            <a:avLst/>
+          </a:prstGeom>
+          <a:noFill/>
+          <a:ln/>
+        </p:spPr>
+        <p:txBody>
+          <a:bodyPr wrap="square" rtlCol="0" anchor="ctr"/>
+          <a:lstStyle/>
+          <a:p>
+            <a:pPr algn="l" indent="0" marL="0">
+              <a:buNone/>
+            </a:pPr>
+            <a:r>
+              <a:rPr lang="en-US" sz="900" dirty="0">
+                <a:solidFill>
+                  <a:srgbClr val="6B7280"/>
+                </a:solidFill>
+                <a:latin typeface="Segoe UI" pitchFamily="34" charset="0"/>
+                <a:ea typeface="Segoe UI" pitchFamily="34" charset="-122"/>
+                <a:cs typeface="Segoe UI" pitchFamily="34" charset="-120"/>
+              </a:rPr>
+              <a:t>Case Tracker  ·  https://hltsai9.github.io/threenine/</a:t>
+            </a:r>
+            <a:endParaRPr lang="en-US" sz="900" dirty="0"/>
+          </a:p>
+        </p:txBody>
+      </p:sp>
+      <p:sp>
+        <p:nvSpPr>
+          <p:cNvPr id="4" name="Text 2"/>
+          <p:cNvSpPr/>
+          <p:nvPr/>
+        </p:nvSpPr>
+        <p:spPr>
+          <a:xfrm>
+            <a:off x="10972800" y="6437376"/>
+            <a:ext cx="640080" cy="292608"/>
+          </a:xfrm>
+          <a:prstGeom prst="rect">
+            <a:avLst/>
+          </a:prstGeom>
+          <a:noFill/>
+          <a:ln/>
+        </p:spPr>
+        <p:txBody>
+          <a:bodyPr wrap="square" rtlCol="0" anchor="ctr"/>
+          <a:lstStyle/>
+          <a:p>
+            <a:pPr algn="r" indent="0" marL="0">
+              <a:buNone/>
+            </a:pPr>
+            <a:r>
+              <a:rPr lang="en-US" sz="900" dirty="0">
+                <a:solidFill>
+                  <a:srgbClr val="6B7280"/>
+                </a:solidFill>
+                <a:latin typeface="Segoe UI" pitchFamily="34" charset="0"/>
+                <a:ea typeface="Segoe UI" pitchFamily="34" charset="-122"/>
+                <a:cs typeface="Segoe UI" pitchFamily="34" charset="-120"/>
+              </a:rPr>
+              <a:t>15</a:t>
+            </a:r>
+            <a:endParaRPr lang="en-US" sz="900" dirty="0"/>
+          </a:p>
+        </p:txBody>
+      </p:sp>
+      <p:sp>
+        <p:nvSpPr>
+          <p:cNvPr id="5" name="Text 3"/>
+          <p:cNvSpPr/>
+          <p:nvPr/>
+        </p:nvSpPr>
+        <p:spPr>
+          <a:xfrm>
+            <a:off x="548640" y="411480"/>
+            <a:ext cx="11064240" cy="640080"/>
+          </a:xfrm>
+          <a:prstGeom prst="rect">
+            <a:avLst/>
+          </a:prstGeom>
+          <a:noFill/>
+          <a:ln/>
+        </p:spPr>
+        <p:txBody>
+          <a:bodyPr wrap="square" rtlCol="0" anchor="ctr"/>
+          <a:lstStyle/>
+          <a:p>
+            <a:pPr indent="0" marL="0">
+              <a:buNone/>
+            </a:pPr>
+            <a:r>
+              <a:rPr lang="en-US" sz="2600" b="1" dirty="0">
+                <a:solidFill>
+                  <a:srgbClr val="1F2937"/>
+                </a:solidFill>
+                <a:latin typeface="Segoe UI" pitchFamily="34" charset="0"/>
+                <a:ea typeface="Segoe UI" pitchFamily="34" charset="-122"/>
+                <a:cs typeface="Segoe UI" pitchFamily="34" charset="-120"/>
+              </a:rPr>
+              <a:t>What it runs on</a:t>
+            </a:r>
+            <a:endParaRPr lang="en-US" sz="2600" dirty="0"/>
+          </a:p>
+        </p:txBody>
+      </p:sp>
+      <p:sp>
+        <p:nvSpPr>
+          <p:cNvPr id="6" name="Shape 4"/>
+          <p:cNvSpPr/>
+          <p:nvPr/>
+        </p:nvSpPr>
+        <p:spPr>
+          <a:xfrm>
+            <a:off x="566928" y="1078992"/>
+            <a:ext cx="1280160" cy="54864"/>
+          </a:xfrm>
+          <a:prstGeom prst="rect">
+            <a:avLst/>
+          </a:prstGeom>
+          <a:solidFill>
+            <a:srgbClr val="2563EB"/>
+          </a:solidFill>
+          <a:ln/>
+        </p:spPr>
+      </p:sp>
+      <p:sp>
+        <p:nvSpPr>
+          <p:cNvPr id="7" name="Text 5"/>
+          <p:cNvSpPr/>
+          <p:nvPr/>
+        </p:nvSpPr>
+        <p:spPr>
+          <a:xfrm>
+            <a:off x="548640" y="1152144"/>
+            <a:ext cx="11064240" cy="365760"/>
+          </a:xfrm>
+          <a:prstGeom prst="rect">
+            <a:avLst/>
+          </a:prstGeom>
+          <a:noFill/>
+          <a:ln/>
+        </p:spPr>
+        <p:txBody>
+          <a:bodyPr wrap="square" rtlCol="0" anchor="ctr"/>
+          <a:lstStyle/>
+          <a:p>
+            <a:pPr indent="0" marL="0">
+              <a:buNone/>
+            </a:pPr>
+            <a:r>
+              <a:rPr lang="en-US" sz="1300" dirty="0">
+                <a:solidFill>
+                  <a:srgbClr val="6B7280"/>
+                </a:solidFill>
+                <a:latin typeface="Segoe UI" pitchFamily="34" charset="0"/>
+                <a:ea typeface="Segoe UI" pitchFamily="34" charset="-122"/>
+                <a:cs typeface="Segoe UI" pitchFamily="34" charset="-120"/>
+              </a:rPr>
+              <a:t>A Python web service + PostgreSQL. Node is build-time only — never needed to run the site.</a:t>
+            </a:r>
+            <a:endParaRPr lang="en-US" sz="1300" dirty="0"/>
+          </a:p>
+        </p:txBody>
+      </p:sp>
+      <p:sp>
+        <p:nvSpPr>
+          <p:cNvPr id="8" name="Shape 6"/>
+          <p:cNvSpPr/>
+          <p:nvPr/>
+        </p:nvSpPr>
+        <p:spPr>
+          <a:xfrm>
+            <a:off x="822960" y="1783080"/>
+            <a:ext cx="658368" cy="658368"/>
+          </a:xfrm>
+          <a:prstGeom prst="ellipse">
+            <a:avLst/>
+          </a:prstGeom>
+          <a:solidFill>
+            <a:srgbClr val="EEF2FF"/>
+          </a:solidFill>
+          <a:ln w="12700">
+            <a:solidFill>
+              <a:srgbClr val="E5E7EB"/>
+            </a:solidFill>
+            <a:prstDash val="solid"/>
+          </a:ln>
+        </p:spPr>
+      </p:sp>
+      <p:sp>
+        <p:nvSpPr>
+          <p:cNvPr id="9" name="Text 7"/>
+          <p:cNvSpPr/>
+          <p:nvPr/>
+        </p:nvSpPr>
+        <p:spPr>
+          <a:xfrm>
+            <a:off x="822960" y="1783080"/>
+            <a:ext cx="658368" cy="658368"/>
+          </a:xfrm>
+          <a:prstGeom prst="rect">
+            <a:avLst/>
+          </a:prstGeom>
+          <a:noFill/>
+          <a:ln/>
+        </p:spPr>
+        <p:txBody>
+          <a:bodyPr wrap="square" rtlCol="0" anchor="ctr"/>
+          <a:lstStyle/>
+          <a:p>
+            <a:pPr algn="ctr" indent="0" marL="0">
+              <a:buNone/>
+            </a:pPr>
+            <a:r>
+              <a:rPr lang="en-US" sz="2600" dirty="0">
+                <a:solidFill>
+                  <a:srgbClr val="000000"/>
+                </a:solidFill>
+                <a:latin typeface="Segoe UI" pitchFamily="34" charset="0"/>
+                <a:ea typeface="Segoe UI" pitchFamily="34" charset="-122"/>
+                <a:cs typeface="Segoe UI" pitchFamily="34" charset="-120"/>
+              </a:rPr>
+              <a:t>🌐</a:t>
+            </a:r>
+            <a:endParaRPr lang="en-US" sz="2600" dirty="0"/>
+          </a:p>
+        </p:txBody>
+      </p:sp>
+      <p:sp>
+        <p:nvSpPr>
+          <p:cNvPr id="10" name="Text 8"/>
+          <p:cNvSpPr/>
+          <p:nvPr/>
+        </p:nvSpPr>
+        <p:spPr>
+          <a:xfrm>
+            <a:off x="1783080" y="1728216"/>
+            <a:ext cx="9601200" cy="768096"/>
+          </a:xfrm>
+          <a:prstGeom prst="rect">
+            <a:avLst/>
+          </a:prstGeom>
+          <a:noFill/>
+          <a:ln/>
+        </p:spPr>
+        <p:txBody>
+          <a:bodyPr wrap="square" rtlCol="0" anchor="ctr"/>
+          <a:lstStyle/>
+          <a:p>
+            <a:pPr indent="0" marL="0">
+              <a:lnSpc>
+                <a:spcPct val="105000"/>
+              </a:lnSpc>
+              <a:buNone/>
+            </a:pPr>
+            <a:r>
+              <a:rPr lang="en-US" sz="1700" b="1" dirty="0">
+                <a:solidFill>
+                  <a:srgbClr val="1F2937"/>
+                </a:solidFill>
+                <a:latin typeface="Segoe UI" pitchFamily="34" charset="0"/>
+                <a:ea typeface="Segoe UI" pitchFamily="34" charset="-122"/>
+                <a:cs typeface="Segoe UI" pitchFamily="34" charset="-120"/>
+              </a:rPr>
+              <a:t>Front end — the web app
+</a:t>
+            </a:r>
+            <a:pPr indent="0" marL="0">
+              <a:lnSpc>
+                <a:spcPct val="105000"/>
+              </a:lnSpc>
+              <a:buNone/>
+            </a:pPr>
+            <a:r>
+              <a:rPr lang="en-US" sz="1400" dirty="0">
+                <a:solidFill>
+                  <a:srgbClr val="6B7280"/>
+                </a:solidFill>
+                <a:latin typeface="Segoe UI" pitchFamily="34" charset="0"/>
+                <a:ea typeface="Segoe UI" pitchFamily="34" charset="-122"/>
+                <a:cs typeface="Segoe UI" pitchFamily="34" charset="-120"/>
+              </a:rPr>
+              <a:t>Plain HTML / CSS / vanilla JavaScript. No framework, no Node in the browser; just static files.</a:t>
+            </a:r>
+            <a:endParaRPr lang="en-US" sz="1700" dirty="0"/>
+          </a:p>
+        </p:txBody>
+      </p:sp>
+      <p:sp>
+        <p:nvSpPr>
+          <p:cNvPr id="11" name="Shape 9"/>
+          <p:cNvSpPr/>
+          <p:nvPr/>
+        </p:nvSpPr>
+        <p:spPr>
+          <a:xfrm>
+            <a:off x="822960" y="2697480"/>
+            <a:ext cx="658368" cy="658368"/>
+          </a:xfrm>
+          <a:prstGeom prst="ellipse">
+            <a:avLst/>
+          </a:prstGeom>
+          <a:solidFill>
+            <a:srgbClr val="E8F2EC"/>
+          </a:solidFill>
+          <a:ln w="12700">
+            <a:solidFill>
+              <a:srgbClr val="E5E7EB"/>
+            </a:solidFill>
+            <a:prstDash val="solid"/>
+          </a:ln>
+        </p:spPr>
+      </p:sp>
+      <p:sp>
+        <p:nvSpPr>
+          <p:cNvPr id="12" name="Text 10"/>
+          <p:cNvSpPr/>
+          <p:nvPr/>
+        </p:nvSpPr>
+        <p:spPr>
+          <a:xfrm>
+            <a:off x="822960" y="2697480"/>
+            <a:ext cx="658368" cy="658368"/>
+          </a:xfrm>
+          <a:prstGeom prst="rect">
+            <a:avLst/>
+          </a:prstGeom>
+          <a:noFill/>
+          <a:ln/>
+        </p:spPr>
+        <p:txBody>
+          <a:bodyPr wrap="square" rtlCol="0" anchor="ctr"/>
+          <a:lstStyle/>
+          <a:p>
+            <a:pPr algn="ctr" indent="0" marL="0">
+              <a:buNone/>
+            </a:pPr>
+            <a:r>
+              <a:rPr lang="en-US" sz="2600" dirty="0">
+                <a:solidFill>
+                  <a:srgbClr val="000000"/>
+                </a:solidFill>
+                <a:latin typeface="Segoe UI" pitchFamily="34" charset="0"/>
+                <a:ea typeface="Segoe UI" pitchFamily="34" charset="-122"/>
+                <a:cs typeface="Segoe UI" pitchFamily="34" charset="-120"/>
+              </a:rPr>
+              <a:t>🐍</a:t>
+            </a:r>
+            <a:endParaRPr lang="en-US" sz="2600" dirty="0"/>
+          </a:p>
+        </p:txBody>
+      </p:sp>
+      <p:sp>
+        <p:nvSpPr>
+          <p:cNvPr id="13" name="Text 11"/>
+          <p:cNvSpPr/>
+          <p:nvPr/>
+        </p:nvSpPr>
+        <p:spPr>
+          <a:xfrm>
+            <a:off x="1783080" y="2642616"/>
+            <a:ext cx="9601200" cy="768096"/>
+          </a:xfrm>
+          <a:prstGeom prst="rect">
+            <a:avLst/>
+          </a:prstGeom>
+          <a:noFill/>
+          <a:ln/>
+        </p:spPr>
+        <p:txBody>
+          <a:bodyPr wrap="square" rtlCol="0" anchor="ctr"/>
+          <a:lstStyle/>
+          <a:p>
+            <a:pPr indent="0" marL="0">
+              <a:lnSpc>
+                <a:spcPct val="105000"/>
+              </a:lnSpc>
+              <a:buNone/>
+            </a:pPr>
+            <a:r>
+              <a:rPr lang="en-US" sz="1700" b="1" dirty="0">
+                <a:solidFill>
+                  <a:srgbClr val="1F2937"/>
+                </a:solidFill>
+                <a:latin typeface="Segoe UI" pitchFamily="34" charset="0"/>
+                <a:ea typeface="Segoe UI" pitchFamily="34" charset="-122"/>
+                <a:cs typeface="Segoe UI" pitchFamily="34" charset="-120"/>
+              </a:rPr>
+              <a:t>Back end — web server + API
+</a:t>
+            </a:r>
+            <a:pPr indent="0" marL="0">
+              <a:lnSpc>
+                <a:spcPct val="105000"/>
+              </a:lnSpc>
+              <a:buNone/>
+            </a:pPr>
+            <a:r>
+              <a:rPr lang="en-US" sz="1400" dirty="0">
+                <a:solidFill>
+                  <a:srgbClr val="6B7280"/>
+                </a:solidFill>
+                <a:latin typeface="Segoe UI" pitchFamily="34" charset="0"/>
+                <a:ea typeface="Segoe UI" pitchFamily="34" charset="-122"/>
+                <a:cs typeface="Segoe UI" pitchFamily="34" charset="-120"/>
+              </a:rPr>
+              <a:t>Python · FastAPI · uvicorn. Serves the app and the /api endpoints from one origin.</a:t>
+            </a:r>
+            <a:endParaRPr lang="en-US" sz="1700" dirty="0"/>
+          </a:p>
+        </p:txBody>
+      </p:sp>
+      <p:sp>
+        <p:nvSpPr>
+          <p:cNvPr id="14" name="Shape 12"/>
+          <p:cNvSpPr/>
+          <p:nvPr/>
+        </p:nvSpPr>
+        <p:spPr>
+          <a:xfrm>
+            <a:off x="822960" y="3611880"/>
+            <a:ext cx="658368" cy="658368"/>
+          </a:xfrm>
+          <a:prstGeom prst="ellipse">
+            <a:avLst/>
+          </a:prstGeom>
+          <a:solidFill>
+            <a:srgbClr val="EFF6FF"/>
+          </a:solidFill>
+          <a:ln w="12700">
+            <a:solidFill>
+              <a:srgbClr val="E5E7EB"/>
+            </a:solidFill>
+            <a:prstDash val="solid"/>
+          </a:ln>
+        </p:spPr>
+      </p:sp>
+      <p:sp>
+        <p:nvSpPr>
+          <p:cNvPr id="15" name="Text 13"/>
+          <p:cNvSpPr/>
+          <p:nvPr/>
+        </p:nvSpPr>
+        <p:spPr>
+          <a:xfrm>
+            <a:off x="822960" y="3611880"/>
+            <a:ext cx="658368" cy="658368"/>
+          </a:xfrm>
+          <a:prstGeom prst="rect">
+            <a:avLst/>
+          </a:prstGeom>
+          <a:noFill/>
+          <a:ln/>
+        </p:spPr>
+        <p:txBody>
+          <a:bodyPr wrap="square" rtlCol="0" anchor="ctr"/>
+          <a:lstStyle/>
+          <a:p>
+            <a:pPr algn="ctr" indent="0" marL="0">
+              <a:buNone/>
+            </a:pPr>
+            <a:r>
+              <a:rPr lang="en-US" sz="2600" dirty="0">
+                <a:solidFill>
+                  <a:srgbClr val="000000"/>
+                </a:solidFill>
+                <a:latin typeface="Segoe UI" pitchFamily="34" charset="0"/>
+                <a:ea typeface="Segoe UI" pitchFamily="34" charset="-122"/>
+                <a:cs typeface="Segoe UI" pitchFamily="34" charset="-120"/>
+              </a:rPr>
+              <a:t>🐘</a:t>
+            </a:r>
+            <a:endParaRPr lang="en-US" sz="2600" dirty="0"/>
+          </a:p>
+        </p:txBody>
+      </p:sp>
+      <p:sp>
+        <p:nvSpPr>
+          <p:cNvPr id="16" name="Text 14"/>
+          <p:cNvSpPr/>
+          <p:nvPr/>
+        </p:nvSpPr>
+        <p:spPr>
+          <a:xfrm>
+            <a:off x="1783080" y="3557016"/>
+            <a:ext cx="9601200" cy="768096"/>
+          </a:xfrm>
+          <a:prstGeom prst="rect">
+            <a:avLst/>
+          </a:prstGeom>
+          <a:noFill/>
+          <a:ln/>
+        </p:spPr>
+        <p:txBody>
+          <a:bodyPr wrap="square" rtlCol="0" anchor="ctr"/>
+          <a:lstStyle/>
+          <a:p>
+            <a:pPr indent="0" marL="0">
+              <a:lnSpc>
+                <a:spcPct val="105000"/>
+              </a:lnSpc>
+              <a:buNone/>
+            </a:pPr>
+            <a:r>
+              <a:rPr lang="en-US" sz="1700" b="1" dirty="0">
+                <a:solidFill>
+                  <a:srgbClr val="1F2937"/>
+                </a:solidFill>
+                <a:latin typeface="Segoe UI" pitchFamily="34" charset="0"/>
+                <a:ea typeface="Segoe UI" pitchFamily="34" charset="-122"/>
+                <a:cs typeface="Segoe UI" pitchFamily="34" charset="-120"/>
+              </a:rPr>
+              <a:t>Database
+</a:t>
+            </a:r>
+            <a:pPr indent="0" marL="0">
+              <a:lnSpc>
+                <a:spcPct val="105000"/>
+              </a:lnSpc>
+              <a:buNone/>
+            </a:pPr>
+            <a:r>
+              <a:rPr lang="en-US" sz="1400" dirty="0">
+                <a:solidFill>
+                  <a:srgbClr val="6B7280"/>
+                </a:solidFill>
+                <a:latin typeface="Segoe UI" pitchFamily="34" charset="0"/>
+                <a:ea typeface="Segoe UI" pitchFamily="34" charset="-122"/>
+                <a:cs typeface="Segoe UI" pitchFamily="34" charset="-120"/>
+              </a:rPr>
+              <a:t>PostgreSQL — one shared, live board for every operator and device.</a:t>
+            </a:r>
+            <a:endParaRPr lang="en-US" sz="1700" dirty="0"/>
+          </a:p>
+        </p:txBody>
+      </p:sp>
+      <p:sp>
+        <p:nvSpPr>
+          <p:cNvPr id="17" name="Shape 15"/>
+          <p:cNvSpPr/>
+          <p:nvPr/>
+        </p:nvSpPr>
+        <p:spPr>
+          <a:xfrm>
+            <a:off x="822960" y="4526280"/>
+            <a:ext cx="658368" cy="658368"/>
+          </a:xfrm>
+          <a:prstGeom prst="ellipse">
+            <a:avLst/>
+          </a:prstGeom>
+          <a:solidFill>
+            <a:srgbClr val="FFFBEB"/>
+          </a:solidFill>
+          <a:ln w="12700">
+            <a:solidFill>
+              <a:srgbClr val="E5E7EB"/>
+            </a:solidFill>
+            <a:prstDash val="solid"/>
+          </a:ln>
+        </p:spPr>
+      </p:sp>
+      <p:sp>
+        <p:nvSpPr>
+          <p:cNvPr id="18" name="Text 16"/>
+          <p:cNvSpPr/>
+          <p:nvPr/>
+        </p:nvSpPr>
+        <p:spPr>
+          <a:xfrm>
+            <a:off x="822960" y="4526280"/>
+            <a:ext cx="658368" cy="658368"/>
+          </a:xfrm>
+          <a:prstGeom prst="rect">
+            <a:avLst/>
+          </a:prstGeom>
+          <a:noFill/>
+          <a:ln/>
+        </p:spPr>
+        <p:txBody>
+          <a:bodyPr wrap="square" rtlCol="0" anchor="ctr"/>
+          <a:lstStyle/>
+          <a:p>
+            <a:pPr algn="ctr" indent="0" marL="0">
+              <a:buNone/>
+            </a:pPr>
+            <a:r>
+              <a:rPr lang="en-US" sz="2600" dirty="0">
+                <a:solidFill>
+                  <a:srgbClr val="000000"/>
+                </a:solidFill>
+                <a:latin typeface="Segoe UI" pitchFamily="34" charset="0"/>
+                <a:ea typeface="Segoe UI" pitchFamily="34" charset="-122"/>
+                <a:cs typeface="Segoe UI" pitchFamily="34" charset="-120"/>
+              </a:rPr>
+              <a:t>⏱️</a:t>
+            </a:r>
+            <a:endParaRPr lang="en-US" sz="2600" dirty="0"/>
+          </a:p>
+        </p:txBody>
+      </p:sp>
+      <p:sp>
+        <p:nvSpPr>
+          <p:cNvPr id="19" name="Text 17"/>
+          <p:cNvSpPr/>
+          <p:nvPr/>
+        </p:nvSpPr>
+        <p:spPr>
+          <a:xfrm>
+            <a:off x="1783080" y="4471416"/>
+            <a:ext cx="9601200" cy="768096"/>
+          </a:xfrm>
+          <a:prstGeom prst="rect">
+            <a:avLst/>
+          </a:prstGeom>
+          <a:noFill/>
+          <a:ln/>
+        </p:spPr>
+        <p:txBody>
+          <a:bodyPr wrap="square" rtlCol="0" anchor="ctr"/>
+          <a:lstStyle/>
+          <a:p>
+            <a:pPr indent="0" marL="0">
+              <a:lnSpc>
+                <a:spcPct val="105000"/>
+              </a:lnSpc>
+              <a:buNone/>
+            </a:pPr>
+            <a:r>
+              <a:rPr lang="en-US" sz="1700" b="1" dirty="0">
+                <a:solidFill>
+                  <a:srgbClr val="1F2937"/>
+                </a:solidFill>
+                <a:latin typeface="Segoe UI" pitchFamily="34" charset="0"/>
+                <a:ea typeface="Segoe UI" pitchFamily="34" charset="-122"/>
+                <a:cs typeface="Segoe UI" pitchFamily="34" charset="-120"/>
+              </a:rPr>
+              <a:t>Data sync
+</a:t>
+            </a:r>
+            <a:pPr indent="0" marL="0">
+              <a:lnSpc>
+                <a:spcPct val="105000"/>
+              </a:lnSpc>
+              <a:buNone/>
+            </a:pPr>
+            <a:r>
+              <a:rPr lang="en-US" sz="1400" dirty="0">
+                <a:solidFill>
+                  <a:srgbClr val="6B7280"/>
+                </a:solidFill>
+                <a:latin typeface="Segoe UI" pitchFamily="34" charset="0"/>
+                <a:ea typeface="Segoe UI" pitchFamily="34" charset="-122"/>
+                <a:cs typeface="Segoe UI" pitchFamily="34" charset="-120"/>
+              </a:rPr>
+              <a:t>A scheduled Python job pulls from Case Center on a timer (systemd / cron).</a:t>
+            </a:r>
+            <a:endParaRPr lang="en-US" sz="1700" dirty="0"/>
+          </a:p>
+        </p:txBody>
+      </p:sp>
+      <p:sp>
+        <p:nvSpPr>
+          <p:cNvPr id="20" name="Shape 18"/>
+          <p:cNvSpPr/>
+          <p:nvPr/>
+        </p:nvSpPr>
+        <p:spPr>
+          <a:xfrm>
+            <a:off x="822960" y="5486400"/>
+            <a:ext cx="10561320" cy="713232"/>
+          </a:xfrm>
+          <a:prstGeom prst="roundRect">
+            <a:avLst>
+              <a:gd name="adj" fmla="val 7692"/>
+            </a:avLst>
+          </a:prstGeom>
+          <a:solidFill>
+            <a:srgbClr val="F7FAFC"/>
+          </a:solidFill>
+          <a:ln w="12700">
+            <a:solidFill>
+              <a:srgbClr val="E5E7EB"/>
+            </a:solidFill>
+            <a:prstDash val="solid"/>
+          </a:ln>
+        </p:spPr>
+      </p:sp>
+      <p:sp>
+        <p:nvSpPr>
+          <p:cNvPr id="21" name="Text 19"/>
+          <p:cNvSpPr/>
+          <p:nvPr/>
+        </p:nvSpPr>
+        <p:spPr>
+          <a:xfrm>
+            <a:off x="1051560" y="5486400"/>
+            <a:ext cx="10149840" cy="713232"/>
+          </a:xfrm>
+          <a:prstGeom prst="rect">
+            <a:avLst/>
+          </a:prstGeom>
+          <a:noFill/>
+          <a:ln/>
+        </p:spPr>
+        <p:txBody>
+          <a:bodyPr wrap="square" rtlCol="0" anchor="ctr"/>
+          <a:lstStyle/>
+          <a:p>
+            <a:pPr indent="0" marL="0">
+              <a:buNone/>
+            </a:pPr>
+            <a:r>
+              <a:rPr lang="en-US" sz="1250" b="1" dirty="0">
+                <a:solidFill>
+                  <a:srgbClr val="111827"/>
+                </a:solidFill>
+                <a:latin typeface="Segoe UI" pitchFamily="34" charset="0"/>
+                <a:ea typeface="Segoe UI" pitchFamily="34" charset="-122"/>
+                <a:cs typeface="Segoe UI" pitchFamily="34" charset="-120"/>
+              </a:rPr>
+              <a:t>🔒 Optional: </a:t>
+            </a:r>
+            <a:pPr indent="0" marL="0">
+              <a:buNone/>
+            </a:pPr>
+            <a:r>
+              <a:rPr lang="en-US" sz="1250" dirty="0">
+                <a:solidFill>
+                  <a:srgbClr val="111827"/>
+                </a:solidFill>
+                <a:latin typeface="Segoe UI" pitchFamily="34" charset="0"/>
+                <a:ea typeface="Segoe UI" pitchFamily="34" charset="-122"/>
+                <a:cs typeface="Segoe UI" pitchFamily="34" charset="-120"/>
+              </a:rPr>
+              <a:t>nginx + HTTPS in front.    </a:t>
+            </a:r>
+            <a:pPr indent="0" marL="0">
+              <a:buNone/>
+            </a:pPr>
+            <a:r>
+              <a:rPr lang="en-US" sz="1250" b="1" dirty="0">
+                <a:solidFill>
+                  <a:srgbClr val="111827"/>
+                </a:solidFill>
+                <a:latin typeface="Segoe UI" pitchFamily="34" charset="0"/>
+                <a:ea typeface="Segoe UI" pitchFamily="34" charset="-122"/>
+                <a:cs typeface="Segoe UI" pitchFamily="34" charset="-120"/>
+              </a:rPr>
+              <a:t>🧰 Node.js is build-time only </a:t>
+            </a:r>
+            <a:pPr indent="0" marL="0">
+              <a:buNone/>
+            </a:pPr>
+            <a:r>
+              <a:rPr lang="en-US" sz="1250" dirty="0">
+                <a:solidFill>
+                  <a:srgbClr val="111827"/>
+                </a:solidFill>
+                <a:latin typeface="Segoe UI" pitchFamily="34" charset="0"/>
+                <a:ea typeface="Segoe UI" pitchFamily="34" charset="-122"/>
+                <a:cs typeface="Segoe UI" pitchFamily="34" charset="-120"/>
+              </a:rPr>
+              <a:t>(bundler · tests · this deck) — the running site needs only Python + PostgreSQL.</a:t>
+            </a:r>
+            <a:endParaRPr lang="en-US" sz="1250" dirty="0"/>
+          </a:p>
+        </p:txBody>
+      </p:sp>
+    </p:spTree>
+  </p:cSld>
+  <p:clrMapOvr>
+    <a:masterClrMapping/>
+  </p:clrMapOvr>
+</p:sld>
+</file>
+
+<file path=ppt/slides/slide17.xml><?xml version="1.0" encoding="utf-8"?>
+<p:sld xmlns:a="http://schemas.openxmlformats.org/drawingml/2006/main" xmlns:r="http://schemas.openxmlformats.org/officeDocument/2006/relationships" xmlns:p="http://schemas.openxmlformats.org/presentationml/2006/main">
+  <p:cSld name="Slide 17">
+    <p:bg>
+      <p:bgPr>
+        <a:solidFill>
+          <a:srgbClr val="FFFFFF"/>
+        </a:solidFill>
+      </p:bgPr>
+    </p:bg>
+    <p:spTree>
+      <p:nvGrpSpPr>
+        <p:cNvPr id="1" name=""/>
+        <p:cNvGrpSpPr/>
+        <p:nvPr/>
+      </p:nvGrpSpPr>
+      <p:grpSpPr>
+        <a:xfrm>
+          <a:off x="0" y="0"/>
+          <a:ext cx="0" cy="0"/>
+          <a:chOff x="0" y="0"/>
+          <a:chExt cx="0" cy="0"/>
+        </a:xfrm>
+      </p:grpSpPr>
+      <p:sp>
+        <p:nvSpPr>
+          <p:cNvPr id="2" name="Shape 0"/>
+          <p:cNvSpPr/>
+          <p:nvPr/>
+        </p:nvSpPr>
+        <p:spPr>
+          <a:xfrm>
             <a:off x="0" y="0"/>
             <a:ext cx="12191695" cy="256032"/>
           </a:xfrm>
